--- a/reference_material/slides/020_Linear_Least_Squares.pptx
+++ b/reference_material/slides/020_Linear_Least_Squares.pptx
@@ -5,26 +5,30 @@
     <p:sldMasterId id="2147483660" r:id="rId1"/>
   </p:sldMasterIdLst>
   <p:notesMasterIdLst>
-    <p:notesMasterId r:id="rId19"/>
+    <p:notesMasterId r:id="rId23"/>
   </p:notesMasterIdLst>
   <p:sldIdLst>
     <p:sldId id="282" r:id="rId2"/>
     <p:sldId id="256" r:id="rId3"/>
     <p:sldId id="257" r:id="rId4"/>
-    <p:sldId id="259" r:id="rId5"/>
-    <p:sldId id="264" r:id="rId6"/>
-    <p:sldId id="273" r:id="rId7"/>
-    <p:sldId id="269" r:id="rId8"/>
-    <p:sldId id="272" r:id="rId9"/>
-    <p:sldId id="276" r:id="rId10"/>
-    <p:sldId id="274" r:id="rId11"/>
-    <p:sldId id="277" r:id="rId12"/>
-    <p:sldId id="265" r:id="rId13"/>
-    <p:sldId id="275" r:id="rId14"/>
-    <p:sldId id="278" r:id="rId15"/>
-    <p:sldId id="279" r:id="rId16"/>
-    <p:sldId id="280" r:id="rId17"/>
-    <p:sldId id="281" r:id="rId18"/>
+    <p:sldId id="283" r:id="rId5"/>
+    <p:sldId id="259" r:id="rId6"/>
+    <p:sldId id="264" r:id="rId7"/>
+    <p:sldId id="273" r:id="rId8"/>
+    <p:sldId id="269" r:id="rId9"/>
+    <p:sldId id="272" r:id="rId10"/>
+    <p:sldId id="276" r:id="rId11"/>
+    <p:sldId id="274" r:id="rId12"/>
+    <p:sldId id="277" r:id="rId13"/>
+    <p:sldId id="284" r:id="rId14"/>
+    <p:sldId id="265" r:id="rId15"/>
+    <p:sldId id="286" r:id="rId16"/>
+    <p:sldId id="275" r:id="rId17"/>
+    <p:sldId id="278" r:id="rId18"/>
+    <p:sldId id="279" r:id="rId19"/>
+    <p:sldId id="280" r:id="rId20"/>
+    <p:sldId id="285" r:id="rId21"/>
+    <p:sldId id="281" r:id="rId22"/>
   </p:sldIdLst>
   <p:sldSz cx="12192000" cy="6858000"/>
   <p:notesSz cx="6858000" cy="9144000"/>
@@ -221,7 +225,7 @@
           <a:p>
             <a:fld id="{265333B3-BBF2-434F-9844-D2FF01DBD600}" type="datetimeFigureOut">
               <a:rPr lang="en-US" smtClean="0"/>
-              <a:t>11/4/22</a:t>
+              <a:t>11/13/25</a:t>
             </a:fld>
             <a:endParaRPr lang="en-US"/>
           </a:p>
@@ -834,8 +838,8 @@
         </p:nvSpPr>
         <p:spPr>
           <a:xfrm>
-            <a:off x="1143000" y="685800"/>
-            <a:ext cx="4572000" cy="3429000"/>
+            <a:off x="381000" y="685800"/>
+            <a:ext cx="6096000" cy="3429000"/>
           </a:xfrm>
           <a:custGeom>
             <a:avLst/>
@@ -1256,7 +1260,7 @@
           <a:p>
             <a:fld id="{43ED9329-DED2-9C4C-8B6A-8B4D879680E1}" type="datetimeFigureOut">
               <a:rPr lang="en-US" smtClean="0"/>
-              <a:t>11/4/22</a:t>
+              <a:t>11/13/25</a:t>
             </a:fld>
             <a:endParaRPr lang="en-US"/>
           </a:p>
@@ -1301,6 +1305,9 @@
             <a:off x="1437664" y="798973"/>
             <a:ext cx="811019" cy="503578"/>
           </a:xfrm>
+          <a:prstGeom prst="rect">
+            <a:avLst/>
+          </a:prstGeom>
         </p:spPr>
         <p:txBody>
           <a:bodyPr/>
@@ -1467,7 +1474,7 @@
           <a:p>
             <a:fld id="{43ED9329-DED2-9C4C-8B6A-8B4D879680E1}" type="datetimeFigureOut">
               <a:rPr lang="en-US" smtClean="0"/>
-              <a:t>11/4/22</a:t>
+              <a:t>11/13/25</a:t>
             </a:fld>
             <a:endParaRPr lang="en-US"/>
           </a:p>
@@ -1502,7 +1509,15 @@
             <p:ph type="sldNum" sz="quarter" idx="12"/>
           </p:nvPr>
         </p:nvSpPr>
-        <p:spPr/>
+        <p:spPr>
+          <a:xfrm>
+            <a:off x="480060" y="798973"/>
+            <a:ext cx="811019" cy="503578"/>
+          </a:xfrm>
+          <a:prstGeom prst="rect">
+            <a:avLst/>
+          </a:prstGeom>
+        </p:spPr>
         <p:txBody>
           <a:bodyPr/>
           <a:lstStyle/>
@@ -1682,7 +1697,7 @@
           <a:p>
             <a:fld id="{43ED9329-DED2-9C4C-8B6A-8B4D879680E1}" type="datetimeFigureOut">
               <a:rPr lang="en-US" smtClean="0"/>
-              <a:t>11/4/22</a:t>
+              <a:t>11/13/25</a:t>
             </a:fld>
             <a:endParaRPr lang="en-US"/>
           </a:p>
@@ -1717,7 +1732,15 @@
             <p:ph type="sldNum" sz="quarter" idx="12"/>
           </p:nvPr>
         </p:nvSpPr>
-        <p:spPr/>
+        <p:spPr>
+          <a:xfrm>
+            <a:off x="480060" y="798973"/>
+            <a:ext cx="811019" cy="503578"/>
+          </a:xfrm>
+          <a:prstGeom prst="rect">
+            <a:avLst/>
+          </a:prstGeom>
+        </p:spPr>
         <p:txBody>
           <a:bodyPr/>
           <a:lstStyle/>
@@ -2260,7 +2283,7 @@
           <a:p>
             <a:fld id="{43ED9329-DED2-9C4C-8B6A-8B4D879680E1}" type="datetimeFigureOut">
               <a:rPr lang="en-US" smtClean="0"/>
-              <a:t>11/4/22</a:t>
+              <a:t>11/13/25</a:t>
             </a:fld>
             <a:endParaRPr lang="en-US"/>
           </a:p>
@@ -2304,7 +2327,7 @@
               <a:rPr lang="en-US" smtClean="0"/>
               <a:t>‹#›</a:t>
             </a:fld>
-            <a:endParaRPr lang="en-US"/>
+            <a:endParaRPr lang="en-US" dirty="0"/>
           </a:p>
         </p:txBody>
       </p:sp>
@@ -2539,7 +2562,7 @@
           <a:p>
             <a:fld id="{43ED9329-DED2-9C4C-8B6A-8B4D879680E1}" type="datetimeFigureOut">
               <a:rPr lang="en-US" smtClean="0"/>
-              <a:t>11/4/22</a:t>
+              <a:t>11/13/25</a:t>
             </a:fld>
             <a:endParaRPr lang="en-US"/>
           </a:p>
@@ -2807,7 +2830,7 @@
           <a:p>
             <a:fld id="{43ED9329-DED2-9C4C-8B6A-8B4D879680E1}" type="datetimeFigureOut">
               <a:rPr lang="en-US" smtClean="0"/>
-              <a:t>11/4/22</a:t>
+              <a:t>11/13/25</a:t>
             </a:fld>
             <a:endParaRPr lang="en-US"/>
           </a:p>
@@ -3012,7 +3035,7 @@
           <a:p>
             <a:pPr lvl="0"/>
             <a:r>
-              <a:rPr lang="en-US"/>
+              <a:rPr lang="en-US" dirty="0"/>
               <a:t>Click to edit Master text styles</a:t>
             </a:r>
           </a:p>
@@ -3143,38 +3166,38 @@
           <a:p>
             <a:pPr lvl="0"/>
             <a:r>
+              <a:rPr lang="en-US" dirty="0"/>
+              <a:t>Click to edit Master text styles</a:t>
+            </a:r>
+          </a:p>
+        </p:txBody>
+      </p:sp>
+      <p:sp>
+        <p:nvSpPr>
+          <p:cNvPr id="6" name="Content Placeholder 5"/>
+          <p:cNvSpPr>
+            <a:spLocks noGrp="1"/>
+          </p:cNvSpPr>
+          <p:nvPr>
+            <p:ph sz="quarter" idx="4"/>
+          </p:nvPr>
+        </p:nvSpPr>
+        <p:spPr>
+          <a:xfrm>
+            <a:off x="6412362" y="2821491"/>
+            <a:ext cx="4645152" cy="2637371"/>
+          </a:xfrm>
+        </p:spPr>
+        <p:txBody>
+          <a:bodyPr/>
+          <a:lstStyle/>
+          <a:p>
+            <a:pPr lvl="0"/>
+            <a:r>
               <a:rPr lang="en-US"/>
               <a:t>Click to edit Master text styles</a:t>
             </a:r>
           </a:p>
-        </p:txBody>
-      </p:sp>
-      <p:sp>
-        <p:nvSpPr>
-          <p:cNvPr id="6" name="Content Placeholder 5"/>
-          <p:cNvSpPr>
-            <a:spLocks noGrp="1"/>
-          </p:cNvSpPr>
-          <p:nvPr>
-            <p:ph sz="quarter" idx="4"/>
-          </p:nvPr>
-        </p:nvSpPr>
-        <p:spPr>
-          <a:xfrm>
-            <a:off x="6412362" y="2821491"/>
-            <a:ext cx="4645152" cy="2637371"/>
-          </a:xfrm>
-        </p:spPr>
-        <p:txBody>
-          <a:bodyPr/>
-          <a:lstStyle/>
-          <a:p>
-            <a:pPr lvl="0"/>
-            <a:r>
-              <a:rPr lang="en-US"/>
-              <a:t>Click to edit Master text styles</a:t>
-            </a:r>
-          </a:p>
           <a:p>
             <a:pPr lvl="1"/>
             <a:r>
@@ -3223,7 +3246,7 @@
           <a:p>
             <a:fld id="{43ED9329-DED2-9C4C-8B6A-8B4D879680E1}" type="datetimeFigureOut">
               <a:rPr lang="en-US" smtClean="0"/>
-              <a:t>11/4/22</a:t>
+              <a:t>11/13/25</a:t>
             </a:fld>
             <a:endParaRPr lang="en-US"/>
           </a:p>
@@ -3372,7 +3395,7 @@
           <a:p>
             <a:fld id="{43ED9329-DED2-9C4C-8B6A-8B4D879680E1}" type="datetimeFigureOut">
               <a:rPr lang="en-US" smtClean="0"/>
-              <a:t>11/4/22</a:t>
+              <a:t>11/13/25</a:t>
             </a:fld>
             <a:endParaRPr lang="en-US"/>
           </a:p>
@@ -3407,7 +3430,15 @@
             <p:ph type="sldNum" sz="quarter" idx="12"/>
           </p:nvPr>
         </p:nvSpPr>
-        <p:spPr/>
+        <p:spPr>
+          <a:xfrm>
+            <a:off x="480060" y="798973"/>
+            <a:ext cx="811019" cy="503578"/>
+          </a:xfrm>
+          <a:prstGeom prst="rect">
+            <a:avLst/>
+          </a:prstGeom>
+        </p:spPr>
         <p:txBody>
           <a:bodyPr/>
           <a:lstStyle/>
@@ -3498,7 +3529,7 @@
           <a:p>
             <a:fld id="{43ED9329-DED2-9C4C-8B6A-8B4D879680E1}" type="datetimeFigureOut">
               <a:rPr lang="en-US" smtClean="0"/>
-              <a:t>11/4/22</a:t>
+              <a:t>11/13/25</a:t>
             </a:fld>
             <a:endParaRPr lang="en-US"/>
           </a:p>
@@ -3533,7 +3564,15 @@
             <p:ph type="sldNum" sz="quarter" idx="12"/>
           </p:nvPr>
         </p:nvSpPr>
-        <p:spPr/>
+        <p:spPr>
+          <a:xfrm>
+            <a:off x="480060" y="798973"/>
+            <a:ext cx="811019" cy="503578"/>
+          </a:xfrm>
+          <a:prstGeom prst="rect">
+            <a:avLst/>
+          </a:prstGeom>
+        </p:spPr>
         <p:txBody>
           <a:bodyPr/>
           <a:lstStyle/>
@@ -3749,7 +3788,7 @@
           <a:p>
             <a:fld id="{43ED9329-DED2-9C4C-8B6A-8B4D879680E1}" type="datetimeFigureOut">
               <a:rPr lang="en-US" smtClean="0"/>
-              <a:t>11/4/22</a:t>
+              <a:t>11/13/25</a:t>
             </a:fld>
             <a:endParaRPr lang="en-US"/>
           </a:p>
@@ -3784,7 +3823,15 @@
             <p:ph type="sldNum" sz="quarter" idx="12"/>
           </p:nvPr>
         </p:nvSpPr>
-        <p:spPr/>
+        <p:spPr>
+          <a:xfrm>
+            <a:off x="480060" y="798973"/>
+            <a:ext cx="811019" cy="503578"/>
+          </a:xfrm>
+          <a:prstGeom prst="rect">
+            <a:avLst/>
+          </a:prstGeom>
+        </p:spPr>
         <p:txBody>
           <a:bodyPr/>
           <a:lstStyle/>
@@ -4194,7 +4241,7 @@
           <a:p>
             <a:fld id="{43ED9329-DED2-9C4C-8B6A-8B4D879680E1}" type="datetimeFigureOut">
               <a:rPr lang="en-US" smtClean="0"/>
-              <a:t>11/4/22</a:t>
+              <a:t>11/13/25</a:t>
             </a:fld>
             <a:endParaRPr lang="en-US"/>
           </a:p>
@@ -4234,7 +4281,15 @@
             <p:ph type="sldNum" sz="quarter" idx="12"/>
           </p:nvPr>
         </p:nvSpPr>
-        <p:spPr/>
+        <p:spPr>
+          <a:xfrm>
+            <a:off x="480060" y="798973"/>
+            <a:ext cx="811019" cy="503578"/>
+          </a:xfrm>
+          <a:prstGeom prst="rect">
+            <a:avLst/>
+          </a:prstGeom>
+        </p:spPr>
         <p:txBody>
           <a:bodyPr/>
           <a:lstStyle/>
@@ -4361,6 +4416,13 @@
             <a:schemeClr val="lt1"/>
           </a:fontRef>
         </p:style>
+        <p:txBody>
+          <a:bodyPr/>
+          <a:lstStyle/>
+          <a:p>
+            <a:endParaRPr lang="en-US"/>
+          </a:p>
+        </p:txBody>
       </p:sp>
       <p:pic>
         <p:nvPicPr>
@@ -4521,7 +4583,7 @@
           <a:p>
             <a:fld id="{43ED9329-DED2-9C4C-8B6A-8B4D879680E1}" type="datetimeFigureOut">
               <a:rPr lang="en-US" smtClean="0"/>
-              <a:t>11/4/22</a:t>
+              <a:t>11/13/25</a:t>
             </a:fld>
             <a:endParaRPr lang="en-US"/>
           </a:p>
@@ -5052,7 +5114,12 @@
             <p:ph idx="1"/>
           </p:nvPr>
         </p:nvSpPr>
-        <p:spPr/>
+        <p:spPr>
+          <a:xfrm>
+            <a:off x="1451579" y="1929284"/>
+            <a:ext cx="9603275" cy="4124197"/>
+          </a:xfrm>
+        </p:spPr>
         <p:txBody>
           <a:bodyPr/>
           <a:lstStyle/>
@@ -5127,6 +5194,19 @@
             <a:r>
               <a:rPr lang="en-US" dirty="0"/>
               <a:t>Linear regression error calculations (depending on time). </a:t>
+            </a:r>
+          </a:p>
+          <a:p>
+            <a:r>
+              <a:rPr lang="en-US" dirty="0"/>
+              <a:t>Much of the stuff we’ll do over the next couple of weeks is the foundation for ML. </a:t>
+            </a:r>
+          </a:p>
+          <a:p>
+            <a:pPr lvl="1"/>
+            <a:r>
+              <a:rPr lang="en-US" dirty="0"/>
+              <a:t>If the sklearn stuff especially doesn’t make sense, please ask. We use it non-stop.</a:t>
             </a:r>
           </a:p>
         </p:txBody>
@@ -5166,6 +5246,133 @@
           <p:cNvPr id="2" name="Title 1">
             <a:extLst>
               <a:ext uri="{FF2B5EF4-FFF2-40B4-BE49-F238E27FC236}">
+                <a16:creationId xmlns:a16="http://schemas.microsoft.com/office/drawing/2014/main" id="{6D2ECC1A-373D-584A-BF07-0B34FFF3C888}"/>
+              </a:ext>
+            </a:extLst>
+          </p:cNvPr>
+          <p:cNvSpPr>
+            <a:spLocks noGrp="1"/>
+          </p:cNvSpPr>
+          <p:nvPr>
+            <p:ph type="title"/>
+          </p:nvPr>
+        </p:nvSpPr>
+        <p:spPr/>
+        <p:txBody>
+          <a:bodyPr/>
+          <a:lstStyle/>
+          <a:p>
+            <a:endParaRPr lang="en-US"/>
+          </a:p>
+        </p:txBody>
+      </p:sp>
+      <p:sp>
+        <p:nvSpPr>
+          <p:cNvPr id="3" name="Content Placeholder 2">
+            <a:extLst>
+              <a:ext uri="{FF2B5EF4-FFF2-40B4-BE49-F238E27FC236}">
+                <a16:creationId xmlns:a16="http://schemas.microsoft.com/office/drawing/2014/main" id="{6D1C867F-F364-0A4C-A103-DE689EC6D928}"/>
+              </a:ext>
+            </a:extLst>
+          </p:cNvPr>
+          <p:cNvSpPr>
+            <a:spLocks noGrp="1"/>
+          </p:cNvSpPr>
+          <p:nvPr>
+            <p:ph idx="1"/>
+          </p:nvPr>
+        </p:nvSpPr>
+        <p:spPr/>
+        <p:txBody>
+          <a:bodyPr/>
+          <a:lstStyle/>
+          <a:p>
+            <a:endParaRPr lang="en-US"/>
+          </a:p>
+        </p:txBody>
+      </p:sp>
+      <p:pic>
+        <p:nvPicPr>
+          <p:cNvPr id="1026" name="Picture 2">
+            <a:extLst>
+              <a:ext uri="{FF2B5EF4-FFF2-40B4-BE49-F238E27FC236}">
+                <a16:creationId xmlns:a16="http://schemas.microsoft.com/office/drawing/2014/main" id="{C8AF8CFA-21D4-284B-A979-6B9D9CA1F1FC}"/>
+              </a:ext>
+            </a:extLst>
+          </p:cNvPr>
+          <p:cNvPicPr>
+            <a:picLocks noChangeAspect="1" noChangeArrowheads="1"/>
+          </p:cNvPicPr>
+          <p:nvPr/>
+        </p:nvPicPr>
+        <p:blipFill>
+          <a:blip r:embed="rId2">
+            <a:extLst>
+              <a:ext uri="{28A0092B-C50C-407E-A947-70E740481C1C}">
+                <a14:useLocalDpi xmlns:a14="http://schemas.microsoft.com/office/drawing/2010/main" val="0"/>
+              </a:ext>
+            </a:extLst>
+          </a:blip>
+          <a:srcRect/>
+          <a:stretch>
+            <a:fillRect/>
+          </a:stretch>
+        </p:blipFill>
+        <p:spPr bwMode="auto">
+          <a:xfrm>
+            <a:off x="63500" y="374650"/>
+            <a:ext cx="12065000" cy="6108700"/>
+          </a:xfrm>
+          <a:prstGeom prst="rect">
+            <a:avLst/>
+          </a:prstGeom>
+          <a:noFill/>
+          <a:extLst>
+            <a:ext uri="{909E8E84-426E-40DD-AFC4-6F175D3DCCD1}">
+              <a14:hiddenFill xmlns:a14="http://schemas.microsoft.com/office/drawing/2010/main">
+                <a:solidFill>
+                  <a:srgbClr val="FFFFFF"/>
+                </a:solidFill>
+              </a14:hiddenFill>
+            </a:ext>
+          </a:extLst>
+        </p:spPr>
+      </p:pic>
+    </p:spTree>
+    <p:extLst>
+      <p:ext uri="{BB962C8B-B14F-4D97-AF65-F5344CB8AC3E}">
+        <p14:creationId xmlns:p14="http://schemas.microsoft.com/office/powerpoint/2010/main" val="372303413"/>
+      </p:ext>
+    </p:extLst>
+  </p:cSld>
+  <p:clrMapOvr>
+    <a:masterClrMapping/>
+  </p:clrMapOvr>
+</p:sld>
+</file>
+
+<file path=ppt/slides/slide11.xml><?xml version="1.0" encoding="utf-8"?>
+<p:sld xmlns:a="http://schemas.openxmlformats.org/drawingml/2006/main" xmlns:r="http://schemas.openxmlformats.org/officeDocument/2006/relationships" xmlns:p="http://schemas.openxmlformats.org/presentationml/2006/main">
+  <p:cSld>
+    <p:spTree>
+      <p:nvGrpSpPr>
+        <p:cNvPr id="1" name=""/>
+        <p:cNvGrpSpPr/>
+        <p:nvPr/>
+      </p:nvGrpSpPr>
+      <p:grpSpPr>
+        <a:xfrm>
+          <a:off x="0" y="0"/>
+          <a:ext cx="0" cy="0"/>
+          <a:chOff x="0" y="0"/>
+          <a:chExt cx="0" cy="0"/>
+        </a:xfrm>
+      </p:grpSpPr>
+      <p:sp>
+        <p:nvSpPr>
+          <p:cNvPr id="2" name="Title 1">
+            <a:extLst>
+              <a:ext uri="{FF2B5EF4-FFF2-40B4-BE49-F238E27FC236}">
                 <a16:creationId xmlns:a16="http://schemas.microsoft.com/office/drawing/2014/main" id="{D2377D06-4713-E84F-8E72-AEB2C4E799B2}"/>
               </a:ext>
             </a:extLst>
@@ -5270,7 +5477,7 @@
 </p:sld>
 </file>
 
-<file path=ppt/slides/slide11.xml><?xml version="1.0" encoding="utf-8"?>
+<file path=ppt/slides/slide12.xml><?xml version="1.0" encoding="utf-8"?>
 <p:sld xmlns:a="http://schemas.openxmlformats.org/drawingml/2006/main" xmlns:r="http://schemas.openxmlformats.org/officeDocument/2006/relationships" xmlns:p="http://schemas.openxmlformats.org/presentationml/2006/main">
   <p:cSld>
     <p:bg>
@@ -5548,7 +5755,160 @@
 </p:sld>
 </file>
 
-<file path=ppt/slides/slide12.xml><?xml version="1.0" encoding="utf-8"?>
+<file path=ppt/slides/slide13.xml><?xml version="1.0" encoding="utf-8"?>
+<p:sld xmlns:a="http://schemas.openxmlformats.org/drawingml/2006/main" xmlns:r="http://schemas.openxmlformats.org/officeDocument/2006/relationships" xmlns:p="http://schemas.openxmlformats.org/presentationml/2006/main">
+  <p:cSld>
+    <p:spTree>
+      <p:nvGrpSpPr>
+        <p:cNvPr id="1" name=""/>
+        <p:cNvGrpSpPr/>
+        <p:nvPr/>
+      </p:nvGrpSpPr>
+      <p:grpSpPr>
+        <a:xfrm>
+          <a:off x="0" y="0"/>
+          <a:ext cx="0" cy="0"/>
+          <a:chOff x="0" y="0"/>
+          <a:chExt cx="0" cy="0"/>
+        </a:xfrm>
+      </p:grpSpPr>
+      <p:sp>
+        <p:nvSpPr>
+          <p:cNvPr id="2" name="Title 1">
+            <a:extLst>
+              <a:ext uri="{FF2B5EF4-FFF2-40B4-BE49-F238E27FC236}">
+                <a16:creationId xmlns:a16="http://schemas.microsoft.com/office/drawing/2014/main" id="{CECF2D9F-E7BF-821F-0390-580CD00D8F4E}"/>
+              </a:ext>
+            </a:extLst>
+          </p:cNvPr>
+          <p:cNvSpPr>
+            <a:spLocks noGrp="1"/>
+          </p:cNvSpPr>
+          <p:nvPr>
+            <p:ph type="title"/>
+          </p:nvPr>
+        </p:nvSpPr>
+        <p:spPr/>
+        <p:txBody>
+          <a:bodyPr/>
+          <a:lstStyle/>
+          <a:p>
+            <a:r>
+              <a:rPr lang="en-US" dirty="0"/>
+              <a:t>Note for Context</a:t>
+            </a:r>
+          </a:p>
+        </p:txBody>
+      </p:sp>
+      <p:sp>
+        <p:nvSpPr>
+          <p:cNvPr id="3" name="Content Placeholder 2">
+            <a:extLst>
+              <a:ext uri="{FF2B5EF4-FFF2-40B4-BE49-F238E27FC236}">
+                <a16:creationId xmlns:a16="http://schemas.microsoft.com/office/drawing/2014/main" id="{BCE338B9-90D7-70EB-7658-D70F17C33CCE}"/>
+              </a:ext>
+            </a:extLst>
+          </p:cNvPr>
+          <p:cNvSpPr>
+            <a:spLocks noGrp="1"/>
+          </p:cNvSpPr>
+          <p:nvPr>
+            <p:ph idx="1"/>
+          </p:nvPr>
+        </p:nvSpPr>
+        <p:spPr>
+          <a:xfrm>
+            <a:off x="1451579" y="1853754"/>
+            <a:ext cx="9603275" cy="4199727"/>
+          </a:xfrm>
+        </p:spPr>
+        <p:txBody>
+          <a:bodyPr>
+            <a:normAutofit lnSpcReduction="10000"/>
+          </a:bodyPr>
+          <a:lstStyle/>
+          <a:p>
+            <a:r>
+              <a:rPr lang="en-US" dirty="0"/>
+              <a:t>The step of calculating the slope and intercept in LLS is the learning part. </a:t>
+            </a:r>
+          </a:p>
+          <a:p>
+            <a:r>
+              <a:rPr lang="en-US" dirty="0"/>
+              <a:t>Other types of models have different learning parts, with the same in/out. </a:t>
+            </a:r>
+          </a:p>
+          <a:p>
+            <a:r>
+              <a:rPr lang="en-US" dirty="0"/>
+              <a:t>In MOST models we care about, learning isn’t one step like this. </a:t>
+            </a:r>
+          </a:p>
+          <a:p>
+            <a:pPr lvl="1"/>
+            <a:r>
+              <a:rPr lang="en-US" dirty="0"/>
+              <a:t>LLS can produce the optimal model in one calculation, for simple data. </a:t>
+            </a:r>
+          </a:p>
+          <a:p>
+            <a:pPr lvl="1"/>
+            <a:r>
+              <a:rPr lang="en-US" dirty="0"/>
+              <a:t>Other model types or other data needs more steps – iteration. </a:t>
+            </a:r>
+          </a:p>
+          <a:p>
+            <a:pPr lvl="1"/>
+            <a:r>
+              <a:rPr lang="en-US" dirty="0"/>
+              <a:t>Make a model (guess coef.), calculate error, revise, calculate, revise….</a:t>
+            </a:r>
+          </a:p>
+          <a:p>
+            <a:pPr lvl="1"/>
+            <a:r>
+              <a:rPr lang="en-US" dirty="0"/>
+              <a:t>This looks like learning, it takes a long time.</a:t>
+            </a:r>
+          </a:p>
+          <a:p>
+            <a:pPr lvl="1"/>
+            <a:r>
+              <a:rPr lang="en-US" dirty="0"/>
+              <a:t>We never know the perfect answer (like LLS gives) only our best guess. </a:t>
+            </a:r>
+          </a:p>
+          <a:p>
+            <a:r>
+              <a:rPr lang="en-US" dirty="0"/>
+              <a:t>Linear regression is the only model* we see where we can calculate an answer. </a:t>
+            </a:r>
+          </a:p>
+          <a:p>
+            <a:pPr lvl="1"/>
+            <a:r>
+              <a:rPr lang="en-US" dirty="0"/>
+              <a:t>All others we need to estimate the best answer, and that takes time. </a:t>
+            </a:r>
+          </a:p>
+        </p:txBody>
+      </p:sp>
+    </p:spTree>
+    <p:extLst>
+      <p:ext uri="{BB962C8B-B14F-4D97-AF65-F5344CB8AC3E}">
+        <p14:creationId xmlns:p14="http://schemas.microsoft.com/office/powerpoint/2010/main" val="3388675527"/>
+      </p:ext>
+    </p:extLst>
+  </p:cSld>
+  <p:clrMapOvr>
+    <a:masterClrMapping/>
+  </p:clrMapOvr>
+</p:sld>
+</file>
+
+<file path=ppt/slides/slide14.xml><?xml version="1.0" encoding="utf-8"?>
 <p:sld xmlns:a="http://schemas.openxmlformats.org/drawingml/2006/main" xmlns:r="http://schemas.openxmlformats.org/officeDocument/2006/relationships" xmlns:p="http://schemas.openxmlformats.org/presentationml/2006/main">
   <p:cSld>
     <p:spTree>
@@ -5577,8 +5937,8 @@
         </p:nvSpPr>
         <p:spPr>
           <a:xfrm flipH="1">
-            <a:off x="1981075" y="1305775"/>
-            <a:ext cx="7822200" cy="4147200"/>
+            <a:off x="5048313" y="1305774"/>
+            <a:ext cx="6953124" cy="4743333"/>
           </a:xfrm>
           <a:prstGeom prst="rect">
             <a:avLst/>
@@ -5590,7 +5950,7 @@
           </a:bodyPr>
           <a:lstStyle/>
           <a:p>
-            <a:pPr marL="0" indent="0">
+            <a:pPr marL="342900" indent="-342900">
               <a:lnSpc>
                 <a:spcPct val="115000"/>
               </a:lnSpc>
@@ -5601,11 +5961,10 @@
                 <a:schemeClr val="dk1"/>
               </a:buClr>
               <a:buSzPts val="1100"/>
-              <a:buNone/>
             </a:pPr>
             <a:r>
               <a:rPr lang="en" sz="2200" dirty="0"/>
-              <a:t>The linear model for predicting poverty from high school graduation rate in the US is</a:t>
+              <a:t>The linear model for predicting poverty from high school graduation rate in the US is:</a:t>
             </a:r>
             <a:endParaRPr sz="2200" dirty="0"/>
           </a:p>
@@ -5634,14 +5993,13 @@
             <a:endParaRPr sz="2200" dirty="0"/>
           </a:p>
           <a:p>
-            <a:pPr marL="0" indent="0">
+            <a:pPr marL="342900" indent="-342900">
               <a:lnSpc>
                 <a:spcPct val="115000"/>
               </a:lnSpc>
               <a:spcBef>
                 <a:spcPts val="0"/>
               </a:spcBef>
-              <a:buNone/>
             </a:pPr>
             <a:r>
               <a:rPr lang="en" sz="2200" dirty="0"/>
@@ -5649,26 +6007,36 @@
             </a:r>
           </a:p>
           <a:p>
-            <a:pPr marL="0" indent="0">
+            <a:pPr marL="800100" lvl="1" indent="-342900">
+              <a:lnSpc>
+                <a:spcPct val="115000"/>
+              </a:lnSpc>
+            </a:pPr>
+            <a:r>
+              <a:rPr lang="en" sz="2000" dirty="0"/>
+              <a:t>Predictions are always estimates, not assertions. </a:t>
+            </a:r>
+          </a:p>
+          <a:p>
+            <a:pPr marL="800100" lvl="1" indent="-342900">
+              <a:lnSpc>
+                <a:spcPct val="115000"/>
+              </a:lnSpc>
+            </a:pPr>
+            <a:r>
+              <a:rPr lang="en" sz="2000" dirty="0"/>
+              <a:t>Our model ‘learned’ m and b in the training (LLS) step. </a:t>
+            </a:r>
+            <a:endParaRPr lang="en" sz="2200" dirty="0"/>
+          </a:p>
+          <a:p>
+            <a:pPr marL="342900" indent="-342900">
               <a:lnSpc>
                 <a:spcPct val="115000"/>
               </a:lnSpc>
               <a:spcBef>
                 <a:spcPts val="0"/>
               </a:spcBef>
-              <a:buNone/>
-            </a:pPr>
-            <a:endParaRPr lang="en" sz="2200" dirty="0"/>
-          </a:p>
-          <a:p>
-            <a:pPr marL="0" indent="0">
-              <a:lnSpc>
-                <a:spcPct val="115000"/>
-              </a:lnSpc>
-              <a:spcBef>
-                <a:spcPts val="0"/>
-              </a:spcBef>
-              <a:buNone/>
             </a:pPr>
             <a:r>
               <a:rPr lang="en" sz="2200" dirty="0"/>
@@ -5743,7 +6111,7 @@
         </p:blipFill>
         <p:spPr>
           <a:xfrm>
-            <a:off x="3257800" y="2336351"/>
+            <a:off x="6302451" y="2276061"/>
             <a:ext cx="4073124" cy="527000"/>
           </a:xfrm>
           <a:prstGeom prst="rect">
@@ -5755,389 +6123,99 @@
           </a:ln>
         </p:spPr>
       </p:pic>
-    </p:spTree>
-  </p:cSld>
-  <p:clrMapOvr>
-    <a:masterClrMapping/>
-  </p:clrMapOvr>
-</p:sld>
-</file>
-
-<file path=ppt/slides/slide13.xml><?xml version="1.0" encoding="utf-8"?>
-<p:sld xmlns:a="http://schemas.openxmlformats.org/drawingml/2006/main" xmlns:r="http://schemas.openxmlformats.org/officeDocument/2006/relationships" xmlns:p="http://schemas.openxmlformats.org/presentationml/2006/main">
-  <p:cSld>
-    <p:bg>
-      <p:bgPr>
-        <a:gradFill rotWithShape="1">
-          <a:gsLst>
-            <a:gs pos="0">
-              <a:schemeClr val="bg2">
-                <a:tint val="94000"/>
-                <a:satMod val="80000"/>
-                <a:lumMod val="106000"/>
-              </a:schemeClr>
-            </a:gs>
-            <a:gs pos="100000">
-              <a:schemeClr val="bg2">
-                <a:shade val="80000"/>
-              </a:schemeClr>
-            </a:gs>
-          </a:gsLst>
-          <a:path path="circle">
-            <a:fillToRect l="43000" r="43000" b="100000"/>
-          </a:path>
-        </a:gradFill>
-        <a:effectLst/>
-      </p:bgPr>
-    </p:bg>
-    <p:spTree>
-      <p:nvGrpSpPr>
-        <p:cNvPr id="1" name=""/>
-        <p:cNvGrpSpPr/>
-        <p:nvPr/>
-      </p:nvGrpSpPr>
-      <p:grpSpPr>
-        <a:xfrm>
-          <a:off x="0" y="0"/>
-          <a:ext cx="0" cy="0"/>
-          <a:chOff x="0" y="0"/>
-          <a:chExt cx="0" cy="0"/>
-        </a:xfrm>
-      </p:grpSpPr>
-      <p:sp>
-        <p:nvSpPr>
-          <p:cNvPr id="2" name="Title 1">
+      <p:grpSp>
+        <p:nvGrpSpPr>
+          <p:cNvPr id="2" name="Group 1">
             <a:extLst>
               <a:ext uri="{FF2B5EF4-FFF2-40B4-BE49-F238E27FC236}">
-                <a16:creationId xmlns:a16="http://schemas.microsoft.com/office/drawing/2014/main" id="{2CDC39E7-3B2D-5D4A-A834-9397731C5EED}"/>
+                <a16:creationId xmlns:a16="http://schemas.microsoft.com/office/drawing/2014/main" id="{1CDC0DB9-BFA9-162A-0C30-75E93DEC7C50}"/>
               </a:ext>
             </a:extLst>
           </p:cNvPr>
-          <p:cNvSpPr>
-            <a:spLocks noGrp="1"/>
-          </p:cNvSpPr>
-          <p:nvPr>
-            <p:ph type="title"/>
-          </p:nvPr>
-        </p:nvSpPr>
-        <p:spPr>
-          <a:xfrm>
-            <a:off x="1451579" y="804519"/>
-            <a:ext cx="9603275" cy="1049235"/>
-          </a:xfrm>
-        </p:spPr>
-        <p:txBody>
-          <a:bodyPr>
-            <a:normAutofit/>
-          </a:bodyPr>
-          <a:lstStyle/>
-          <a:p>
-            <a:r>
-              <a:rPr lang="en-US" dirty="0"/>
-              <a:t>Residual analysis</a:t>
-            </a:r>
-          </a:p>
-        </p:txBody>
-      </p:sp>
-      <p:sp>
-        <p:nvSpPr>
-          <p:cNvPr id="3" name="Content Placeholder 2">
-            <a:extLst>
-              <a:ext uri="{FF2B5EF4-FFF2-40B4-BE49-F238E27FC236}">
-                <a16:creationId xmlns:a16="http://schemas.microsoft.com/office/drawing/2014/main" id="{70EDF23D-40AA-6A4E-B69E-12212C8D111D}"/>
-              </a:ext>
-            </a:extLst>
-          </p:cNvPr>
-          <p:cNvSpPr>
-            <a:spLocks noGrp="1"/>
-          </p:cNvSpPr>
-          <p:nvPr>
-            <p:ph idx="1"/>
-          </p:nvPr>
-        </p:nvSpPr>
-        <p:spPr>
-          <a:xfrm>
-            <a:off x="914401" y="2015734"/>
-            <a:ext cx="4699734" cy="3450613"/>
-          </a:xfrm>
-        </p:spPr>
-        <p:txBody>
-          <a:bodyPr>
-            <a:normAutofit/>
-          </a:bodyPr>
-          <a:lstStyle/>
-          <a:p>
-            <a:r>
-              <a:rPr lang="en-US" dirty="0"/>
-              <a:t>The generated residuals are also helpful to us in a few ways. </a:t>
-            </a:r>
-          </a:p>
-          <a:p>
-            <a:r>
-              <a:rPr lang="en-US" dirty="0"/>
-              <a:t>We can graph the residuals along with X to examine. </a:t>
-            </a:r>
-          </a:p>
-          <a:p>
-            <a:r>
-              <a:rPr lang="en-US" dirty="0"/>
-              <a:t>We want this pattern of residuals to not have any patterns in it – to be more or less randomly spread out. </a:t>
-            </a:r>
-          </a:p>
-          <a:p>
-            <a:r>
-              <a:rPr lang="en-US" dirty="0"/>
-              <a:t>Why?</a:t>
-            </a:r>
-          </a:p>
-        </p:txBody>
-      </p:sp>
-      <p:pic>
-        <p:nvPicPr>
-          <p:cNvPr id="4" name="Picture 3">
-            <a:extLst>
-              <a:ext uri="{FF2B5EF4-FFF2-40B4-BE49-F238E27FC236}">
-                <a16:creationId xmlns:a16="http://schemas.microsoft.com/office/drawing/2014/main" id="{652E0B48-5A03-694B-9CC0-2134D1170CF7}"/>
-              </a:ext>
-            </a:extLst>
-          </p:cNvPr>
-          <p:cNvPicPr>
-            <a:picLocks noChangeAspect="1"/>
-          </p:cNvPicPr>
+          <p:cNvGrpSpPr/>
           <p:nvPr/>
-        </p:nvPicPr>
-        <p:blipFill>
-          <a:blip r:embed="rId2"/>
-          <a:stretch>
-            <a:fillRect/>
-          </a:stretch>
-        </p:blipFill>
-        <p:spPr>
-          <a:xfrm>
-            <a:off x="5880100" y="1093664"/>
-            <a:ext cx="5905499" cy="5802153"/>
-          </a:xfrm>
-          <a:prstGeom prst="rect">
-            <a:avLst/>
-          </a:prstGeom>
-        </p:spPr>
-      </p:pic>
+        </p:nvGrpSpPr>
+        <p:grpSpPr>
+          <a:xfrm>
+            <a:off x="190563" y="1571625"/>
+            <a:ext cx="4857750" cy="3714750"/>
+            <a:chOff x="1917425" y="2992750"/>
+            <a:chExt cx="4857750" cy="3714750"/>
+          </a:xfrm>
+        </p:grpSpPr>
+        <p:pic>
+          <p:nvPicPr>
+            <p:cNvPr id="3" name="Google Shape;106;p23">
+              <a:extLst>
+                <a:ext uri="{FF2B5EF4-FFF2-40B4-BE49-F238E27FC236}">
+                  <a16:creationId xmlns:a16="http://schemas.microsoft.com/office/drawing/2014/main" id="{65007FBD-2DD9-566C-D817-39DA82C5CE3C}"/>
+                </a:ext>
+              </a:extLst>
+            </p:cNvPr>
+            <p:cNvPicPr preferRelativeResize="0"/>
+            <p:nvPr/>
+          </p:nvPicPr>
+          <p:blipFill>
+            <a:blip r:embed="rId4">
+              <a:alphaModFix/>
+            </a:blip>
+            <a:stretch>
+              <a:fillRect/>
+            </a:stretch>
+          </p:blipFill>
+          <p:spPr>
+            <a:xfrm>
+              <a:off x="1917425" y="2992750"/>
+              <a:ext cx="4857750" cy="3714750"/>
+            </a:xfrm>
+            <a:prstGeom prst="rect">
+              <a:avLst/>
+            </a:prstGeom>
+            <a:noFill/>
+            <a:ln>
+              <a:noFill/>
+            </a:ln>
+          </p:spPr>
+        </p:pic>
+        <p:cxnSp>
+          <p:nvCxnSpPr>
+            <p:cNvPr id="4" name="Straight Connector 3">
+              <a:extLst>
+                <a:ext uri="{FF2B5EF4-FFF2-40B4-BE49-F238E27FC236}">
+                  <a16:creationId xmlns:a16="http://schemas.microsoft.com/office/drawing/2014/main" id="{0CF3D8B5-64C6-0230-1461-B8E4B17B171C}"/>
+                </a:ext>
+              </a:extLst>
+            </p:cNvPr>
+            <p:cNvCxnSpPr/>
+            <p:nvPr/>
+          </p:nvCxnSpPr>
+          <p:spPr>
+            <a:xfrm>
+              <a:off x="2943922" y="3241375"/>
+              <a:ext cx="3534937" cy="2310850"/>
+            </a:xfrm>
+            <a:prstGeom prst="line">
+              <a:avLst/>
+            </a:prstGeom>
+            <a:ln w="38100"/>
+          </p:spPr>
+          <p:style>
+            <a:lnRef idx="1">
+              <a:schemeClr val="accent1"/>
+            </a:lnRef>
+            <a:fillRef idx="0">
+              <a:schemeClr val="accent1"/>
+            </a:fillRef>
+            <a:effectRef idx="0">
+              <a:schemeClr val="accent1"/>
+            </a:effectRef>
+            <a:fontRef idx="minor">
+              <a:schemeClr val="tx1"/>
+            </a:fontRef>
+          </p:style>
+        </p:cxnSp>
+      </p:grpSp>
     </p:spTree>
-    <p:extLst>
-      <p:ext uri="{BB962C8B-B14F-4D97-AF65-F5344CB8AC3E}">
-        <p14:creationId xmlns:p14="http://schemas.microsoft.com/office/powerpoint/2010/main" val="869783968"/>
-      </p:ext>
-    </p:extLst>
-  </p:cSld>
-  <p:clrMapOvr>
-    <a:masterClrMapping/>
-  </p:clrMapOvr>
-</p:sld>
-</file>
-
-<file path=ppt/slides/slide14.xml><?xml version="1.0" encoding="utf-8"?>
-<p:sld xmlns:a="http://schemas.openxmlformats.org/drawingml/2006/main" xmlns:r="http://schemas.openxmlformats.org/officeDocument/2006/relationships" xmlns:p="http://schemas.openxmlformats.org/presentationml/2006/main">
-  <p:cSld>
-    <p:bg>
-      <p:bgPr>
-        <a:gradFill rotWithShape="1">
-          <a:gsLst>
-            <a:gs pos="0">
-              <a:schemeClr val="bg2">
-                <a:tint val="94000"/>
-                <a:satMod val="80000"/>
-                <a:lumMod val="106000"/>
-              </a:schemeClr>
-            </a:gs>
-            <a:gs pos="100000">
-              <a:schemeClr val="bg2">
-                <a:shade val="80000"/>
-              </a:schemeClr>
-            </a:gs>
-          </a:gsLst>
-          <a:path path="circle">
-            <a:fillToRect l="43000" r="43000" b="100000"/>
-          </a:path>
-        </a:gradFill>
-        <a:effectLst/>
-      </p:bgPr>
-    </p:bg>
-    <p:spTree>
-      <p:nvGrpSpPr>
-        <p:cNvPr id="1" name=""/>
-        <p:cNvGrpSpPr/>
-        <p:nvPr/>
-      </p:nvGrpSpPr>
-      <p:grpSpPr>
-        <a:xfrm>
-          <a:off x="0" y="0"/>
-          <a:ext cx="0" cy="0"/>
-          <a:chOff x="0" y="0"/>
-          <a:chExt cx="0" cy="0"/>
-        </a:xfrm>
-      </p:grpSpPr>
-      <p:sp>
-        <p:nvSpPr>
-          <p:cNvPr id="2" name="Title 1">
-            <a:extLst>
-              <a:ext uri="{FF2B5EF4-FFF2-40B4-BE49-F238E27FC236}">
-                <a16:creationId xmlns:a16="http://schemas.microsoft.com/office/drawing/2014/main" id="{AFA51FD7-A9C7-CD4A-B394-4D9E37B6A26E}"/>
-              </a:ext>
-            </a:extLst>
-          </p:cNvPr>
-          <p:cNvSpPr>
-            <a:spLocks noGrp="1"/>
-          </p:cNvSpPr>
-          <p:nvPr>
-            <p:ph type="title"/>
-          </p:nvPr>
-        </p:nvSpPr>
-        <p:spPr>
-          <a:xfrm>
-            <a:off x="1451579" y="804519"/>
-            <a:ext cx="9603275" cy="1049235"/>
-          </a:xfrm>
-        </p:spPr>
-        <p:txBody>
-          <a:bodyPr>
-            <a:normAutofit/>
-          </a:bodyPr>
-          <a:lstStyle/>
-          <a:p>
-            <a:r>
-              <a:rPr lang="en-US" dirty="0"/>
-              <a:t>Why Random?</a:t>
-            </a:r>
-          </a:p>
-        </p:txBody>
-      </p:sp>
-      <p:sp>
-        <p:nvSpPr>
-          <p:cNvPr id="3" name="Content Placeholder 2">
-            <a:extLst>
-              <a:ext uri="{FF2B5EF4-FFF2-40B4-BE49-F238E27FC236}">
-                <a16:creationId xmlns:a16="http://schemas.microsoft.com/office/drawing/2014/main" id="{C2822CE1-EEC2-DA4E-ACFC-03662AAD5629}"/>
-              </a:ext>
-            </a:extLst>
-          </p:cNvPr>
-          <p:cNvSpPr>
-            <a:spLocks noGrp="1"/>
-          </p:cNvSpPr>
-          <p:nvPr>
-            <p:ph idx="1"/>
-          </p:nvPr>
-        </p:nvSpPr>
-        <p:spPr>
-          <a:xfrm>
-            <a:off x="635000" y="2015734"/>
-            <a:ext cx="5359399" cy="4037747"/>
-          </a:xfrm>
-        </p:spPr>
-        <p:txBody>
-          <a:bodyPr>
-            <a:normAutofit/>
-          </a:bodyPr>
-          <a:lstStyle/>
-          <a:p>
-            <a:r>
-              <a:rPr lang="en-US" dirty="0"/>
-              <a:t>If there’s a pattern in the residuals it tells us that there’s some relationship here that isn’t captured in our actual model.</a:t>
-            </a:r>
-          </a:p>
-          <a:p>
-            <a:pPr lvl="1"/>
-            <a:r>
-              <a:rPr lang="en-US" dirty="0"/>
-              <a:t>Middle predictions too high, ends are too low. </a:t>
-            </a:r>
-          </a:p>
-          <a:p>
-            <a:pPr lvl="1"/>
-            <a:r>
-              <a:rPr lang="en-US" dirty="0"/>
-              <a:t>This pattern should be in the model!</a:t>
-            </a:r>
-          </a:p>
-          <a:p>
-            <a:r>
-              <a:rPr lang="en-US" dirty="0"/>
-              <a:t>Residuals should be:</a:t>
-            </a:r>
-          </a:p>
-          <a:p>
-            <a:pPr lvl="1"/>
-            <a:r>
-              <a:rPr lang="en-US" dirty="0"/>
-              <a:t>Uncorrelated with a variable.</a:t>
-            </a:r>
-          </a:p>
-          <a:p>
-            <a:pPr lvl="1"/>
-            <a:r>
-              <a:rPr lang="en-US" dirty="0"/>
-              <a:t>Uncorrelated with each other. </a:t>
-            </a:r>
-          </a:p>
-          <a:p>
-            <a:r>
-              <a:rPr lang="en-US" dirty="0"/>
-              <a:t>We shouldn’t be able to predict residuals. </a:t>
-            </a:r>
-          </a:p>
-        </p:txBody>
-      </p:sp>
-      <p:pic>
-        <p:nvPicPr>
-          <p:cNvPr id="2050" name="Picture 2" descr="Minitab's residuals versus fit plot with bad residuals">
-            <a:extLst>
-              <a:ext uri="{FF2B5EF4-FFF2-40B4-BE49-F238E27FC236}">
-                <a16:creationId xmlns:a16="http://schemas.microsoft.com/office/drawing/2014/main" id="{62A0CAEA-4DD1-CA49-84C3-5091103E1D19}"/>
-              </a:ext>
-            </a:extLst>
-          </p:cNvPr>
-          <p:cNvPicPr>
-            <a:picLocks noChangeAspect="1" noChangeArrowheads="1"/>
-          </p:cNvPicPr>
-          <p:nvPr/>
-        </p:nvPicPr>
-        <p:blipFill>
-          <a:blip r:embed="rId2">
-            <a:extLst>
-              <a:ext uri="{28A0092B-C50C-407E-A947-70E740481C1C}">
-                <a14:useLocalDpi xmlns:a14="http://schemas.microsoft.com/office/drawing/2010/main" val="0"/>
-              </a:ext>
-            </a:extLst>
-          </a:blip>
-          <a:stretch>
-            <a:fillRect/>
-          </a:stretch>
-        </p:blipFill>
-        <p:spPr bwMode="auto">
-          <a:xfrm>
-            <a:off x="6094411" y="2087558"/>
-            <a:ext cx="5707862" cy="3805241"/>
-          </a:xfrm>
-          <a:prstGeom prst="rect">
-            <a:avLst/>
-          </a:prstGeom>
-          <a:noFill/>
-          <a:extLst>
-            <a:ext uri="{909E8E84-426E-40DD-AFC4-6F175D3DCCD1}">
-              <a14:hiddenFill xmlns:a14="http://schemas.microsoft.com/office/drawing/2010/main">
-                <a:solidFill>
-                  <a:srgbClr val="FFFFFF"/>
-                </a:solidFill>
-              </a14:hiddenFill>
-            </a:ext>
-          </a:extLst>
-        </p:spPr>
-      </p:pic>
-    </p:spTree>
-    <p:extLst>
-      <p:ext uri="{BB962C8B-B14F-4D97-AF65-F5344CB8AC3E}">
-        <p14:creationId xmlns:p14="http://schemas.microsoft.com/office/powerpoint/2010/main" val="1812565449"/>
-      </p:ext>
-    </p:extLst>
   </p:cSld>
   <p:clrMapOvr>
     <a:masterClrMapping/>
@@ -6164,10 +6242,10 @@
       </p:grpSpPr>
       <p:sp>
         <p:nvSpPr>
-          <p:cNvPr id="2" name="Title 1">
+          <p:cNvPr id="4" name="Title 3">
             <a:extLst>
               <a:ext uri="{FF2B5EF4-FFF2-40B4-BE49-F238E27FC236}">
-                <a16:creationId xmlns:a16="http://schemas.microsoft.com/office/drawing/2014/main" id="{77C3FDD7-7164-3D44-B4AF-1B7CD86E680E}"/>
+                <a16:creationId xmlns:a16="http://schemas.microsoft.com/office/drawing/2014/main" id="{B3212311-4030-0318-9F3E-FABB49C0380A}"/>
               </a:ext>
             </a:extLst>
           </p:cNvPr>
@@ -6185,17 +6263,17 @@
           <a:p>
             <a:r>
               <a:rPr lang="en-US" dirty="0"/>
-              <a:t>Other Packages</a:t>
-            </a:r>
-          </a:p>
-        </p:txBody>
-      </p:sp>
-      <p:sp>
-        <p:nvSpPr>
-          <p:cNvPr id="3" name="Content Placeholder 2">
+              <a:t>That’s a model!</a:t>
+            </a:r>
+          </a:p>
+        </p:txBody>
+      </p:sp>
+      <p:sp>
+        <p:nvSpPr>
+          <p:cNvPr id="5" name="Content Placeholder 4">
             <a:extLst>
               <a:ext uri="{FF2B5EF4-FFF2-40B4-BE49-F238E27FC236}">
-                <a16:creationId xmlns:a16="http://schemas.microsoft.com/office/drawing/2014/main" id="{88F66A41-146A-E147-A72A-B35E0AEFB656}"/>
+                <a16:creationId xmlns:a16="http://schemas.microsoft.com/office/drawing/2014/main" id="{32A43DB3-4531-35B1-23E0-CE4FA36AB91D}"/>
               </a:ext>
             </a:extLst>
           </p:cNvPr>
@@ -6208,133 +6286,86 @@
         </p:nvSpPr>
         <p:spPr>
           <a:xfrm>
-            <a:off x="869795" y="2015732"/>
-            <a:ext cx="10526751" cy="4156468"/>
+            <a:off x="1451579" y="1853754"/>
+            <a:ext cx="9603275" cy="4199727"/>
           </a:xfrm>
         </p:spPr>
         <p:txBody>
           <a:bodyPr>
-            <a:normAutofit/>
+            <a:normAutofit lnSpcReduction="10000"/>
           </a:bodyPr>
           <a:lstStyle/>
           <a:p>
             <a:r>
               <a:rPr lang="en-US" dirty="0"/>
-              <a:t>Linear regression is performed by many existing packages, such as </a:t>
+              <a:t>Once ‘trained’ (calculation of slope and intercept) the y=</a:t>
             </a:r>
             <a:r>
               <a:rPr lang="en-US" dirty="0" err="1"/>
-              <a:t>StatsModels</a:t>
-            </a:r>
-            <a:r>
-              <a:rPr lang="en-US" dirty="0"/>
-              <a:t>, </a:t>
-            </a:r>
-            <a:r>
-              <a:rPr lang="en-US" dirty="0" err="1"/>
-              <a:t>Scipy</a:t>
-            </a:r>
-            <a:r>
-              <a:rPr lang="en-US" dirty="0"/>
-              <a:t>, and </a:t>
-            </a:r>
-            <a:r>
-              <a:rPr lang="en-US" dirty="0" err="1"/>
-              <a:t>Scikitlearn</a:t>
-            </a:r>
-            <a:r>
-              <a:rPr lang="en-US" dirty="0"/>
-              <a:t>. </a:t>
-            </a:r>
-          </a:p>
-          <a:p>
-            <a:r>
-              <a:rPr lang="en-US" dirty="0"/>
-              <a:t>The book uses </a:t>
-            </a:r>
-            <a:r>
-              <a:rPr lang="en-US" dirty="0" err="1"/>
-              <a:t>StatsModels</a:t>
-            </a:r>
-            <a:r>
-              <a:rPr lang="en-US" dirty="0"/>
-              <a:t> when multiple regression starts. </a:t>
-            </a:r>
-          </a:p>
-          <a:p>
-            <a:r>
-              <a:rPr lang="en-US" dirty="0"/>
-              <a:t>Which you use mostly doesn’t matter, it is a personal choice. </a:t>
-            </a:r>
-          </a:p>
-          <a:p>
-            <a:r>
-              <a:rPr lang="en-US" dirty="0"/>
-              <a:t>We’ll use both </a:t>
-            </a:r>
-            <a:r>
-              <a:rPr lang="en-US" dirty="0" err="1"/>
-              <a:t>StatsModels</a:t>
-            </a:r>
-            <a:r>
-              <a:rPr lang="en-US" dirty="0"/>
-              <a:t> and </a:t>
-            </a:r>
-            <a:r>
-              <a:rPr lang="en-US" dirty="0" err="1"/>
-              <a:t>Scikitlearn</a:t>
-            </a:r>
-            <a:r>
-              <a:rPr lang="en-US" dirty="0"/>
-              <a:t>:</a:t>
+              <a:t>mx+b</a:t>
+            </a:r>
+            <a:r>
+              <a:rPr lang="en-US" dirty="0"/>
+              <a:t> is a model. </a:t>
             </a:r>
           </a:p>
           <a:p>
             <a:pPr lvl="1"/>
             <a:r>
-              <a:rPr lang="en-US" dirty="0" err="1"/>
-              <a:t>Statsmodels</a:t>
-            </a:r>
-            <a:r>
-              <a:rPr lang="en-US" dirty="0"/>
-              <a:t> provide more stats data in the output, so we will use that sometimes. </a:t>
+              <a:rPr lang="en-US" dirty="0"/>
+              <a:t>Insert any input (x value) we get a predicted output (y value). </a:t>
+            </a:r>
+          </a:p>
+          <a:p>
+            <a:r>
+              <a:rPr lang="en-US" dirty="0"/>
+              <a:t>This is one model that can predict Y given X. </a:t>
+            </a:r>
+          </a:p>
+          <a:p>
+            <a:r>
+              <a:rPr lang="en-US" dirty="0"/>
+              <a:t>There are infinite number of ways to make a model that does the same thing. </a:t>
             </a:r>
           </a:p>
           <a:p>
             <a:pPr lvl="1"/>
             <a:r>
               <a:rPr lang="en-US" dirty="0"/>
-              <a:t>The </a:t>
-            </a:r>
-            <a:r>
-              <a:rPr lang="en-US" dirty="0" err="1"/>
-              <a:t>scikitlearn</a:t>
-            </a:r>
-            <a:r>
-              <a:rPr lang="en-US" dirty="0"/>
-              <a:t> is probably more relevant experience for ML stuff. </a:t>
-            </a:r>
-          </a:p>
-          <a:p>
-            <a:r>
-              <a:rPr lang="en-US" dirty="0"/>
-              <a:t>I think going forward I might replace some of the </a:t>
-            </a:r>
-            <a:r>
-              <a:rPr lang="en-US" dirty="0" err="1"/>
-              <a:t>statsmodels</a:t>
-            </a:r>
-            <a:r>
-              <a:rPr lang="en-US" dirty="0"/>
-              <a:t> examples in future workbooks with </a:t>
-            </a:r>
-            <a:r>
-              <a:rPr lang="en-US" dirty="0" err="1"/>
-              <a:t>sklearn</a:t>
-            </a:r>
-            <a:r>
-              <a:rPr lang="en-US" dirty="0"/>
-              <a:t> one. The interface is easier, and it is more relevant to ML. </a:t>
+              <a:t>This way used a linear regression via a formula. </a:t>
+            </a:r>
+          </a:p>
+          <a:p>
+            <a:pPr lvl="1"/>
+            <a:r>
+              <a:rPr lang="en-US" dirty="0"/>
+              <a:t>Later we’ll see linear regression via iteration. </a:t>
+            </a:r>
+          </a:p>
+          <a:p>
+            <a:pPr lvl="1"/>
+            <a:r>
+              <a:rPr lang="en-US" dirty="0"/>
+              <a:t>We could use the same data, and different math (this changes), and get some other model. </a:t>
+            </a:r>
+          </a:p>
+          <a:p>
+            <a:r>
+              <a:rPr lang="en-US" dirty="0"/>
+              <a:t>The only* part that changes is the training/calculation step. </a:t>
+            </a:r>
+          </a:p>
+          <a:p>
+            <a:pPr lvl="1"/>
+            <a:r>
+              <a:rPr lang="en-US" dirty="0"/>
+              <a:t>Same inputs, same outputs, different calculation to go from A-&gt;B. </a:t>
+            </a:r>
+          </a:p>
+          <a:p>
+            <a:r>
+              <a:rPr lang="en-US" dirty="0"/>
+              <a:t>How do we know if the one we made is good? </a:t>
             </a:r>
           </a:p>
         </p:txBody>
@@ -6342,7 +6373,7 @@
     </p:spTree>
     <p:extLst>
       <p:ext uri="{BB962C8B-B14F-4D97-AF65-F5344CB8AC3E}">
-        <p14:creationId xmlns:p14="http://schemas.microsoft.com/office/powerpoint/2010/main" val="2723228470"/>
+        <p14:creationId xmlns:p14="http://schemas.microsoft.com/office/powerpoint/2010/main" val="1457611269"/>
       </p:ext>
     </p:extLst>
   </p:cSld>
@@ -6398,6 +6429,615 @@
           <p:cNvPr id="2" name="Title 1">
             <a:extLst>
               <a:ext uri="{FF2B5EF4-FFF2-40B4-BE49-F238E27FC236}">
+                <a16:creationId xmlns:a16="http://schemas.microsoft.com/office/drawing/2014/main" id="{2CDC39E7-3B2D-5D4A-A834-9397731C5EED}"/>
+              </a:ext>
+            </a:extLst>
+          </p:cNvPr>
+          <p:cNvSpPr>
+            <a:spLocks noGrp="1"/>
+          </p:cNvSpPr>
+          <p:nvPr>
+            <p:ph type="title"/>
+          </p:nvPr>
+        </p:nvSpPr>
+        <p:spPr>
+          <a:xfrm>
+            <a:off x="1451579" y="804519"/>
+            <a:ext cx="9603275" cy="1049235"/>
+          </a:xfrm>
+        </p:spPr>
+        <p:txBody>
+          <a:bodyPr>
+            <a:normAutofit/>
+          </a:bodyPr>
+          <a:lstStyle/>
+          <a:p>
+            <a:r>
+              <a:rPr lang="en-US" dirty="0"/>
+              <a:t>Residual analysis</a:t>
+            </a:r>
+          </a:p>
+        </p:txBody>
+      </p:sp>
+      <p:sp>
+        <p:nvSpPr>
+          <p:cNvPr id="3" name="Content Placeholder 2">
+            <a:extLst>
+              <a:ext uri="{FF2B5EF4-FFF2-40B4-BE49-F238E27FC236}">
+                <a16:creationId xmlns:a16="http://schemas.microsoft.com/office/drawing/2014/main" id="{70EDF23D-40AA-6A4E-B69E-12212C8D111D}"/>
+              </a:ext>
+            </a:extLst>
+          </p:cNvPr>
+          <p:cNvSpPr>
+            <a:spLocks noGrp="1"/>
+          </p:cNvSpPr>
+          <p:nvPr>
+            <p:ph idx="1"/>
+          </p:nvPr>
+        </p:nvSpPr>
+        <p:spPr>
+          <a:xfrm>
+            <a:off x="0" y="1853754"/>
+            <a:ext cx="5880099" cy="4199727"/>
+          </a:xfrm>
+        </p:spPr>
+        <p:txBody>
+          <a:bodyPr>
+            <a:normAutofit/>
+          </a:bodyPr>
+          <a:lstStyle/>
+          <a:p>
+            <a:r>
+              <a:rPr lang="en-US" dirty="0"/>
+              <a:t>The residuals are also helpful to us in a few ways. </a:t>
+            </a:r>
+          </a:p>
+          <a:p>
+            <a:pPr lvl="1"/>
+            <a:r>
+              <a:rPr lang="en-US" dirty="0"/>
+              <a:t>They can be tallied into error metrics – RMSE, R2…</a:t>
+            </a:r>
+          </a:p>
+          <a:p>
+            <a:r>
+              <a:rPr lang="en-US" dirty="0"/>
+              <a:t>We can graph the residuals along with X to examine. </a:t>
+            </a:r>
+          </a:p>
+          <a:p>
+            <a:r>
+              <a:rPr lang="en-US" dirty="0"/>
+              <a:t>We want this pattern of residuals to not have any patterns in it – to be randomly spread out. </a:t>
+            </a:r>
+          </a:p>
+          <a:p>
+            <a:r>
+              <a:rPr lang="en-US" dirty="0"/>
+              <a:t>Why????????</a:t>
+            </a:r>
+          </a:p>
+          <a:p>
+            <a:pPr lvl="1"/>
+            <a:r>
+              <a:rPr lang="en-US" dirty="0"/>
+              <a:t>Think of what’s different if there’s a pattern in the residuals vs random.</a:t>
+            </a:r>
+          </a:p>
+        </p:txBody>
+      </p:sp>
+      <p:pic>
+        <p:nvPicPr>
+          <p:cNvPr id="4" name="Picture 3">
+            <a:extLst>
+              <a:ext uri="{FF2B5EF4-FFF2-40B4-BE49-F238E27FC236}">
+                <a16:creationId xmlns:a16="http://schemas.microsoft.com/office/drawing/2014/main" id="{652E0B48-5A03-694B-9CC0-2134D1170CF7}"/>
+              </a:ext>
+            </a:extLst>
+          </p:cNvPr>
+          <p:cNvPicPr>
+            <a:picLocks noChangeAspect="1"/>
+          </p:cNvPicPr>
+          <p:nvPr/>
+        </p:nvPicPr>
+        <p:blipFill>
+          <a:blip r:embed="rId2"/>
+          <a:stretch>
+            <a:fillRect/>
+          </a:stretch>
+        </p:blipFill>
+        <p:spPr>
+          <a:xfrm>
+            <a:off x="5880100" y="1093664"/>
+            <a:ext cx="5905499" cy="5802153"/>
+          </a:xfrm>
+          <a:prstGeom prst="rect">
+            <a:avLst/>
+          </a:prstGeom>
+        </p:spPr>
+      </p:pic>
+    </p:spTree>
+    <p:extLst>
+      <p:ext uri="{BB962C8B-B14F-4D97-AF65-F5344CB8AC3E}">
+        <p14:creationId xmlns:p14="http://schemas.microsoft.com/office/powerpoint/2010/main" val="869783968"/>
+      </p:ext>
+    </p:extLst>
+  </p:cSld>
+  <p:clrMapOvr>
+    <a:masterClrMapping/>
+  </p:clrMapOvr>
+</p:sld>
+</file>
+
+<file path=ppt/slides/slide17.xml><?xml version="1.0" encoding="utf-8"?>
+<p:sld xmlns:a="http://schemas.openxmlformats.org/drawingml/2006/main" xmlns:r="http://schemas.openxmlformats.org/officeDocument/2006/relationships" xmlns:p="http://schemas.openxmlformats.org/presentationml/2006/main">
+  <p:cSld>
+    <p:bg>
+      <p:bgPr>
+        <a:gradFill rotWithShape="1">
+          <a:gsLst>
+            <a:gs pos="0">
+              <a:schemeClr val="bg2">
+                <a:tint val="94000"/>
+                <a:satMod val="80000"/>
+                <a:lumMod val="106000"/>
+              </a:schemeClr>
+            </a:gs>
+            <a:gs pos="100000">
+              <a:schemeClr val="bg2">
+                <a:shade val="80000"/>
+              </a:schemeClr>
+            </a:gs>
+          </a:gsLst>
+          <a:path path="circle">
+            <a:fillToRect l="43000" r="43000" b="100000"/>
+          </a:path>
+        </a:gradFill>
+        <a:effectLst/>
+      </p:bgPr>
+    </p:bg>
+    <p:spTree>
+      <p:nvGrpSpPr>
+        <p:cNvPr id="1" name=""/>
+        <p:cNvGrpSpPr/>
+        <p:nvPr/>
+      </p:nvGrpSpPr>
+      <p:grpSpPr>
+        <a:xfrm>
+          <a:off x="0" y="0"/>
+          <a:ext cx="0" cy="0"/>
+          <a:chOff x="0" y="0"/>
+          <a:chExt cx="0" cy="0"/>
+        </a:xfrm>
+      </p:grpSpPr>
+      <p:sp>
+        <p:nvSpPr>
+          <p:cNvPr id="2" name="Title 1">
+            <a:extLst>
+              <a:ext uri="{FF2B5EF4-FFF2-40B4-BE49-F238E27FC236}">
+                <a16:creationId xmlns:a16="http://schemas.microsoft.com/office/drawing/2014/main" id="{AFA51FD7-A9C7-CD4A-B394-4D9E37B6A26E}"/>
+              </a:ext>
+            </a:extLst>
+          </p:cNvPr>
+          <p:cNvSpPr>
+            <a:spLocks noGrp="1"/>
+          </p:cNvSpPr>
+          <p:nvPr>
+            <p:ph type="title"/>
+          </p:nvPr>
+        </p:nvSpPr>
+        <p:spPr>
+          <a:xfrm>
+            <a:off x="1451579" y="804519"/>
+            <a:ext cx="9603275" cy="1049235"/>
+          </a:xfrm>
+        </p:spPr>
+        <p:txBody>
+          <a:bodyPr>
+            <a:normAutofit/>
+          </a:bodyPr>
+          <a:lstStyle/>
+          <a:p>
+            <a:r>
+              <a:rPr lang="en-US" dirty="0"/>
+              <a:t>Why Random?</a:t>
+            </a:r>
+          </a:p>
+        </p:txBody>
+      </p:sp>
+      <p:sp>
+        <p:nvSpPr>
+          <p:cNvPr id="3" name="Content Placeholder 2">
+            <a:extLst>
+              <a:ext uri="{FF2B5EF4-FFF2-40B4-BE49-F238E27FC236}">
+                <a16:creationId xmlns:a16="http://schemas.microsoft.com/office/drawing/2014/main" id="{C2822CE1-EEC2-DA4E-ACFC-03662AAD5629}"/>
+              </a:ext>
+            </a:extLst>
+          </p:cNvPr>
+          <p:cNvSpPr>
+            <a:spLocks noGrp="1"/>
+          </p:cNvSpPr>
+          <p:nvPr>
+            <p:ph idx="1"/>
+          </p:nvPr>
+        </p:nvSpPr>
+        <p:spPr>
+          <a:xfrm>
+            <a:off x="635000" y="1853754"/>
+            <a:ext cx="5359399" cy="4295837"/>
+          </a:xfrm>
+        </p:spPr>
+        <p:txBody>
+          <a:bodyPr>
+            <a:normAutofit/>
+          </a:bodyPr>
+          <a:lstStyle/>
+          <a:p>
+            <a:r>
+              <a:rPr lang="en-US" dirty="0"/>
+              <a:t>If there’s a pattern in the residuals it tells us that there’s some relationship here that isn’t captured in our actual model.</a:t>
+            </a:r>
+          </a:p>
+          <a:p>
+            <a:pPr lvl="1"/>
+            <a:r>
+              <a:rPr lang="en-US" dirty="0"/>
+              <a:t>Middle predictions too high, ends are too low. </a:t>
+            </a:r>
+          </a:p>
+          <a:p>
+            <a:r>
+              <a:rPr lang="en-US" dirty="0"/>
+              <a:t>Residuals should be:</a:t>
+            </a:r>
+          </a:p>
+          <a:p>
+            <a:pPr lvl="1"/>
+            <a:r>
+              <a:rPr lang="en-US" dirty="0"/>
+              <a:t>Uncorrelated with a variable.</a:t>
+            </a:r>
+          </a:p>
+          <a:p>
+            <a:pPr lvl="1"/>
+            <a:r>
+              <a:rPr lang="en-US" dirty="0"/>
+              <a:t>Uncorrelated with each other. </a:t>
+            </a:r>
+          </a:p>
+          <a:p>
+            <a:r>
+              <a:rPr lang="en-US" dirty="0"/>
+              <a:t>We shouldn’t be able to predict residuals. </a:t>
+            </a:r>
+          </a:p>
+          <a:p>
+            <a:pPr lvl="1"/>
+            <a:r>
+              <a:rPr lang="en-US" dirty="0"/>
+              <a:t>That pattern belongs in the model!!!!!</a:t>
+            </a:r>
+          </a:p>
+          <a:p>
+            <a:r>
+              <a:rPr lang="en-US" dirty="0"/>
+              <a:t>Models can be limited in fit – e.g. linear here. </a:t>
+            </a:r>
+          </a:p>
+        </p:txBody>
+      </p:sp>
+      <p:pic>
+        <p:nvPicPr>
+          <p:cNvPr id="2050" name="Picture 2" descr="Minitab's residuals versus fit plot with bad residuals">
+            <a:extLst>
+              <a:ext uri="{FF2B5EF4-FFF2-40B4-BE49-F238E27FC236}">
+                <a16:creationId xmlns:a16="http://schemas.microsoft.com/office/drawing/2014/main" id="{62A0CAEA-4DD1-CA49-84C3-5091103E1D19}"/>
+              </a:ext>
+            </a:extLst>
+          </p:cNvPr>
+          <p:cNvPicPr>
+            <a:picLocks noChangeAspect="1" noChangeArrowheads="1"/>
+          </p:cNvPicPr>
+          <p:nvPr/>
+        </p:nvPicPr>
+        <p:blipFill>
+          <a:blip r:embed="rId2">
+            <a:extLst>
+              <a:ext uri="{28A0092B-C50C-407E-A947-70E740481C1C}">
+                <a14:useLocalDpi xmlns:a14="http://schemas.microsoft.com/office/drawing/2010/main" val="0"/>
+              </a:ext>
+            </a:extLst>
+          </a:blip>
+          <a:stretch>
+            <a:fillRect/>
+          </a:stretch>
+        </p:blipFill>
+        <p:spPr bwMode="auto">
+          <a:xfrm>
+            <a:off x="6094411" y="2087558"/>
+            <a:ext cx="5707862" cy="3805241"/>
+          </a:xfrm>
+          <a:prstGeom prst="rect">
+            <a:avLst/>
+          </a:prstGeom>
+          <a:noFill/>
+          <a:extLst>
+            <a:ext uri="{909E8E84-426E-40DD-AFC4-6F175D3DCCD1}">
+              <a14:hiddenFill xmlns:a14="http://schemas.microsoft.com/office/drawing/2010/main">
+                <a:solidFill>
+                  <a:srgbClr val="FFFFFF"/>
+                </a:solidFill>
+              </a14:hiddenFill>
+            </a:ext>
+          </a:extLst>
+        </p:spPr>
+      </p:pic>
+    </p:spTree>
+    <p:extLst>
+      <p:ext uri="{BB962C8B-B14F-4D97-AF65-F5344CB8AC3E}">
+        <p14:creationId xmlns:p14="http://schemas.microsoft.com/office/powerpoint/2010/main" val="1812565449"/>
+      </p:ext>
+    </p:extLst>
+  </p:cSld>
+  <p:clrMapOvr>
+    <a:masterClrMapping/>
+  </p:clrMapOvr>
+</p:sld>
+</file>
+
+<file path=ppt/slides/slide18.xml><?xml version="1.0" encoding="utf-8"?>
+<p:sld xmlns:a="http://schemas.openxmlformats.org/drawingml/2006/main" xmlns:r="http://schemas.openxmlformats.org/officeDocument/2006/relationships" xmlns:p="http://schemas.openxmlformats.org/presentationml/2006/main">
+  <p:cSld>
+    <p:spTree>
+      <p:nvGrpSpPr>
+        <p:cNvPr id="1" name=""/>
+        <p:cNvGrpSpPr/>
+        <p:nvPr/>
+      </p:nvGrpSpPr>
+      <p:grpSpPr>
+        <a:xfrm>
+          <a:off x="0" y="0"/>
+          <a:ext cx="0" cy="0"/>
+          <a:chOff x="0" y="0"/>
+          <a:chExt cx="0" cy="0"/>
+        </a:xfrm>
+      </p:grpSpPr>
+      <p:sp>
+        <p:nvSpPr>
+          <p:cNvPr id="2" name="Title 1">
+            <a:extLst>
+              <a:ext uri="{FF2B5EF4-FFF2-40B4-BE49-F238E27FC236}">
+                <a16:creationId xmlns:a16="http://schemas.microsoft.com/office/drawing/2014/main" id="{77C3FDD7-7164-3D44-B4AF-1B7CD86E680E}"/>
+              </a:ext>
+            </a:extLst>
+          </p:cNvPr>
+          <p:cNvSpPr>
+            <a:spLocks noGrp="1"/>
+          </p:cNvSpPr>
+          <p:nvPr>
+            <p:ph type="title"/>
+          </p:nvPr>
+        </p:nvSpPr>
+        <p:spPr/>
+        <p:txBody>
+          <a:bodyPr/>
+          <a:lstStyle/>
+          <a:p>
+            <a:r>
+              <a:rPr lang="en-US" dirty="0"/>
+              <a:t>Doing Regression - Other Packages</a:t>
+            </a:r>
+          </a:p>
+        </p:txBody>
+      </p:sp>
+      <p:sp>
+        <p:nvSpPr>
+          <p:cNvPr id="3" name="Content Placeholder 2">
+            <a:extLst>
+              <a:ext uri="{FF2B5EF4-FFF2-40B4-BE49-F238E27FC236}">
+                <a16:creationId xmlns:a16="http://schemas.microsoft.com/office/drawing/2014/main" id="{88F66A41-146A-E147-A72A-B35E0AEFB656}"/>
+              </a:ext>
+            </a:extLst>
+          </p:cNvPr>
+          <p:cNvSpPr>
+            <a:spLocks noGrp="1"/>
+          </p:cNvSpPr>
+          <p:nvPr>
+            <p:ph idx="1"/>
+          </p:nvPr>
+        </p:nvSpPr>
+        <p:spPr>
+          <a:xfrm>
+            <a:off x="1451579" y="1853754"/>
+            <a:ext cx="9603275" cy="4318446"/>
+          </a:xfrm>
+        </p:spPr>
+        <p:txBody>
+          <a:bodyPr>
+            <a:normAutofit/>
+          </a:bodyPr>
+          <a:lstStyle/>
+          <a:p>
+            <a:r>
+              <a:rPr lang="en-US" dirty="0"/>
+              <a:t>Using LLS calculations is ok for one x, but impractical in reality. </a:t>
+            </a:r>
+          </a:p>
+          <a:p>
+            <a:r>
+              <a:rPr lang="en-US" dirty="0"/>
+              <a:t>Regression is performed by existing packages, such as </a:t>
+            </a:r>
+            <a:r>
+              <a:rPr lang="en-US" dirty="0" err="1"/>
+              <a:t>StatsModels</a:t>
+            </a:r>
+            <a:r>
+              <a:rPr lang="en-US" dirty="0"/>
+              <a:t>, </a:t>
+            </a:r>
+            <a:r>
+              <a:rPr lang="en-US" dirty="0" err="1"/>
+              <a:t>Scipy</a:t>
+            </a:r>
+            <a:r>
+              <a:rPr lang="en-US" dirty="0"/>
+              <a:t>, and </a:t>
+            </a:r>
+            <a:r>
+              <a:rPr lang="en-US" dirty="0" err="1"/>
+              <a:t>Scikitlearn</a:t>
+            </a:r>
+            <a:r>
+              <a:rPr lang="en-US" dirty="0"/>
+              <a:t>. </a:t>
+            </a:r>
+          </a:p>
+          <a:p>
+            <a:pPr lvl="1"/>
+            <a:r>
+              <a:rPr lang="en-US" dirty="0"/>
+              <a:t>The book uses </a:t>
+            </a:r>
+            <a:r>
+              <a:rPr lang="en-US" dirty="0" err="1"/>
+              <a:t>StatsModels</a:t>
+            </a:r>
+            <a:r>
+              <a:rPr lang="en-US" dirty="0"/>
+              <a:t> when multiple regression starts. </a:t>
+            </a:r>
+          </a:p>
+          <a:p>
+            <a:pPr lvl="1"/>
+            <a:r>
+              <a:rPr lang="en-US" dirty="0"/>
+              <a:t>They all ultimately do the same thing. </a:t>
+            </a:r>
+          </a:p>
+          <a:p>
+            <a:r>
+              <a:rPr lang="en-US" dirty="0"/>
+              <a:t>We’ll use both </a:t>
+            </a:r>
+            <a:r>
+              <a:rPr lang="en-US" dirty="0" err="1"/>
+              <a:t>StatsModels</a:t>
+            </a:r>
+            <a:r>
+              <a:rPr lang="en-US" dirty="0"/>
+              <a:t> (only a little) and </a:t>
+            </a:r>
+            <a:r>
+              <a:rPr lang="en-US" dirty="0" err="1"/>
+              <a:t>Scikitlearn</a:t>
+            </a:r>
+            <a:r>
+              <a:rPr lang="en-US" dirty="0"/>
+              <a:t> (a lot):</a:t>
+            </a:r>
+          </a:p>
+          <a:p>
+            <a:pPr lvl="1"/>
+            <a:r>
+              <a:rPr lang="en-US" dirty="0" err="1"/>
+              <a:t>Statsmodels</a:t>
+            </a:r>
+            <a:r>
+              <a:rPr lang="en-US" dirty="0"/>
+              <a:t> provide more stats data in the output, so we will use that sometimes. </a:t>
+            </a:r>
+          </a:p>
+          <a:p>
+            <a:pPr lvl="1"/>
+            <a:r>
+              <a:rPr lang="en-US" dirty="0"/>
+              <a:t>The </a:t>
+            </a:r>
+            <a:r>
+              <a:rPr lang="en-US" dirty="0" err="1"/>
+              <a:t>scikitlearn</a:t>
+            </a:r>
+            <a:r>
+              <a:rPr lang="en-US" dirty="0"/>
+              <a:t> is much more relevant experience for ML stuff. </a:t>
+            </a:r>
+          </a:p>
+          <a:p>
+            <a:r>
+              <a:rPr lang="en-US" dirty="0"/>
+              <a:t>You need to be good with sklearn no matter what, if you’re going to not learn anything, the details of </a:t>
+            </a:r>
+            <a:r>
+              <a:rPr lang="en-US" dirty="0" err="1"/>
+              <a:t>statsmodels</a:t>
+            </a:r>
+            <a:r>
+              <a:rPr lang="en-US" dirty="0"/>
+              <a:t> is the choice to make. We just use it for some details. </a:t>
+            </a:r>
+          </a:p>
+        </p:txBody>
+      </p:sp>
+    </p:spTree>
+    <p:extLst>
+      <p:ext uri="{BB962C8B-B14F-4D97-AF65-F5344CB8AC3E}">
+        <p14:creationId xmlns:p14="http://schemas.microsoft.com/office/powerpoint/2010/main" val="2723228470"/>
+      </p:ext>
+    </p:extLst>
+  </p:cSld>
+  <p:clrMapOvr>
+    <a:masterClrMapping/>
+  </p:clrMapOvr>
+</p:sld>
+</file>
+
+<file path=ppt/slides/slide19.xml><?xml version="1.0" encoding="utf-8"?>
+<p:sld xmlns:a="http://schemas.openxmlformats.org/drawingml/2006/main" xmlns:r="http://schemas.openxmlformats.org/officeDocument/2006/relationships" xmlns:p="http://schemas.openxmlformats.org/presentationml/2006/main">
+  <p:cSld>
+    <p:bg>
+      <p:bgPr>
+        <a:gradFill rotWithShape="1">
+          <a:gsLst>
+            <a:gs pos="0">
+              <a:schemeClr val="bg2">
+                <a:tint val="94000"/>
+                <a:satMod val="80000"/>
+                <a:lumMod val="106000"/>
+              </a:schemeClr>
+            </a:gs>
+            <a:gs pos="100000">
+              <a:schemeClr val="bg2">
+                <a:shade val="80000"/>
+              </a:schemeClr>
+            </a:gs>
+          </a:gsLst>
+          <a:path path="circle">
+            <a:fillToRect l="43000" r="43000" b="100000"/>
+          </a:path>
+        </a:gradFill>
+        <a:effectLst/>
+      </p:bgPr>
+    </p:bg>
+    <p:spTree>
+      <p:nvGrpSpPr>
+        <p:cNvPr id="1" name=""/>
+        <p:cNvGrpSpPr/>
+        <p:nvPr/>
+      </p:nvGrpSpPr>
+      <p:grpSpPr>
+        <a:xfrm>
+          <a:off x="0" y="0"/>
+          <a:ext cx="0" cy="0"/>
+          <a:chOff x="0" y="0"/>
+          <a:chExt cx="0" cy="0"/>
+        </a:xfrm>
+      </p:grpSpPr>
+      <p:sp>
+        <p:nvSpPr>
+          <p:cNvPr id="2" name="Title 1">
+            <a:extLst>
+              <a:ext uri="{FF2B5EF4-FFF2-40B4-BE49-F238E27FC236}">
                 <a16:creationId xmlns:a16="http://schemas.microsoft.com/office/drawing/2014/main" id="{AC005CA8-1CC9-B945-8B41-835F480E8FCE}"/>
               </a:ext>
             </a:extLst>
@@ -6596,132 +7236,49 @@
           </a:extLst>
         </p:spPr>
       </p:pic>
+      <p:sp>
+        <p:nvSpPr>
+          <p:cNvPr id="4" name="TextBox 3">
+            <a:extLst>
+              <a:ext uri="{FF2B5EF4-FFF2-40B4-BE49-F238E27FC236}">
+                <a16:creationId xmlns:a16="http://schemas.microsoft.com/office/drawing/2014/main" id="{259B8CFA-0710-047F-42C9-EBEB4D6B9864}"/>
+              </a:ext>
+            </a:extLst>
+          </p:cNvPr>
+          <p:cNvSpPr txBox="1"/>
+          <p:nvPr/>
+        </p:nvSpPr>
+        <p:spPr>
+          <a:xfrm>
+            <a:off x="6591719" y="5394521"/>
+            <a:ext cx="5193881" cy="646331"/>
+          </a:xfrm>
+          <a:prstGeom prst="rect">
+            <a:avLst/>
+          </a:prstGeom>
+          <a:noFill/>
+        </p:spPr>
+        <p:txBody>
+          <a:bodyPr wrap="square" rtlCol="0">
+            <a:spAutoFit/>
+          </a:bodyPr>
+          <a:lstStyle/>
+          <a:p>
+            <a:pPr marL="285750" indent="-285750">
+              <a:buFont typeface="Arial" panose="020B0604020202020204" pitchFamily="34" charset="0"/>
+              <a:buChar char="•"/>
+            </a:pPr>
+            <a:r>
+              <a:rPr lang="en-US" dirty="0"/>
+              <a:t>Note: a 2D array that is 1 column wide and a 1D array are two different things…</a:t>
+            </a:r>
+          </a:p>
+        </p:txBody>
+      </p:sp>
     </p:spTree>
     <p:extLst>
       <p:ext uri="{BB962C8B-B14F-4D97-AF65-F5344CB8AC3E}">
         <p14:creationId xmlns:p14="http://schemas.microsoft.com/office/powerpoint/2010/main" val="519175856"/>
-      </p:ext>
-    </p:extLst>
-  </p:cSld>
-  <p:clrMapOvr>
-    <a:masterClrMapping/>
-  </p:clrMapOvr>
-</p:sld>
-</file>
-
-<file path=ppt/slides/slide17.xml><?xml version="1.0" encoding="utf-8"?>
-<p:sld xmlns:a="http://schemas.openxmlformats.org/drawingml/2006/main" xmlns:r="http://schemas.openxmlformats.org/officeDocument/2006/relationships" xmlns:p="http://schemas.openxmlformats.org/presentationml/2006/main">
-  <p:cSld>
-    <p:spTree>
-      <p:nvGrpSpPr>
-        <p:cNvPr id="1" name=""/>
-        <p:cNvGrpSpPr/>
-        <p:nvPr/>
-      </p:nvGrpSpPr>
-      <p:grpSpPr>
-        <a:xfrm>
-          <a:off x="0" y="0"/>
-          <a:ext cx="0" cy="0"/>
-          <a:chOff x="0" y="0"/>
-          <a:chExt cx="0" cy="0"/>
-        </a:xfrm>
-      </p:grpSpPr>
-      <p:sp>
-        <p:nvSpPr>
-          <p:cNvPr id="2" name="Title 1">
-            <a:extLst>
-              <a:ext uri="{FF2B5EF4-FFF2-40B4-BE49-F238E27FC236}">
-                <a16:creationId xmlns:a16="http://schemas.microsoft.com/office/drawing/2014/main" id="{22AE5CF6-8B41-ED49-BBCA-960CCDE6DC07}"/>
-              </a:ext>
-            </a:extLst>
-          </p:cNvPr>
-          <p:cNvSpPr>
-            <a:spLocks noGrp="1"/>
-          </p:cNvSpPr>
-          <p:nvPr>
-            <p:ph type="title"/>
-          </p:nvPr>
-        </p:nvSpPr>
-        <p:spPr/>
-        <p:txBody>
-          <a:bodyPr/>
-          <a:lstStyle/>
-          <a:p>
-            <a:r>
-              <a:rPr lang="en-US" dirty="0"/>
-              <a:t>Conclusion</a:t>
-            </a:r>
-          </a:p>
-        </p:txBody>
-      </p:sp>
-      <p:sp>
-        <p:nvSpPr>
-          <p:cNvPr id="3" name="Content Placeholder 2">
-            <a:extLst>
-              <a:ext uri="{FF2B5EF4-FFF2-40B4-BE49-F238E27FC236}">
-                <a16:creationId xmlns:a16="http://schemas.microsoft.com/office/drawing/2014/main" id="{2CE57ECC-D5E7-8742-82DE-6541E34B1064}"/>
-              </a:ext>
-            </a:extLst>
-          </p:cNvPr>
-          <p:cNvSpPr>
-            <a:spLocks noGrp="1"/>
-          </p:cNvSpPr>
-          <p:nvPr>
-            <p:ph idx="1"/>
-          </p:nvPr>
-        </p:nvSpPr>
-        <p:spPr/>
-        <p:txBody>
-          <a:bodyPr/>
-          <a:lstStyle/>
-          <a:p>
-            <a:r>
-              <a:rPr lang="en-US" dirty="0"/>
-              <a:t>We can train our models to predict Y, given X.</a:t>
-            </a:r>
-          </a:p>
-          <a:p>
-            <a:pPr lvl="1"/>
-            <a:r>
-              <a:rPr lang="en-US" dirty="0"/>
-              <a:t>In this case, the model is a simple algebra equation. </a:t>
-            </a:r>
-          </a:p>
-          <a:p>
-            <a:r>
-              <a:rPr lang="en-US" dirty="0"/>
-              <a:t>This is a simple version of all the more complex </a:t>
-            </a:r>
-            <a:r>
-              <a:rPr lang="en-US"/>
-              <a:t>ML work to </a:t>
-            </a:r>
-            <a:r>
-              <a:rPr lang="en-US" dirty="0"/>
-              <a:t>come later. </a:t>
-            </a:r>
-          </a:p>
-          <a:p>
-            <a:r>
-              <a:rPr lang="en-US" dirty="0"/>
-              <a:t>The residuals give us information on how good our model is. </a:t>
-            </a:r>
-          </a:p>
-          <a:p>
-            <a:endParaRPr lang="en-US" dirty="0"/>
-          </a:p>
-          <a:p>
-            <a:r>
-              <a:rPr lang="en-US" dirty="0"/>
-              <a:t>Accuracy and reliability of the predictions…. Next time. </a:t>
-            </a:r>
-          </a:p>
-        </p:txBody>
-      </p:sp>
-    </p:spTree>
-    <p:extLst>
-      <p:ext uri="{BB962C8B-B14F-4D97-AF65-F5344CB8AC3E}">
-        <p14:creationId xmlns:p14="http://schemas.microsoft.com/office/powerpoint/2010/main" val="3713883451"/>
       </p:ext>
     </p:extLst>
   </p:cSld>
@@ -6816,6 +7373,345 @@
 </p:sld>
 </file>
 
+<file path=ppt/slides/slide20.xml><?xml version="1.0" encoding="utf-8"?>
+<p:sld xmlns:a="http://schemas.openxmlformats.org/drawingml/2006/main" xmlns:r="http://schemas.openxmlformats.org/officeDocument/2006/relationships" xmlns:p="http://schemas.openxmlformats.org/presentationml/2006/main">
+  <p:cSld>
+    <p:spTree>
+      <p:nvGrpSpPr>
+        <p:cNvPr id="1" name=""/>
+        <p:cNvGrpSpPr/>
+        <p:nvPr/>
+      </p:nvGrpSpPr>
+      <p:grpSpPr>
+        <a:xfrm>
+          <a:off x="0" y="0"/>
+          <a:ext cx="0" cy="0"/>
+          <a:chOff x="0" y="0"/>
+          <a:chExt cx="0" cy="0"/>
+        </a:xfrm>
+      </p:grpSpPr>
+      <p:sp>
+        <p:nvSpPr>
+          <p:cNvPr id="2" name="Title 1">
+            <a:extLst>
+              <a:ext uri="{FF2B5EF4-FFF2-40B4-BE49-F238E27FC236}">
+                <a16:creationId xmlns:a16="http://schemas.microsoft.com/office/drawing/2014/main" id="{D488AB2B-8325-23DD-372E-361893A4DCC3}"/>
+              </a:ext>
+            </a:extLst>
+          </p:cNvPr>
+          <p:cNvSpPr>
+            <a:spLocks noGrp="1"/>
+          </p:cNvSpPr>
+          <p:nvPr>
+            <p:ph type="title"/>
+          </p:nvPr>
+        </p:nvSpPr>
+        <p:spPr/>
+        <p:txBody>
+          <a:bodyPr/>
+          <a:lstStyle/>
+          <a:p>
+            <a:r>
+              <a:rPr lang="en-US" dirty="0"/>
+              <a:t>Processing Data</a:t>
+            </a:r>
+          </a:p>
+        </p:txBody>
+      </p:sp>
+      <p:sp>
+        <p:nvSpPr>
+          <p:cNvPr id="3" name="Content Placeholder 2">
+            <a:extLst>
+              <a:ext uri="{FF2B5EF4-FFF2-40B4-BE49-F238E27FC236}">
+                <a16:creationId xmlns:a16="http://schemas.microsoft.com/office/drawing/2014/main" id="{3436ED26-EAEC-BA20-4928-E54E1F9040BA}"/>
+              </a:ext>
+            </a:extLst>
+          </p:cNvPr>
+          <p:cNvSpPr>
+            <a:spLocks noGrp="1"/>
+          </p:cNvSpPr>
+          <p:nvPr>
+            <p:ph idx="1"/>
+          </p:nvPr>
+        </p:nvSpPr>
+        <p:spPr>
+          <a:xfrm>
+            <a:off x="1451579" y="1853754"/>
+            <a:ext cx="9603275" cy="4199727"/>
+          </a:xfrm>
+        </p:spPr>
+        <p:txBody>
+          <a:bodyPr>
+            <a:normAutofit/>
+          </a:bodyPr>
+          <a:lstStyle/>
+          <a:p>
+            <a:r>
+              <a:rPr lang="en-US" dirty="0"/>
+              <a:t>As we start to do real machine learning, we’ll need to manage data in specific shapes. </a:t>
+            </a:r>
+          </a:p>
+          <a:p>
+            <a:pPr lvl="1"/>
+            <a:r>
+              <a:rPr lang="en-US" dirty="0"/>
+              <a:t>This is generally not too hard (libraries try to make it easy), but is critical. </a:t>
+            </a:r>
+          </a:p>
+          <a:p>
+            <a:r>
+              <a:rPr lang="en-US" dirty="0"/>
+              <a:t>Ultimately, we’ll need to provide data to a model in specific shapes. </a:t>
+            </a:r>
+          </a:p>
+          <a:p>
+            <a:pPr lvl="1"/>
+            <a:r>
+              <a:rPr lang="en-US" dirty="0"/>
+              <a:t>Our job is basically just to steer data into the ML algorithm and get the results. </a:t>
+            </a:r>
+          </a:p>
+          <a:p>
+            <a:pPr lvl="1"/>
+            <a:r>
+              <a:rPr lang="en-US" dirty="0"/>
+              <a:t>We’ll semi frequently need to manipulate those shapes as we process data. </a:t>
+            </a:r>
+          </a:p>
+          <a:p>
+            <a:pPr lvl="1"/>
+            <a:r>
+              <a:rPr lang="en-US" dirty="0"/>
+              <a:t>With different data types (time series, image, text…) we need to construct the shapes. </a:t>
+            </a:r>
+          </a:p>
+          <a:p>
+            <a:pPr lvl="1"/>
+            <a:r>
+              <a:rPr lang="en-US" dirty="0"/>
+              <a:t>For some things this can be fairly complex, but we start simple. </a:t>
+            </a:r>
+          </a:p>
+          <a:p>
+            <a:r>
+              <a:rPr lang="en-US" dirty="0"/>
+              <a:t>Start to consciously think about dimensions and shape of data as we use it. </a:t>
+            </a:r>
+          </a:p>
+          <a:p>
+            <a:pPr lvl="1"/>
+            <a:r>
+              <a:rPr lang="en-US" dirty="0"/>
+              <a:t>In sklearn, most things we use can process array, </a:t>
+            </a:r>
+            <a:r>
+              <a:rPr lang="en-US" dirty="0" err="1"/>
+              <a:t>df</a:t>
+            </a:r>
+            <a:r>
+              <a:rPr lang="en-US" dirty="0"/>
+              <a:t>, series, list, </a:t>
+            </a:r>
+            <a:r>
+              <a:rPr lang="en-US" dirty="0" err="1"/>
+              <a:t>etc</a:t>
+            </a:r>
+            <a:r>
+              <a:rPr lang="en-US" dirty="0"/>
+              <a:t>…</a:t>
+            </a:r>
+          </a:p>
+          <a:p>
+            <a:pPr lvl="1"/>
+            <a:r>
+              <a:rPr lang="en-US" dirty="0"/>
+              <a:t>It’ll usually work ok (with sample data) unless you do something weird (usually). </a:t>
+            </a:r>
+          </a:p>
+          <a:p>
+            <a:endParaRPr lang="en-US" dirty="0"/>
+          </a:p>
+        </p:txBody>
+      </p:sp>
+    </p:spTree>
+    <p:extLst>
+      <p:ext uri="{BB962C8B-B14F-4D97-AF65-F5344CB8AC3E}">
+        <p14:creationId xmlns:p14="http://schemas.microsoft.com/office/powerpoint/2010/main" val="3967313982"/>
+      </p:ext>
+    </p:extLst>
+  </p:cSld>
+  <p:clrMapOvr>
+    <a:masterClrMapping/>
+  </p:clrMapOvr>
+</p:sld>
+</file>
+
+<file path=ppt/slides/slide21.xml><?xml version="1.0" encoding="utf-8"?>
+<p:sld xmlns:a="http://schemas.openxmlformats.org/drawingml/2006/main" xmlns:r="http://schemas.openxmlformats.org/officeDocument/2006/relationships" xmlns:p="http://schemas.openxmlformats.org/presentationml/2006/main">
+  <p:cSld>
+    <p:spTree>
+      <p:nvGrpSpPr>
+        <p:cNvPr id="1" name=""/>
+        <p:cNvGrpSpPr/>
+        <p:nvPr/>
+      </p:nvGrpSpPr>
+      <p:grpSpPr>
+        <a:xfrm>
+          <a:off x="0" y="0"/>
+          <a:ext cx="0" cy="0"/>
+          <a:chOff x="0" y="0"/>
+          <a:chExt cx="0" cy="0"/>
+        </a:xfrm>
+      </p:grpSpPr>
+      <p:sp>
+        <p:nvSpPr>
+          <p:cNvPr id="2" name="Title 1">
+            <a:extLst>
+              <a:ext uri="{FF2B5EF4-FFF2-40B4-BE49-F238E27FC236}">
+                <a16:creationId xmlns:a16="http://schemas.microsoft.com/office/drawing/2014/main" id="{22AE5CF6-8B41-ED49-BBCA-960CCDE6DC07}"/>
+              </a:ext>
+            </a:extLst>
+          </p:cNvPr>
+          <p:cNvSpPr>
+            <a:spLocks noGrp="1"/>
+          </p:cNvSpPr>
+          <p:nvPr>
+            <p:ph type="title"/>
+          </p:nvPr>
+        </p:nvSpPr>
+        <p:spPr/>
+        <p:txBody>
+          <a:bodyPr/>
+          <a:lstStyle/>
+          <a:p>
+            <a:r>
+              <a:rPr lang="en-US" dirty="0"/>
+              <a:t>Conclusion</a:t>
+            </a:r>
+          </a:p>
+        </p:txBody>
+      </p:sp>
+      <p:sp>
+        <p:nvSpPr>
+          <p:cNvPr id="3" name="Content Placeholder 2">
+            <a:extLst>
+              <a:ext uri="{FF2B5EF4-FFF2-40B4-BE49-F238E27FC236}">
+                <a16:creationId xmlns:a16="http://schemas.microsoft.com/office/drawing/2014/main" id="{2CE57ECC-D5E7-8742-82DE-6541E34B1064}"/>
+              </a:ext>
+            </a:extLst>
+          </p:cNvPr>
+          <p:cNvSpPr>
+            <a:spLocks noGrp="1"/>
+          </p:cNvSpPr>
+          <p:nvPr>
+            <p:ph idx="1"/>
+          </p:nvPr>
+        </p:nvSpPr>
+        <p:spPr>
+          <a:xfrm>
+            <a:off x="1451579" y="1853754"/>
+            <a:ext cx="9603275" cy="4199727"/>
+          </a:xfrm>
+        </p:spPr>
+        <p:txBody>
+          <a:bodyPr>
+            <a:normAutofit/>
+          </a:bodyPr>
+          <a:lstStyle/>
+          <a:p>
+            <a:r>
+              <a:rPr lang="en-US" dirty="0"/>
+              <a:t>We can train our models to predict Y, given X.</a:t>
+            </a:r>
+          </a:p>
+          <a:p>
+            <a:pPr lvl="1"/>
+            <a:r>
+              <a:rPr lang="en-US" dirty="0"/>
+              <a:t>Models always predict an output given an input, the how can vary widely. </a:t>
+            </a:r>
+          </a:p>
+          <a:p>
+            <a:pPr lvl="1"/>
+            <a:r>
+              <a:rPr lang="en-US" dirty="0"/>
+              <a:t>In this case, the model is a simple algebra equation, y=</a:t>
+            </a:r>
+            <a:r>
+              <a:rPr lang="en-US" dirty="0" err="1"/>
+              <a:t>mx+b</a:t>
+            </a:r>
+            <a:r>
+              <a:rPr lang="en-US" dirty="0"/>
+              <a:t>. </a:t>
+            </a:r>
+          </a:p>
+          <a:p>
+            <a:pPr lvl="1"/>
+            <a:r>
+              <a:rPr lang="en-US" dirty="0"/>
+              <a:t>The model is a simplification of reality – will someone pay, will customer come, will it rain…</a:t>
+            </a:r>
+          </a:p>
+          <a:p>
+            <a:pPr lvl="1"/>
+            <a:r>
+              <a:rPr lang="en-US" dirty="0"/>
+              <a:t>Our steps are the same no matter model type we use (LR, NN, Tree…), internal math differs.</a:t>
+            </a:r>
+          </a:p>
+          <a:p>
+            <a:r>
+              <a:rPr lang="en-US" dirty="0"/>
+              <a:t>The residuals give us information on how good our model is. </a:t>
+            </a:r>
+          </a:p>
+          <a:p>
+            <a:pPr lvl="1"/>
+            <a:r>
+              <a:rPr lang="en-US" dirty="0"/>
+              <a:t>Big misses, bad model. Small misses, good model. </a:t>
+            </a:r>
+          </a:p>
+          <a:p>
+            <a:pPr lvl="1"/>
+            <a:r>
+              <a:rPr lang="en-US" dirty="0"/>
+              <a:t>We can compare different types of models to choose the most accurate. </a:t>
+            </a:r>
+          </a:p>
+          <a:p>
+            <a:r>
+              <a:rPr lang="en-US" dirty="0"/>
+              <a:t>Accuracy and reliability of the predictions…. Next time. </a:t>
+            </a:r>
+          </a:p>
+          <a:p>
+            <a:pPr lvl="1"/>
+            <a:r>
+              <a:rPr lang="en-US" dirty="0"/>
+              <a:t>Models made differently can be compared and evaluated. </a:t>
+            </a:r>
+          </a:p>
+          <a:p>
+            <a:pPr lvl="1"/>
+            <a:endParaRPr lang="en-US" dirty="0"/>
+          </a:p>
+        </p:txBody>
+      </p:sp>
+    </p:spTree>
+    <p:extLst>
+      <p:ext uri="{BB962C8B-B14F-4D97-AF65-F5344CB8AC3E}">
+        <p14:creationId xmlns:p14="http://schemas.microsoft.com/office/powerpoint/2010/main" val="3713883451"/>
+      </p:ext>
+    </p:extLst>
+  </p:cSld>
+  <p:clrMapOvr>
+    <a:masterClrMapping/>
+  </p:clrMapOvr>
+</p:sld>
+</file>
+
 <file path=ppt/slides/slide3.xml><?xml version="1.0" encoding="utf-8"?>
 <p:sld xmlns:a="http://schemas.openxmlformats.org/drawingml/2006/main" xmlns:r="http://schemas.openxmlformats.org/officeDocument/2006/relationships" xmlns:p="http://schemas.openxmlformats.org/presentationml/2006/main">
   <p:cSld>
@@ -6946,6 +7842,214 @@
   <p:cSld>
     <p:spTree>
       <p:nvGrpSpPr>
+        <p:cNvPr id="1" name=""/>
+        <p:cNvGrpSpPr/>
+        <p:nvPr/>
+      </p:nvGrpSpPr>
+      <p:grpSpPr>
+        <a:xfrm>
+          <a:off x="0" y="0"/>
+          <a:ext cx="0" cy="0"/>
+          <a:chOff x="0" y="0"/>
+          <a:chExt cx="0" cy="0"/>
+        </a:xfrm>
+      </p:grpSpPr>
+      <p:sp>
+        <p:nvSpPr>
+          <p:cNvPr id="2" name="Title 1">
+            <a:extLst>
+              <a:ext uri="{FF2B5EF4-FFF2-40B4-BE49-F238E27FC236}">
+                <a16:creationId xmlns:a16="http://schemas.microsoft.com/office/drawing/2014/main" id="{63C1714D-69CA-B253-DE74-A5CA82D4CD13}"/>
+              </a:ext>
+            </a:extLst>
+          </p:cNvPr>
+          <p:cNvSpPr>
+            <a:spLocks noGrp="1"/>
+          </p:cNvSpPr>
+          <p:nvPr>
+            <p:ph type="title"/>
+          </p:nvPr>
+        </p:nvSpPr>
+        <p:spPr/>
+        <p:txBody>
+          <a:bodyPr/>
+          <a:lstStyle/>
+          <a:p>
+            <a:r>
+              <a:rPr lang="en-US" dirty="0"/>
+              <a:t>Models</a:t>
+            </a:r>
+          </a:p>
+        </p:txBody>
+      </p:sp>
+      <p:sp>
+        <p:nvSpPr>
+          <p:cNvPr id="3" name="Content Placeholder 2">
+            <a:extLst>
+              <a:ext uri="{FF2B5EF4-FFF2-40B4-BE49-F238E27FC236}">
+                <a16:creationId xmlns:a16="http://schemas.microsoft.com/office/drawing/2014/main" id="{2118D3FC-2B56-D6C1-F1AE-37255DD168C6}"/>
+              </a:ext>
+            </a:extLst>
+          </p:cNvPr>
+          <p:cNvSpPr>
+            <a:spLocks noGrp="1"/>
+          </p:cNvSpPr>
+          <p:nvPr>
+            <p:ph idx="1"/>
+          </p:nvPr>
+        </p:nvSpPr>
+        <p:spPr>
+          <a:xfrm>
+            <a:off x="150726" y="1853754"/>
+            <a:ext cx="7799476" cy="4199727"/>
+          </a:xfrm>
+        </p:spPr>
+        <p:txBody>
+          <a:bodyPr>
+            <a:normAutofit lnSpcReduction="10000"/>
+          </a:bodyPr>
+          <a:lstStyle/>
+          <a:p>
+            <a:r>
+              <a:rPr lang="en-US" dirty="0"/>
+              <a:t>Models are a mathematical simplification of some real thing. </a:t>
+            </a:r>
+          </a:p>
+          <a:p>
+            <a:pPr lvl="1"/>
+            <a:r>
+              <a:rPr lang="en-US" dirty="0"/>
+              <a:t>E.g. a </a:t>
+            </a:r>
+            <a:r>
+              <a:rPr lang="en-US" dirty="0" err="1"/>
+              <a:t>poisson</a:t>
+            </a:r>
+            <a:r>
+              <a:rPr lang="en-US" dirty="0"/>
+              <a:t> distribution is a model of goals in hockey games.  </a:t>
+            </a:r>
+          </a:p>
+          <a:p>
+            <a:r>
+              <a:rPr lang="en-US" dirty="0"/>
+              <a:t>In predictive analytics models translate inputs to output(s). </a:t>
+            </a:r>
+          </a:p>
+          <a:p>
+            <a:pPr lvl="1"/>
+            <a:r>
+              <a:rPr lang="en-US" dirty="0"/>
+              <a:t>E.g. a model can model a “loan decision” – details in, approval out. </a:t>
+            </a:r>
+          </a:p>
+          <a:p>
+            <a:pPr lvl="1"/>
+            <a:r>
+              <a:rPr lang="en-US" dirty="0"/>
+              <a:t>This model is a simplification of reality, “will this person pay their loan”. </a:t>
+            </a:r>
+          </a:p>
+          <a:p>
+            <a:r>
+              <a:rPr lang="en-US" dirty="0"/>
+              <a:t>We can make many different models that can do this, quality varies... </a:t>
+            </a:r>
+          </a:p>
+          <a:p>
+            <a:pPr lvl="1"/>
+            <a:r>
+              <a:rPr lang="en-US" dirty="0"/>
+              <a:t>They all do the same thing, but work differently internally. </a:t>
+            </a:r>
+          </a:p>
+          <a:p>
+            <a:pPr lvl="1"/>
+            <a:r>
+              <a:rPr lang="en-US" dirty="0"/>
+              <a:t>Regression, neural networks, SVMs, trees, can all make the ‘same’ model.</a:t>
+            </a:r>
+          </a:p>
+          <a:p>
+            <a:r>
+              <a:rPr lang="en-US" dirty="0"/>
+              <a:t>We build the model using old (training) data, then use it – 2 step. </a:t>
+            </a:r>
+          </a:p>
+          <a:p>
+            <a:pPr lvl="1"/>
+            <a:r>
+              <a:rPr lang="en-US" dirty="0"/>
+              <a:t>We ‘train’ the model, by doing the math to figure out the params (m, b).</a:t>
+            </a:r>
+          </a:p>
+        </p:txBody>
+      </p:sp>
+      <p:pic>
+        <p:nvPicPr>
+          <p:cNvPr id="1026" name="Picture 2" descr="Explaining a Black-box Using Deep Variational Information Bottleneck  Approach – Machine Learning Blog | ML@CMU | Carnegie Mellon University">
+            <a:extLst>
+              <a:ext uri="{FF2B5EF4-FFF2-40B4-BE49-F238E27FC236}">
+                <a16:creationId xmlns:a16="http://schemas.microsoft.com/office/drawing/2014/main" id="{A74DEF8C-8CCC-A842-CB50-9315AA265681}"/>
+              </a:ext>
+            </a:extLst>
+          </p:cNvPr>
+          <p:cNvPicPr>
+            <a:picLocks noChangeAspect="1" noChangeArrowheads="1"/>
+          </p:cNvPicPr>
+          <p:nvPr/>
+        </p:nvPicPr>
+        <p:blipFill>
+          <a:blip r:embed="rId2">
+            <a:extLst>
+              <a:ext uri="{28A0092B-C50C-407E-A947-70E740481C1C}">
+                <a14:useLocalDpi xmlns:a14="http://schemas.microsoft.com/office/drawing/2010/main" val="0"/>
+              </a:ext>
+            </a:extLst>
+          </a:blip>
+          <a:srcRect/>
+          <a:stretch>
+            <a:fillRect/>
+          </a:stretch>
+        </p:blipFill>
+        <p:spPr bwMode="auto">
+          <a:xfrm>
+            <a:off x="7950200" y="2211603"/>
+            <a:ext cx="4241800" cy="1917700"/>
+          </a:xfrm>
+          <a:prstGeom prst="rect">
+            <a:avLst/>
+          </a:prstGeom>
+          <a:noFill/>
+          <a:extLst>
+            <a:ext uri="{909E8E84-426E-40DD-AFC4-6F175D3DCCD1}">
+              <a14:hiddenFill xmlns:a14="http://schemas.microsoft.com/office/drawing/2010/main">
+                <a:solidFill>
+                  <a:srgbClr val="FFFFFF"/>
+                </a:solidFill>
+              </a14:hiddenFill>
+            </a:ext>
+          </a:extLst>
+        </p:spPr>
+      </p:pic>
+    </p:spTree>
+    <p:extLst>
+      <p:ext uri="{BB962C8B-B14F-4D97-AF65-F5344CB8AC3E}">
+        <p14:creationId xmlns:p14="http://schemas.microsoft.com/office/powerpoint/2010/main" val="4004213042"/>
+      </p:ext>
+    </p:extLst>
+  </p:cSld>
+  <p:clrMapOvr>
+    <a:masterClrMapping/>
+  </p:clrMapOvr>
+</p:sld>
+</file>
+
+<file path=ppt/slides/slide5.xml><?xml version="1.0" encoding="utf-8"?>
+<p:sld xmlns:a="http://schemas.openxmlformats.org/drawingml/2006/main" xmlns:r="http://schemas.openxmlformats.org/officeDocument/2006/relationships" xmlns:p="http://schemas.openxmlformats.org/presentationml/2006/main">
+  <p:cSld>
+    <p:spTree>
+      <p:nvGrpSpPr>
         <p:cNvPr id="1" name="Shape 62"/>
         <p:cNvGrpSpPr/>
         <p:nvPr/>
@@ -6969,10 +8073,6 @@
           </p:nvPr>
         </p:nvSpPr>
         <p:spPr>
-          <a:xfrm>
-            <a:off x="1981200" y="-12"/>
-            <a:ext cx="8229600" cy="1143000"/>
-          </a:xfrm>
           <a:prstGeom prst="rect">
             <a:avLst/>
           </a:prstGeom>
@@ -7006,13 +8106,13 @@
             <a:spLocks noGrp="1"/>
           </p:cNvSpPr>
           <p:nvPr>
-            <p:ph type="body" idx="1"/>
-          </p:nvPr>
-        </p:nvSpPr>
-        <p:spPr>
-          <a:xfrm flipH="1">
-            <a:off x="1981075" y="1305775"/>
-            <a:ext cx="7822200" cy="1935600"/>
+            <p:ph idx="1"/>
+          </p:nvPr>
+        </p:nvSpPr>
+        <p:spPr>
+          <a:xfrm>
+            <a:off x="1451579" y="2015732"/>
+            <a:ext cx="5289859" cy="3450613"/>
           </a:xfrm>
           <a:prstGeom prst="rect">
             <a:avLst/>
@@ -7034,11 +8134,11 @@
               <a:buNone/>
             </a:pPr>
             <a:r>
-              <a:rPr lang="en" sz="2200"/>
+              <a:rPr lang="en" sz="2200" dirty="0"/>
               <a:t>The </a:t>
             </a:r>
             <a:r>
-              <a:rPr lang="en" sz="2200" i="1">
+              <a:rPr lang="en" sz="2200" i="1" dirty="0">
                 <a:solidFill>
                   <a:schemeClr val="accent1"/>
                 </a:solidFill>
@@ -7046,21 +8146,21 @@
               <a:t>scatterplot</a:t>
             </a:r>
             <a:r>
-              <a:rPr lang="en" sz="2200" i="1"/>
+              <a:rPr lang="en" sz="2200" i="1" dirty="0"/>
               <a:t> </a:t>
             </a:r>
             <a:r>
-              <a:rPr lang="en" sz="2200"/>
+              <a:rPr lang="en" sz="2200" dirty="0"/>
               <a:t>below shows the relationship between HS graduate rate in all 50 US states and DC and the percent of residents who live below the poverty line</a:t>
             </a:r>
             <a:br>
-              <a:rPr lang="en" sz="2200"/>
+              <a:rPr lang="en" sz="2200" dirty="0"/>
             </a:br>
             <a:r>
-              <a:rPr lang="en" sz="2200"/>
+              <a:rPr lang="en" sz="2200" dirty="0"/>
               <a:t>(income below $23,050 for a family of 4 in 2012).</a:t>
             </a:r>
-            <a:endParaRPr sz="2200"/>
+            <a:endParaRPr sz="2200" dirty="0"/>
           </a:p>
         </p:txBody>
       </p:sp>
@@ -7080,347 +8180,7 @@
         </p:blipFill>
         <p:spPr>
           <a:xfrm>
-            <a:off x="1917425" y="2992750"/>
-            <a:ext cx="4857750" cy="3714750"/>
-          </a:xfrm>
-          <a:prstGeom prst="rect">
-            <a:avLst/>
-          </a:prstGeom>
-          <a:noFill/>
-          <a:ln>
-            <a:noFill/>
-          </a:ln>
-        </p:spPr>
-      </p:pic>
-    </p:spTree>
-  </p:cSld>
-  <p:clrMapOvr>
-    <a:masterClrMapping/>
-  </p:clrMapOvr>
-</p:sld>
-</file>
-
-<file path=ppt/slides/slide5.xml><?xml version="1.0" encoding="utf-8"?>
-<p:sld xmlns:a="http://schemas.openxmlformats.org/drawingml/2006/main" xmlns:r="http://schemas.openxmlformats.org/officeDocument/2006/relationships" xmlns:p="http://schemas.openxmlformats.org/presentationml/2006/main">
-  <p:cSld>
-    <p:spTree>
-      <p:nvGrpSpPr>
-        <p:cNvPr id="1" name="Shape 102"/>
-        <p:cNvGrpSpPr/>
-        <p:nvPr/>
-      </p:nvGrpSpPr>
-      <p:grpSpPr>
-        <a:xfrm>
-          <a:off x="0" y="0"/>
-          <a:ext cx="0" cy="0"/>
-          <a:chOff x="0" y="0"/>
-          <a:chExt cx="0" cy="0"/>
-        </a:xfrm>
-      </p:grpSpPr>
-      <p:sp>
-        <p:nvSpPr>
-          <p:cNvPr id="103" name="Google Shape;103;p23"/>
-          <p:cNvSpPr txBox="1">
-            <a:spLocks noGrp="1"/>
-          </p:cNvSpPr>
-          <p:nvPr>
-            <p:ph type="body" idx="1"/>
-          </p:nvPr>
-        </p:nvSpPr>
-        <p:spPr>
-          <a:xfrm flipH="1">
-            <a:off x="6839000" y="2992825"/>
-            <a:ext cx="3321000" cy="3714600"/>
-          </a:xfrm>
-          <a:prstGeom prst="rect">
-            <a:avLst/>
-          </a:prstGeom>
-        </p:spPr>
-        <p:txBody>
-          <a:bodyPr spcFirstLastPara="1" vert="horz" wrap="square" lIns="91425" tIns="91425" rIns="91425" bIns="91425" rtlCol="0" anchor="t" anchorCtr="0">
-            <a:noAutofit/>
-          </a:bodyPr>
-          <a:lstStyle/>
-          <a:p>
-            <a:pPr marL="0" indent="0">
-              <a:lnSpc>
-                <a:spcPct val="115000"/>
-              </a:lnSpc>
-              <a:spcBef>
-                <a:spcPts val="0"/>
-              </a:spcBef>
-              <a:buClr>
-                <a:schemeClr val="dk1"/>
-              </a:buClr>
-              <a:buSzPts val="1100"/>
-              <a:buNone/>
-            </a:pPr>
-            <a:r>
-              <a:rPr lang="en" sz="2200">
-                <a:solidFill>
-                  <a:schemeClr val="accent1"/>
-                </a:solidFill>
-              </a:rPr>
-              <a:t>Response variable?</a:t>
-            </a:r>
-            <a:endParaRPr sz="2200">
-              <a:solidFill>
-                <a:schemeClr val="accent1"/>
-              </a:solidFill>
-            </a:endParaRPr>
-          </a:p>
-          <a:p>
-            <a:pPr marL="0" indent="0">
-              <a:lnSpc>
-                <a:spcPct val="115000"/>
-              </a:lnSpc>
-              <a:spcBef>
-                <a:spcPts val="0"/>
-              </a:spcBef>
-              <a:buClr>
-                <a:schemeClr val="dk1"/>
-              </a:buClr>
-              <a:buSzPts val="1100"/>
-              <a:buNone/>
-            </a:pPr>
-            <a:r>
-              <a:rPr lang="en" sz="2200"/>
-              <a:t> </a:t>
-            </a:r>
-            <a:r>
-              <a:rPr lang="en" sz="2200" i="1"/>
-              <a:t>% in poverty</a:t>
-            </a:r>
-            <a:endParaRPr sz="2200" i="1"/>
-          </a:p>
-          <a:p>
-            <a:pPr marL="0" indent="0">
-              <a:lnSpc>
-                <a:spcPct val="115000"/>
-              </a:lnSpc>
-              <a:spcBef>
-                <a:spcPts val="1000"/>
-              </a:spcBef>
-              <a:buClr>
-                <a:schemeClr val="dk1"/>
-              </a:buClr>
-              <a:buSzPts val="1100"/>
-              <a:buNone/>
-            </a:pPr>
-            <a:r>
-              <a:rPr lang="en" sz="2200">
-                <a:solidFill>
-                  <a:schemeClr val="accent1"/>
-                </a:solidFill>
-              </a:rPr>
-              <a:t>Explanatory variable?</a:t>
-            </a:r>
-            <a:endParaRPr sz="2200">
-              <a:solidFill>
-                <a:schemeClr val="accent1"/>
-              </a:solidFill>
-            </a:endParaRPr>
-          </a:p>
-          <a:p>
-            <a:pPr marL="0" indent="0">
-              <a:lnSpc>
-                <a:spcPct val="115000"/>
-              </a:lnSpc>
-              <a:spcBef>
-                <a:spcPts val="0"/>
-              </a:spcBef>
-              <a:buClr>
-                <a:schemeClr val="dk1"/>
-              </a:buClr>
-              <a:buSzPts val="1100"/>
-              <a:buNone/>
-            </a:pPr>
-            <a:r>
-              <a:rPr lang="en" sz="2200"/>
-              <a:t> </a:t>
-            </a:r>
-            <a:r>
-              <a:rPr lang="en" sz="2200" i="1"/>
-              <a:t>% HS grad</a:t>
-            </a:r>
-            <a:endParaRPr sz="2200" i="1"/>
-          </a:p>
-          <a:p>
-            <a:pPr marL="0" indent="0">
-              <a:lnSpc>
-                <a:spcPct val="115000"/>
-              </a:lnSpc>
-              <a:spcBef>
-                <a:spcPts val="1000"/>
-              </a:spcBef>
-              <a:buClr>
-                <a:schemeClr val="dk1"/>
-              </a:buClr>
-              <a:buSzPts val="1100"/>
-              <a:buNone/>
-            </a:pPr>
-            <a:r>
-              <a:rPr lang="en" sz="2200">
-                <a:solidFill>
-                  <a:schemeClr val="accent1"/>
-                </a:solidFill>
-              </a:rPr>
-              <a:t>Relationship?</a:t>
-            </a:r>
-            <a:endParaRPr sz="2200">
-              <a:solidFill>
-                <a:schemeClr val="accent1"/>
-              </a:solidFill>
-            </a:endParaRPr>
-          </a:p>
-          <a:p>
-            <a:pPr marL="0" indent="0">
-              <a:lnSpc>
-                <a:spcPct val="115000"/>
-              </a:lnSpc>
-              <a:spcBef>
-                <a:spcPts val="0"/>
-              </a:spcBef>
-              <a:buNone/>
-            </a:pPr>
-            <a:r>
-              <a:rPr lang="en" sz="2200" i="1"/>
-              <a:t> linear, negative,</a:t>
-            </a:r>
-            <a:br>
-              <a:rPr lang="en" sz="2200" i="1"/>
-            </a:br>
-            <a:r>
-              <a:rPr lang="en" sz="2200" i="1"/>
-              <a:t> moderately strong</a:t>
-            </a:r>
-            <a:endParaRPr sz="2200" i="1"/>
-          </a:p>
-        </p:txBody>
-      </p:sp>
-      <p:sp>
-        <p:nvSpPr>
-          <p:cNvPr id="104" name="Google Shape;104;p23"/>
-          <p:cNvSpPr txBox="1">
-            <a:spLocks noGrp="1"/>
-          </p:cNvSpPr>
-          <p:nvPr>
-            <p:ph type="title"/>
-          </p:nvPr>
-        </p:nvSpPr>
-        <p:spPr>
-          <a:xfrm>
-            <a:off x="1981200" y="-12"/>
-            <a:ext cx="8229600" cy="1143000"/>
-          </a:xfrm>
-          <a:prstGeom prst="rect">
-            <a:avLst/>
-          </a:prstGeom>
-        </p:spPr>
-        <p:txBody>
-          <a:bodyPr spcFirstLastPara="1" vert="horz" wrap="square" lIns="91425" tIns="91425" rIns="91425" bIns="91425" rtlCol="0" anchor="b" anchorCtr="0">
-            <a:noAutofit/>
-          </a:bodyPr>
-          <a:lstStyle/>
-          <a:p>
-            <a:r>
-              <a:rPr lang="en">
-                <a:solidFill>
-                  <a:schemeClr val="accent1"/>
-                </a:solidFill>
-              </a:rPr>
-              <a:t>Poverty vs. HS graduate rate</a:t>
-            </a:r>
-            <a:endParaRPr baseline="30000">
-              <a:solidFill>
-                <a:schemeClr val="accent1"/>
-              </a:solidFill>
-            </a:endParaRPr>
-          </a:p>
-        </p:txBody>
-      </p:sp>
-      <p:sp>
-        <p:nvSpPr>
-          <p:cNvPr id="105" name="Google Shape;105;p23"/>
-          <p:cNvSpPr txBox="1">
-            <a:spLocks noGrp="1"/>
-          </p:cNvSpPr>
-          <p:nvPr>
-            <p:ph type="body" idx="1"/>
-          </p:nvPr>
-        </p:nvSpPr>
-        <p:spPr>
-          <a:xfrm flipH="1">
-            <a:off x="1981075" y="1305775"/>
-            <a:ext cx="7822200" cy="1935600"/>
-          </a:xfrm>
-          <a:prstGeom prst="rect">
-            <a:avLst/>
-          </a:prstGeom>
-        </p:spPr>
-        <p:txBody>
-          <a:bodyPr spcFirstLastPara="1" vert="horz" wrap="square" lIns="91425" tIns="91425" rIns="91425" bIns="91425" rtlCol="0" anchor="t" anchorCtr="0">
-            <a:noAutofit/>
-          </a:bodyPr>
-          <a:lstStyle/>
-          <a:p>
-            <a:pPr marL="0" indent="0">
-              <a:lnSpc>
-                <a:spcPct val="115000"/>
-              </a:lnSpc>
-              <a:spcBef>
-                <a:spcPts val="0"/>
-              </a:spcBef>
-              <a:buNone/>
-            </a:pPr>
-            <a:r>
-              <a:rPr lang="en" sz="2200"/>
-              <a:t>The </a:t>
-            </a:r>
-            <a:r>
-              <a:rPr lang="en" sz="2200" i="1">
-                <a:solidFill>
-                  <a:schemeClr val="accent1"/>
-                </a:solidFill>
-              </a:rPr>
-              <a:t>scatterplot</a:t>
-            </a:r>
-            <a:r>
-              <a:rPr lang="en" sz="2200" i="1"/>
-              <a:t> </a:t>
-            </a:r>
-            <a:r>
-              <a:rPr lang="en" sz="2200"/>
-              <a:t>below shows the relationship between HS graduate rate in all 50 US states and DC and the percent of residents who live below the poverty line</a:t>
-            </a:r>
-            <a:br>
-              <a:rPr lang="en" sz="2200"/>
-            </a:br>
-            <a:r>
-              <a:rPr lang="en" sz="2200"/>
-              <a:t>(income below $23,050 for a family of 4 in 2012).</a:t>
-            </a:r>
-            <a:endParaRPr sz="2200"/>
-          </a:p>
-        </p:txBody>
-      </p:sp>
-      <p:pic>
-        <p:nvPicPr>
-          <p:cNvPr id="106" name="Google Shape;106;p23"/>
-          <p:cNvPicPr preferRelativeResize="0"/>
-          <p:nvPr/>
-        </p:nvPicPr>
-        <p:blipFill>
-          <a:blip r:embed="rId3">
-            <a:alphaModFix/>
-          </a:blip>
-          <a:stretch>
-            <a:fillRect/>
-          </a:stretch>
-        </p:blipFill>
-        <p:spPr>
-          <a:xfrm>
-            <a:off x="1917425" y="2992750"/>
+            <a:off x="6741438" y="1957820"/>
             <a:ext cx="4857750" cy="3714750"/>
           </a:xfrm>
           <a:prstGeom prst="rect">
@@ -7468,10 +8228,6 @@
           </p:nvPr>
         </p:nvSpPr>
         <p:spPr>
-          <a:xfrm>
-            <a:off x="1981200" y="-12"/>
-            <a:ext cx="8229600" cy="1143000"/>
-          </a:xfrm>
           <a:prstGeom prst="rect">
             <a:avLst/>
           </a:prstGeom>
@@ -7500,18 +8256,18 @@
       </p:sp>
       <p:sp>
         <p:nvSpPr>
-          <p:cNvPr id="105" name="Google Shape;105;p23"/>
+          <p:cNvPr id="103" name="Google Shape;103;p23"/>
           <p:cNvSpPr txBox="1">
             <a:spLocks noGrp="1"/>
           </p:cNvSpPr>
           <p:nvPr>
-            <p:ph type="body" idx="1"/>
-          </p:nvPr>
-        </p:nvSpPr>
-        <p:spPr>
-          <a:xfrm flipH="1">
-            <a:off x="1981075" y="1305775"/>
-            <a:ext cx="7822200" cy="1935600"/>
+            <p:ph idx="1"/>
+          </p:nvPr>
+        </p:nvSpPr>
+        <p:spPr>
+          <a:xfrm>
+            <a:off x="6528054" y="2015732"/>
+            <a:ext cx="4526800" cy="3450613"/>
           </a:xfrm>
           <a:prstGeom prst="rect">
             <a:avLst/>
@@ -7522,6 +8278,138 @@
             <a:noAutofit/>
           </a:bodyPr>
           <a:lstStyle/>
+          <a:p>
+            <a:pPr marL="0" indent="0">
+              <a:lnSpc>
+                <a:spcPct val="115000"/>
+              </a:lnSpc>
+              <a:spcBef>
+                <a:spcPts val="0"/>
+              </a:spcBef>
+              <a:buClr>
+                <a:schemeClr val="dk1"/>
+              </a:buClr>
+              <a:buSzPts val="1100"/>
+              <a:buNone/>
+            </a:pPr>
+            <a:r>
+              <a:rPr lang="en" sz="2200" dirty="0">
+                <a:solidFill>
+                  <a:schemeClr val="accent1"/>
+                </a:solidFill>
+              </a:rPr>
+              <a:t>Response variable? (Y, output)</a:t>
+            </a:r>
+            <a:endParaRPr sz="2200" dirty="0">
+              <a:solidFill>
+                <a:schemeClr val="accent1"/>
+              </a:solidFill>
+            </a:endParaRPr>
+          </a:p>
+          <a:p>
+            <a:pPr marL="0" indent="0">
+              <a:lnSpc>
+                <a:spcPct val="115000"/>
+              </a:lnSpc>
+              <a:spcBef>
+                <a:spcPts val="0"/>
+              </a:spcBef>
+              <a:buClr>
+                <a:schemeClr val="dk1"/>
+              </a:buClr>
+              <a:buSzPts val="1100"/>
+              <a:buNone/>
+            </a:pPr>
+            <a:r>
+              <a:rPr lang="en" sz="2200" dirty="0"/>
+              <a:t> </a:t>
+            </a:r>
+            <a:r>
+              <a:rPr lang="en" sz="2200" i="1" dirty="0"/>
+              <a:t>% in poverty</a:t>
+            </a:r>
+            <a:endParaRPr sz="2200" i="1" dirty="0"/>
+          </a:p>
+          <a:p>
+            <a:pPr marL="0" indent="0">
+              <a:lnSpc>
+                <a:spcPct val="115000"/>
+              </a:lnSpc>
+              <a:spcBef>
+                <a:spcPts val="1000"/>
+              </a:spcBef>
+              <a:buClr>
+                <a:schemeClr val="dk1"/>
+              </a:buClr>
+              <a:buSzPts val="1100"/>
+              <a:buNone/>
+            </a:pPr>
+            <a:r>
+              <a:rPr lang="en" sz="2200" dirty="0">
+                <a:solidFill>
+                  <a:schemeClr val="accent1"/>
+                </a:solidFill>
+              </a:rPr>
+              <a:t>Explanatory variable? (X, input)</a:t>
+            </a:r>
+            <a:endParaRPr sz="2200" dirty="0">
+              <a:solidFill>
+                <a:schemeClr val="accent1"/>
+              </a:solidFill>
+            </a:endParaRPr>
+          </a:p>
+          <a:p>
+            <a:pPr marL="0" indent="0">
+              <a:lnSpc>
+                <a:spcPct val="115000"/>
+              </a:lnSpc>
+              <a:spcBef>
+                <a:spcPts val="0"/>
+              </a:spcBef>
+              <a:buClr>
+                <a:schemeClr val="dk1"/>
+              </a:buClr>
+              <a:buSzPts val="1100"/>
+              <a:buNone/>
+            </a:pPr>
+            <a:r>
+              <a:rPr lang="en" sz="2200" dirty="0"/>
+              <a:t> </a:t>
+            </a:r>
+            <a:r>
+              <a:rPr lang="en" sz="2200" i="1" dirty="0"/>
+              <a:t>% HS grad</a:t>
+            </a:r>
+            <a:endParaRPr sz="2200" i="1" dirty="0"/>
+          </a:p>
+          <a:p>
+            <a:pPr marL="0" indent="0">
+              <a:lnSpc>
+                <a:spcPct val="115000"/>
+              </a:lnSpc>
+              <a:spcBef>
+                <a:spcPts val="1000"/>
+              </a:spcBef>
+              <a:buClr>
+                <a:schemeClr val="dk1"/>
+              </a:buClr>
+              <a:buSzPts val="1100"/>
+              <a:buNone/>
+            </a:pPr>
+            <a:r>
+              <a:rPr lang="en" sz="2200" dirty="0">
+                <a:solidFill>
+                  <a:schemeClr val="accent1"/>
+                </a:solidFill>
+              </a:rPr>
+              <a:t>Relationship?</a:t>
+            </a:r>
+            <a:endParaRPr sz="2200" dirty="0">
+              <a:solidFill>
+                <a:schemeClr val="accent1"/>
+              </a:solidFill>
+            </a:endParaRPr>
+          </a:p>
           <a:p>
             <a:pPr marL="0" indent="0">
               <a:lnSpc>
@@ -7533,10 +8421,231 @@
               <a:buNone/>
             </a:pPr>
             <a:r>
+              <a:rPr lang="en" sz="2200" i="1" dirty="0"/>
+              <a:t> linear, negative,</a:t>
+            </a:r>
+            <a:br>
+              <a:rPr lang="en" sz="2200" i="1" dirty="0"/>
+            </a:br>
+            <a:r>
+              <a:rPr lang="en" sz="2200" i="1" dirty="0"/>
+              <a:t> moderately strong</a:t>
+            </a:r>
+            <a:endParaRPr sz="2200" i="1" dirty="0"/>
+          </a:p>
+        </p:txBody>
+      </p:sp>
+      <p:pic>
+        <p:nvPicPr>
+          <p:cNvPr id="106" name="Google Shape;106;p23"/>
+          <p:cNvPicPr preferRelativeResize="0"/>
+          <p:nvPr/>
+        </p:nvPicPr>
+        <p:blipFill>
+          <a:blip r:embed="rId3">
+            <a:alphaModFix/>
+          </a:blip>
+          <a:stretch>
+            <a:fillRect/>
+          </a:stretch>
+        </p:blipFill>
+        <p:spPr>
+          <a:xfrm>
+            <a:off x="1670304" y="2015732"/>
+            <a:ext cx="4857750" cy="3714750"/>
+          </a:xfrm>
+          <a:prstGeom prst="rect">
+            <a:avLst/>
+          </a:prstGeom>
+          <a:noFill/>
+          <a:ln>
+            <a:noFill/>
+          </a:ln>
+        </p:spPr>
+      </p:pic>
+    </p:spTree>
+  </p:cSld>
+  <p:clrMapOvr>
+    <a:masterClrMapping/>
+  </p:clrMapOvr>
+</p:sld>
+</file>
+
+<file path=ppt/slides/slide7.xml><?xml version="1.0" encoding="utf-8"?>
+<p:sld xmlns:a="http://schemas.openxmlformats.org/drawingml/2006/main" xmlns:r="http://schemas.openxmlformats.org/officeDocument/2006/relationships" xmlns:p="http://schemas.openxmlformats.org/presentationml/2006/main">
+  <p:cSld>
+    <p:spTree>
+      <p:nvGrpSpPr>
+        <p:cNvPr id="1" name="Shape 102"/>
+        <p:cNvGrpSpPr/>
+        <p:nvPr/>
+      </p:nvGrpSpPr>
+      <p:grpSpPr>
+        <a:xfrm>
+          <a:off x="0" y="0"/>
+          <a:ext cx="0" cy="0"/>
+          <a:chOff x="0" y="0"/>
+          <a:chExt cx="0" cy="0"/>
+        </a:xfrm>
+      </p:grpSpPr>
+      <p:sp>
+        <p:nvSpPr>
+          <p:cNvPr id="104" name="Google Shape;104;p23"/>
+          <p:cNvSpPr txBox="1">
+            <a:spLocks noGrp="1"/>
+          </p:cNvSpPr>
+          <p:nvPr>
+            <p:ph type="title"/>
+          </p:nvPr>
+        </p:nvSpPr>
+        <p:spPr>
+          <a:prstGeom prst="rect">
+            <a:avLst/>
+          </a:prstGeom>
+        </p:spPr>
+        <p:txBody>
+          <a:bodyPr spcFirstLastPara="1" vert="horz" wrap="square" lIns="91425" tIns="91425" rIns="91425" bIns="91425" rtlCol="0" anchor="b" anchorCtr="0">
+            <a:noAutofit/>
+          </a:bodyPr>
+          <a:lstStyle/>
+          <a:p>
+            <a:r>
+              <a:rPr lang="en">
+                <a:solidFill>
+                  <a:schemeClr val="accent1"/>
+                </a:solidFill>
+              </a:rPr>
+              <a:t>Poverty vs. HS graduate rate</a:t>
+            </a:r>
+            <a:endParaRPr baseline="30000">
+              <a:solidFill>
+                <a:schemeClr val="accent1"/>
+              </a:solidFill>
+            </a:endParaRPr>
+          </a:p>
+        </p:txBody>
+      </p:sp>
+      <p:sp>
+        <p:nvSpPr>
+          <p:cNvPr id="105" name="Google Shape;105;p23"/>
+          <p:cNvSpPr txBox="1">
+            <a:spLocks noGrp="1"/>
+          </p:cNvSpPr>
+          <p:nvPr>
+            <p:ph idx="1"/>
+          </p:nvPr>
+        </p:nvSpPr>
+        <p:spPr>
+          <a:xfrm>
+            <a:off x="890017" y="1853754"/>
+            <a:ext cx="6022110" cy="4199727"/>
+          </a:xfrm>
+          <a:prstGeom prst="rect">
+            <a:avLst/>
+          </a:prstGeom>
+        </p:spPr>
+        <p:txBody>
+          <a:bodyPr spcFirstLastPara="1" vert="horz" wrap="square" lIns="91425" tIns="91425" rIns="91425" bIns="91425" rtlCol="0" anchor="t" anchorCtr="0">
+            <a:noAutofit/>
+          </a:bodyPr>
+          <a:lstStyle/>
+          <a:p>
+            <a:pPr marL="342900" indent="-342900">
+              <a:lnSpc>
+                <a:spcPct val="115000"/>
+              </a:lnSpc>
+              <a:spcBef>
+                <a:spcPts val="0"/>
+              </a:spcBef>
+            </a:pPr>
+            <a:r>
               <a:rPr lang="en" sz="2200" dirty="0"/>
               <a:t>We could draw a line of best fit… but how do we know exactly where it goes? </a:t>
             </a:r>
-            <a:endParaRPr sz="2200" dirty="0"/>
+          </a:p>
+          <a:p>
+            <a:pPr marL="342900" indent="-342900">
+              <a:lnSpc>
+                <a:spcPct val="115000"/>
+              </a:lnSpc>
+              <a:spcBef>
+                <a:spcPts val="0"/>
+              </a:spcBef>
+            </a:pPr>
+            <a:r>
+              <a:rPr lang="en-CA" sz="2200" dirty="0"/>
+              <a:t>Best fit line is a model of the relationship of HS graduation to poverty. </a:t>
+            </a:r>
+          </a:p>
+          <a:p>
+            <a:pPr marL="342900" indent="-342900">
+              <a:lnSpc>
+                <a:spcPct val="115000"/>
+              </a:lnSpc>
+              <a:spcBef>
+                <a:spcPts val="0"/>
+              </a:spcBef>
+            </a:pPr>
+            <a:r>
+              <a:rPr lang="en" sz="2200" dirty="0"/>
+              <a:t>The “more like” the data the model is, t</a:t>
+            </a:r>
+            <a:r>
+              <a:rPr lang="en-CA" sz="2200" dirty="0"/>
+              <a:t>he</a:t>
+            </a:r>
+            <a:r>
+              <a:rPr lang="en" sz="2200" dirty="0"/>
+              <a:t> better it will be. How do we judge ”more like”? </a:t>
+            </a:r>
+          </a:p>
+          <a:p>
+            <a:pPr marL="342900" indent="-342900">
+              <a:lnSpc>
+                <a:spcPct val="115000"/>
+              </a:lnSpc>
+              <a:spcBef>
+                <a:spcPts val="0"/>
+              </a:spcBef>
+            </a:pPr>
+            <a:r>
+              <a:rPr lang="en" sz="2200" dirty="0"/>
+              <a:t>We need a process to ‘learn’ slope and intercept (the two things that make the model). </a:t>
+            </a:r>
+          </a:p>
+          <a:p>
+            <a:pPr marL="800100" lvl="1" indent="-342900">
+              <a:lnSpc>
+                <a:spcPct val="115000"/>
+              </a:lnSpc>
+              <a:spcBef>
+                <a:spcPts val="0"/>
+              </a:spcBef>
+            </a:pPr>
+            <a:r>
+              <a:rPr lang="en" sz="2000" dirty="0"/>
+              <a:t>i.e. y=</a:t>
+            </a:r>
+            <a:r>
+              <a:rPr lang="en" sz="2000" dirty="0" err="1"/>
+              <a:t>mx+b</a:t>
+            </a:r>
+            <a:r>
+              <a:rPr lang="en" sz="2000" dirty="0"/>
+              <a:t> is a model, just need m and b. </a:t>
+            </a:r>
+          </a:p>
+          <a:p>
+            <a:pPr marL="0" indent="0">
+              <a:lnSpc>
+                <a:spcPct val="115000"/>
+              </a:lnSpc>
+              <a:spcBef>
+                <a:spcPts val="0"/>
+              </a:spcBef>
+              <a:buNone/>
+            </a:pPr>
+            <a:endParaRPr lang="en" sz="2200" dirty="0"/>
           </a:p>
         </p:txBody>
       </p:sp>
@@ -7554,7 +8663,7 @@
         </p:nvGrpSpPr>
         <p:grpSpPr>
           <a:xfrm>
-            <a:off x="1917425" y="2992750"/>
+            <a:off x="6912126" y="2015732"/>
             <a:ext cx="4857750" cy="3714750"/>
             <a:chOff x="1917425" y="2992750"/>
             <a:chExt cx="4857750" cy="3714750"/>
@@ -7639,7 +8748,7 @@
 </p:sld>
 </file>
 
-<file path=ppt/slides/slide7.xml><?xml version="1.0" encoding="utf-8"?>
+<file path=ppt/slides/slide8.xml><?xml version="1.0" encoding="utf-8"?>
 <p:sld xmlns:a="http://schemas.openxmlformats.org/drawingml/2006/main" xmlns:r="http://schemas.openxmlformats.org/officeDocument/2006/relationships" xmlns:p="http://schemas.openxmlformats.org/presentationml/2006/main">
   <p:cSld>
     <p:spTree>
@@ -7667,10 +8776,6 @@
           </p:nvPr>
         </p:nvSpPr>
         <p:spPr>
-          <a:xfrm>
-            <a:off x="1981200" y="-12"/>
-            <a:ext cx="8229600" cy="1143000"/>
-          </a:xfrm>
           <a:prstGeom prst="rect">
             <a:avLst/>
           </a:prstGeom>
@@ -7704,13 +8809,13 @@
             <a:spLocks noGrp="1"/>
           </p:cNvSpPr>
           <p:nvPr>
-            <p:ph type="body" idx="1"/>
-          </p:nvPr>
-        </p:nvSpPr>
-        <p:spPr>
-          <a:xfrm flipH="1">
-            <a:off x="1981075" y="1305775"/>
-            <a:ext cx="7822200" cy="1505400"/>
+            <p:ph idx="1"/>
+          </p:nvPr>
+        </p:nvSpPr>
+        <p:spPr>
+          <a:xfrm>
+            <a:off x="0" y="2015732"/>
+            <a:ext cx="7644383" cy="4153420"/>
           </a:xfrm>
           <a:prstGeom prst="rect">
             <a:avLst/>
@@ -7722,40 +8827,104 @@
           </a:bodyPr>
           <a:lstStyle/>
           <a:p>
-            <a:pPr marL="0" indent="0">
+            <a:pPr marL="342900" indent="-342900">
               <a:lnSpc>
                 <a:spcPct val="115000"/>
               </a:lnSpc>
               <a:spcBef>
                 <a:spcPts val="0"/>
               </a:spcBef>
-              <a:buNone/>
             </a:pPr>
             <a:r>
-              <a:rPr lang="en" sz="2200" b="1"/>
+              <a:rPr lang="en" sz="2200" b="1" dirty="0"/>
               <a:t>Residuals</a:t>
             </a:r>
             <a:r>
-              <a:rPr lang="en" sz="2200"/>
-              <a:t> are the leftovers from the model fit:</a:t>
-            </a:r>
-            <a:endParaRPr sz="2200"/>
-          </a:p>
-          <a:p>
-            <a:pPr marL="1371600" indent="457200">
+              <a:rPr lang="en" sz="2200" dirty="0"/>
+              <a:t> are the leftovers from the model fit.</a:t>
+            </a:r>
+          </a:p>
+          <a:p>
+            <a:pPr marL="800100" lvl="1" indent="-342900">
               <a:lnSpc>
                 <a:spcPct val="115000"/>
               </a:lnSpc>
-              <a:spcBef>
-                <a:spcPts val="0"/>
-              </a:spcBef>
-              <a:buNone/>
             </a:pPr>
             <a:r>
-              <a:rPr lang="en" sz="2200"/>
+              <a:rPr lang="en" sz="2000" dirty="0"/>
               <a:t>Data = Fit + Residual</a:t>
             </a:r>
-            <a:endParaRPr sz="2200"/>
+          </a:p>
+          <a:p>
+            <a:pPr marL="342900" indent="-342900">
+              <a:lnSpc>
+                <a:spcPct val="115000"/>
+              </a:lnSpc>
+            </a:pPr>
+            <a:r>
+              <a:rPr lang="en" sz="2200" dirty="0"/>
+              <a:t>Larger residuals means the model differs from the data. </a:t>
+            </a:r>
+          </a:p>
+          <a:p>
+            <a:pPr marL="342900" indent="-342900">
+              <a:lnSpc>
+                <a:spcPct val="115000"/>
+              </a:lnSpc>
+            </a:pPr>
+            <a:r>
+              <a:rPr lang="en" sz="2200" dirty="0"/>
+              <a:t>Residuals can be totaled then compared. </a:t>
+            </a:r>
+          </a:p>
+          <a:p>
+            <a:pPr marL="342900" indent="-342900">
+              <a:lnSpc>
+                <a:spcPct val="115000"/>
+              </a:lnSpc>
+            </a:pPr>
+            <a:r>
+              <a:rPr lang="en" sz="2200" dirty="0"/>
+              <a:t>We can also phrase it as t</a:t>
+            </a:r>
+            <a:r>
+              <a:rPr lang="en-CA" sz="2200" dirty="0"/>
+              <a:t>he</a:t>
+            </a:r>
+            <a:r>
+              <a:rPr lang="en" sz="2200" dirty="0"/>
+              <a:t> variance in y that isn’t explained by the model. </a:t>
+            </a:r>
+          </a:p>
+          <a:p>
+            <a:pPr marL="800100" lvl="1" indent="-342900">
+              <a:lnSpc>
+                <a:spcPct val="115000"/>
+              </a:lnSpc>
+            </a:pPr>
+            <a:r>
+              <a:rPr lang="en" sz="2000" dirty="0"/>
+              <a:t>Model explains part of why Y values are what they are. </a:t>
+            </a:r>
+          </a:p>
+          <a:p>
+            <a:pPr marL="800100" lvl="1" indent="-342900">
+              <a:lnSpc>
+                <a:spcPct val="115000"/>
+              </a:lnSpc>
+            </a:pPr>
+            <a:r>
+              <a:rPr lang="en" sz="2000" dirty="0"/>
+              <a:t>Residuals is the amount of why that the model doesn’t capture. </a:t>
+            </a:r>
+          </a:p>
+          <a:p>
+            <a:pPr marL="342900" indent="-342900">
+              <a:lnSpc>
+                <a:spcPct val="115000"/>
+              </a:lnSpc>
+            </a:pPr>
+            <a:endParaRPr sz="2200" dirty="0"/>
           </a:p>
           <a:p>
             <a:pPr marL="0" indent="0">
@@ -7771,7 +8940,7 @@
               <a:buSzPts val="1100"/>
               <a:buNone/>
             </a:pPr>
-            <a:endParaRPr sz="2200"/>
+            <a:endParaRPr sz="2200" dirty="0"/>
           </a:p>
           <a:p>
             <a:pPr marL="0" indent="0">
@@ -7783,7 +8952,7 @@
               </a:spcBef>
               <a:buNone/>
             </a:pPr>
-            <a:endParaRPr sz="2200"/>
+            <a:endParaRPr sz="2200" dirty="0"/>
           </a:p>
           <a:p>
             <a:pPr marL="0" indent="0">
@@ -7795,7 +8964,7 @@
               </a:spcBef>
               <a:buNone/>
             </a:pPr>
-            <a:endParaRPr sz="2200"/>
+            <a:endParaRPr sz="2200" dirty="0"/>
           </a:p>
         </p:txBody>
       </p:sp>
@@ -7815,8 +8984,8 @@
         </p:blipFill>
         <p:spPr>
           <a:xfrm>
-            <a:off x="2433175" y="2210276"/>
-            <a:ext cx="5650402" cy="4355523"/>
+            <a:off x="7644384" y="1853755"/>
+            <a:ext cx="4547616" cy="3864294"/>
           </a:xfrm>
           <a:prstGeom prst="rect">
             <a:avLst/>
@@ -7835,7 +9004,7 @@
 </p:sld>
 </file>
 
-<file path=ppt/slides/slide8.xml><?xml version="1.0" encoding="utf-8"?>
+<file path=ppt/slides/slide9.xml><?xml version="1.0" encoding="utf-8"?>
 <p:sld xmlns:a="http://schemas.openxmlformats.org/drawingml/2006/main" xmlns:r="http://schemas.openxmlformats.org/officeDocument/2006/relationships" xmlns:p="http://schemas.openxmlformats.org/presentationml/2006/main">
   <p:cSld>
     <p:spTree>
@@ -8090,133 +9259,6 @@
         </p:txBody>
       </p:sp>
     </p:spTree>
-  </p:cSld>
-  <p:clrMapOvr>
-    <a:masterClrMapping/>
-  </p:clrMapOvr>
-</p:sld>
-</file>
-
-<file path=ppt/slides/slide9.xml><?xml version="1.0" encoding="utf-8"?>
-<p:sld xmlns:a="http://schemas.openxmlformats.org/drawingml/2006/main" xmlns:r="http://schemas.openxmlformats.org/officeDocument/2006/relationships" xmlns:p="http://schemas.openxmlformats.org/presentationml/2006/main">
-  <p:cSld>
-    <p:spTree>
-      <p:nvGrpSpPr>
-        <p:cNvPr id="1" name=""/>
-        <p:cNvGrpSpPr/>
-        <p:nvPr/>
-      </p:nvGrpSpPr>
-      <p:grpSpPr>
-        <a:xfrm>
-          <a:off x="0" y="0"/>
-          <a:ext cx="0" cy="0"/>
-          <a:chOff x="0" y="0"/>
-          <a:chExt cx="0" cy="0"/>
-        </a:xfrm>
-      </p:grpSpPr>
-      <p:sp>
-        <p:nvSpPr>
-          <p:cNvPr id="2" name="Title 1">
-            <a:extLst>
-              <a:ext uri="{FF2B5EF4-FFF2-40B4-BE49-F238E27FC236}">
-                <a16:creationId xmlns:a16="http://schemas.microsoft.com/office/drawing/2014/main" id="{6D2ECC1A-373D-584A-BF07-0B34FFF3C888}"/>
-              </a:ext>
-            </a:extLst>
-          </p:cNvPr>
-          <p:cNvSpPr>
-            <a:spLocks noGrp="1"/>
-          </p:cNvSpPr>
-          <p:nvPr>
-            <p:ph type="title"/>
-          </p:nvPr>
-        </p:nvSpPr>
-        <p:spPr/>
-        <p:txBody>
-          <a:bodyPr/>
-          <a:lstStyle/>
-          <a:p>
-            <a:endParaRPr lang="en-US"/>
-          </a:p>
-        </p:txBody>
-      </p:sp>
-      <p:sp>
-        <p:nvSpPr>
-          <p:cNvPr id="3" name="Content Placeholder 2">
-            <a:extLst>
-              <a:ext uri="{FF2B5EF4-FFF2-40B4-BE49-F238E27FC236}">
-                <a16:creationId xmlns:a16="http://schemas.microsoft.com/office/drawing/2014/main" id="{6D1C867F-F364-0A4C-A103-DE689EC6D928}"/>
-              </a:ext>
-            </a:extLst>
-          </p:cNvPr>
-          <p:cNvSpPr>
-            <a:spLocks noGrp="1"/>
-          </p:cNvSpPr>
-          <p:nvPr>
-            <p:ph idx="1"/>
-          </p:nvPr>
-        </p:nvSpPr>
-        <p:spPr/>
-        <p:txBody>
-          <a:bodyPr/>
-          <a:lstStyle/>
-          <a:p>
-            <a:endParaRPr lang="en-US"/>
-          </a:p>
-        </p:txBody>
-      </p:sp>
-      <p:pic>
-        <p:nvPicPr>
-          <p:cNvPr id="1026" name="Picture 2">
-            <a:extLst>
-              <a:ext uri="{FF2B5EF4-FFF2-40B4-BE49-F238E27FC236}">
-                <a16:creationId xmlns:a16="http://schemas.microsoft.com/office/drawing/2014/main" id="{C8AF8CFA-21D4-284B-A979-6B9D9CA1F1FC}"/>
-              </a:ext>
-            </a:extLst>
-          </p:cNvPr>
-          <p:cNvPicPr>
-            <a:picLocks noChangeAspect="1" noChangeArrowheads="1"/>
-          </p:cNvPicPr>
-          <p:nvPr/>
-        </p:nvPicPr>
-        <p:blipFill>
-          <a:blip r:embed="rId2">
-            <a:extLst>
-              <a:ext uri="{28A0092B-C50C-407E-A947-70E740481C1C}">
-                <a14:useLocalDpi xmlns:a14="http://schemas.microsoft.com/office/drawing/2010/main" val="0"/>
-              </a:ext>
-            </a:extLst>
-          </a:blip>
-          <a:srcRect/>
-          <a:stretch>
-            <a:fillRect/>
-          </a:stretch>
-        </p:blipFill>
-        <p:spPr bwMode="auto">
-          <a:xfrm>
-            <a:off x="63500" y="374650"/>
-            <a:ext cx="12065000" cy="6108700"/>
-          </a:xfrm>
-          <a:prstGeom prst="rect">
-            <a:avLst/>
-          </a:prstGeom>
-          <a:noFill/>
-          <a:extLst>
-            <a:ext uri="{909E8E84-426E-40DD-AFC4-6F175D3DCCD1}">
-              <a14:hiddenFill xmlns:a14="http://schemas.microsoft.com/office/drawing/2010/main">
-                <a:solidFill>
-                  <a:srgbClr val="FFFFFF"/>
-                </a:solidFill>
-              </a14:hiddenFill>
-            </a:ext>
-          </a:extLst>
-        </p:spPr>
-      </p:pic>
-    </p:spTree>
-    <p:extLst>
-      <p:ext uri="{BB962C8B-B14F-4D97-AF65-F5344CB8AC3E}">
-        <p14:creationId xmlns:p14="http://schemas.microsoft.com/office/powerpoint/2010/main" val="372303413"/>
-      </p:ext>
-    </p:extLst>
   </p:cSld>
   <p:clrMapOvr>
     <a:masterClrMapping/>

--- a/reference_material/slides/020_Linear_Least_Squares.pptx
+++ b/reference_material/slides/020_Linear_Least_Squares.pptx
@@ -5,30 +5,32 @@
     <p:sldMasterId id="2147483660" r:id="rId1"/>
   </p:sldMasterIdLst>
   <p:notesMasterIdLst>
-    <p:notesMasterId r:id="rId23"/>
+    <p:notesMasterId r:id="rId25"/>
   </p:notesMasterIdLst>
   <p:sldIdLst>
     <p:sldId id="282" r:id="rId2"/>
-    <p:sldId id="256" r:id="rId3"/>
-    <p:sldId id="257" r:id="rId4"/>
-    <p:sldId id="283" r:id="rId5"/>
-    <p:sldId id="259" r:id="rId6"/>
-    <p:sldId id="264" r:id="rId7"/>
-    <p:sldId id="273" r:id="rId8"/>
-    <p:sldId id="269" r:id="rId9"/>
-    <p:sldId id="272" r:id="rId10"/>
-    <p:sldId id="276" r:id="rId11"/>
-    <p:sldId id="274" r:id="rId12"/>
-    <p:sldId id="277" r:id="rId13"/>
-    <p:sldId id="284" r:id="rId14"/>
-    <p:sldId id="265" r:id="rId15"/>
-    <p:sldId id="286" r:id="rId16"/>
-    <p:sldId id="275" r:id="rId17"/>
-    <p:sldId id="278" r:id="rId18"/>
-    <p:sldId id="279" r:id="rId19"/>
-    <p:sldId id="280" r:id="rId20"/>
-    <p:sldId id="285" r:id="rId21"/>
-    <p:sldId id="281" r:id="rId22"/>
+    <p:sldId id="287" r:id="rId3"/>
+    <p:sldId id="256" r:id="rId4"/>
+    <p:sldId id="257" r:id="rId5"/>
+    <p:sldId id="283" r:id="rId6"/>
+    <p:sldId id="259" r:id="rId7"/>
+    <p:sldId id="264" r:id="rId8"/>
+    <p:sldId id="273" r:id="rId9"/>
+    <p:sldId id="269" r:id="rId10"/>
+    <p:sldId id="272" r:id="rId11"/>
+    <p:sldId id="276" r:id="rId12"/>
+    <p:sldId id="274" r:id="rId13"/>
+    <p:sldId id="277" r:id="rId14"/>
+    <p:sldId id="284" r:id="rId15"/>
+    <p:sldId id="265" r:id="rId16"/>
+    <p:sldId id="286" r:id="rId17"/>
+    <p:sldId id="288" r:id="rId18"/>
+    <p:sldId id="275" r:id="rId19"/>
+    <p:sldId id="278" r:id="rId20"/>
+    <p:sldId id="279" r:id="rId21"/>
+    <p:sldId id="280" r:id="rId22"/>
+    <p:sldId id="285" r:id="rId23"/>
+    <p:sldId id="281" r:id="rId24"/>
   </p:sldIdLst>
   <p:sldSz cx="12192000" cy="6858000"/>
   <p:notesSz cx="6858000" cy="9144000"/>
@@ -5229,6 +5231,268 @@
   <p:cSld>
     <p:spTree>
       <p:nvGrpSpPr>
+        <p:cNvPr id="1" name="Shape 162"/>
+        <p:cNvGrpSpPr/>
+        <p:nvPr/>
+      </p:nvGrpSpPr>
+      <p:grpSpPr>
+        <a:xfrm>
+          <a:off x="0" y="0"/>
+          <a:ext cx="0" cy="0"/>
+          <a:chOff x="0" y="0"/>
+          <a:chExt cx="0" cy="0"/>
+        </a:xfrm>
+      </p:grpSpPr>
+      <p:sp>
+        <p:nvSpPr>
+          <p:cNvPr id="163" name="Google Shape;163;p31"/>
+          <p:cNvSpPr txBox="1">
+            <a:spLocks noGrp="1"/>
+          </p:cNvSpPr>
+          <p:nvPr>
+            <p:ph type="title"/>
+          </p:nvPr>
+        </p:nvSpPr>
+        <p:spPr>
+          <a:xfrm>
+            <a:off x="1981200" y="-12"/>
+            <a:ext cx="8229600" cy="1143000"/>
+          </a:xfrm>
+          <a:prstGeom prst="rect">
+            <a:avLst/>
+          </a:prstGeom>
+        </p:spPr>
+        <p:txBody>
+          <a:bodyPr spcFirstLastPara="1" vert="horz" wrap="square" lIns="91425" tIns="91425" rIns="91425" bIns="91425" rtlCol="0" anchor="b" anchorCtr="0">
+            <a:noAutofit/>
+          </a:bodyPr>
+          <a:lstStyle/>
+          <a:p>
+            <a:r>
+              <a:rPr lang="en">
+                <a:solidFill>
+                  <a:schemeClr val="accent1"/>
+                </a:solidFill>
+              </a:rPr>
+              <a:t>Residuals (cont.)</a:t>
+            </a:r>
+            <a:endParaRPr baseline="30000">
+              <a:solidFill>
+                <a:schemeClr val="accent1"/>
+              </a:solidFill>
+            </a:endParaRPr>
+          </a:p>
+        </p:txBody>
+      </p:sp>
+      <p:sp>
+        <p:nvSpPr>
+          <p:cNvPr id="164" name="Google Shape;164;p31"/>
+          <p:cNvSpPr txBox="1">
+            <a:spLocks noGrp="1"/>
+          </p:cNvSpPr>
+          <p:nvPr>
+            <p:ph type="body" idx="1"/>
+          </p:nvPr>
+        </p:nvSpPr>
+        <p:spPr>
+          <a:xfrm flipH="1">
+            <a:off x="1981075" y="1305775"/>
+            <a:ext cx="7822200" cy="1058400"/>
+          </a:xfrm>
+          <a:prstGeom prst="rect">
+            <a:avLst/>
+          </a:prstGeom>
+        </p:spPr>
+        <p:txBody>
+          <a:bodyPr spcFirstLastPara="1" vert="horz" wrap="square" lIns="91425" tIns="91425" rIns="91425" bIns="91425" rtlCol="0" anchor="t" anchorCtr="0">
+            <a:noAutofit/>
+          </a:bodyPr>
+          <a:lstStyle/>
+          <a:p>
+            <a:pPr marL="0" indent="0">
+              <a:lnSpc>
+                <a:spcPct val="115000"/>
+              </a:lnSpc>
+              <a:spcBef>
+                <a:spcPts val="0"/>
+              </a:spcBef>
+              <a:buNone/>
+            </a:pPr>
+            <a:r>
+              <a:rPr lang="en" sz="2200"/>
+              <a:t>Residual is the difference between the observed (y</a:t>
+            </a:r>
+            <a:r>
+              <a:rPr lang="en" sz="2200" baseline="-25000"/>
+              <a:t>i</a:t>
+            </a:r>
+            <a:r>
+              <a:rPr lang="en" sz="2200"/>
+              <a:t>) and predicted ŷ</a:t>
+            </a:r>
+            <a:r>
+              <a:rPr lang="en" sz="2200" baseline="-25000"/>
+              <a:t>i</a:t>
+            </a:r>
+            <a:r>
+              <a:rPr lang="en" sz="2200"/>
+              <a:t>.</a:t>
+            </a:r>
+            <a:endParaRPr sz="2200"/>
+          </a:p>
+        </p:txBody>
+      </p:sp>
+      <p:pic>
+        <p:nvPicPr>
+          <p:cNvPr id="165" name="Google Shape;165;p31"/>
+          <p:cNvPicPr preferRelativeResize="0"/>
+          <p:nvPr/>
+        </p:nvPicPr>
+        <p:blipFill>
+          <a:blip r:embed="rId3">
+            <a:alphaModFix/>
+          </a:blip>
+          <a:stretch>
+            <a:fillRect/>
+          </a:stretch>
+        </p:blipFill>
+        <p:spPr>
+          <a:xfrm>
+            <a:off x="4249226" y="2081475"/>
+            <a:ext cx="1806199" cy="598500"/>
+          </a:xfrm>
+          <a:prstGeom prst="rect">
+            <a:avLst/>
+          </a:prstGeom>
+          <a:noFill/>
+          <a:ln>
+            <a:noFill/>
+          </a:ln>
+        </p:spPr>
+      </p:pic>
+      <p:pic>
+        <p:nvPicPr>
+          <p:cNvPr id="166" name="Google Shape;166;p31"/>
+          <p:cNvPicPr preferRelativeResize="0"/>
+          <p:nvPr/>
+        </p:nvPicPr>
+        <p:blipFill>
+          <a:blip r:embed="rId4">
+            <a:alphaModFix/>
+          </a:blip>
+          <a:stretch>
+            <a:fillRect/>
+          </a:stretch>
+        </p:blipFill>
+        <p:spPr>
+          <a:xfrm>
+            <a:off x="1981200" y="2624715"/>
+            <a:ext cx="4560998" cy="3549325"/>
+          </a:xfrm>
+          <a:prstGeom prst="rect">
+            <a:avLst/>
+          </a:prstGeom>
+          <a:noFill/>
+          <a:ln>
+            <a:noFill/>
+          </a:ln>
+        </p:spPr>
+      </p:pic>
+      <p:sp>
+        <p:nvSpPr>
+          <p:cNvPr id="167" name="Google Shape;167;p31"/>
+          <p:cNvSpPr txBox="1">
+            <a:spLocks noGrp="1"/>
+          </p:cNvSpPr>
+          <p:nvPr>
+            <p:ph type="body" idx="1"/>
+          </p:nvPr>
+        </p:nvSpPr>
+        <p:spPr>
+          <a:xfrm flipH="1">
+            <a:off x="7082050" y="2793025"/>
+            <a:ext cx="2774700" cy="3140700"/>
+          </a:xfrm>
+          <a:prstGeom prst="rect">
+            <a:avLst/>
+          </a:prstGeom>
+        </p:spPr>
+        <p:txBody>
+          <a:bodyPr spcFirstLastPara="1" vert="horz" wrap="square" lIns="91425" tIns="91425" rIns="91425" bIns="91425" rtlCol="0" anchor="t" anchorCtr="0">
+            <a:noAutofit/>
+          </a:bodyPr>
+          <a:lstStyle/>
+          <a:p>
+            <a:pPr marL="0" indent="0">
+              <a:lnSpc>
+                <a:spcPct val="115000"/>
+              </a:lnSpc>
+              <a:spcBef>
+                <a:spcPts val="0"/>
+              </a:spcBef>
+              <a:buNone/>
+            </a:pPr>
+            <a:r>
+              <a:rPr lang="en" sz="2200"/>
+              <a:t>% living in poverty in DC is 5.44% more than predicted.</a:t>
+            </a:r>
+            <a:endParaRPr sz="2200"/>
+          </a:p>
+          <a:p>
+            <a:pPr marL="0" indent="0">
+              <a:lnSpc>
+                <a:spcPct val="115000"/>
+              </a:lnSpc>
+              <a:spcBef>
+                <a:spcPts val="0"/>
+              </a:spcBef>
+              <a:buNone/>
+            </a:pPr>
+            <a:endParaRPr sz="2200"/>
+          </a:p>
+          <a:p>
+            <a:pPr marL="0" indent="0">
+              <a:lnSpc>
+                <a:spcPct val="115000"/>
+              </a:lnSpc>
+              <a:spcBef>
+                <a:spcPts val="0"/>
+              </a:spcBef>
+              <a:buNone/>
+            </a:pPr>
+            <a:r>
+              <a:rPr lang="en" sz="2200"/>
+              <a:t>% living in poverty in RI is 4.16% less than predicted.</a:t>
+            </a:r>
+            <a:endParaRPr sz="2200"/>
+          </a:p>
+          <a:p>
+            <a:pPr marL="0" indent="0">
+              <a:lnSpc>
+                <a:spcPct val="115000"/>
+              </a:lnSpc>
+              <a:spcBef>
+                <a:spcPts val="0"/>
+              </a:spcBef>
+              <a:buNone/>
+            </a:pPr>
+            <a:endParaRPr sz="2200"/>
+          </a:p>
+        </p:txBody>
+      </p:sp>
+    </p:spTree>
+  </p:cSld>
+  <p:clrMapOvr>
+    <a:masterClrMapping/>
+  </p:clrMapOvr>
+</p:sld>
+</file>
+
+<file path=ppt/slides/slide11.xml><?xml version="1.0" encoding="utf-8"?>
+<p:sld xmlns:a="http://schemas.openxmlformats.org/drawingml/2006/main" xmlns:r="http://schemas.openxmlformats.org/officeDocument/2006/relationships" xmlns:p="http://schemas.openxmlformats.org/presentationml/2006/main">
+  <p:cSld>
+    <p:spTree>
+      <p:nvGrpSpPr>
         <p:cNvPr id="1" name=""/>
         <p:cNvGrpSpPr/>
         <p:nvPr/>
@@ -5351,7 +5615,7 @@
 </p:sld>
 </file>
 
-<file path=ppt/slides/slide11.xml><?xml version="1.0" encoding="utf-8"?>
+<file path=ppt/slides/slide12.xml><?xml version="1.0" encoding="utf-8"?>
 <p:sld xmlns:a="http://schemas.openxmlformats.org/drawingml/2006/main" xmlns:r="http://schemas.openxmlformats.org/officeDocument/2006/relationships" xmlns:p="http://schemas.openxmlformats.org/presentationml/2006/main">
   <p:cSld>
     <p:spTree>
@@ -5477,7 +5741,7 @@
 </p:sld>
 </file>
 
-<file path=ppt/slides/slide12.xml><?xml version="1.0" encoding="utf-8"?>
+<file path=ppt/slides/slide13.xml><?xml version="1.0" encoding="utf-8"?>
 <p:sld xmlns:a="http://schemas.openxmlformats.org/drawingml/2006/main" xmlns:r="http://schemas.openxmlformats.org/officeDocument/2006/relationships" xmlns:p="http://schemas.openxmlformats.org/presentationml/2006/main">
   <p:cSld>
     <p:bg>
@@ -5603,6 +5867,17 @@
             </a:r>
           </a:p>
           <a:p>
+            <a:pPr lvl="1">
+              <a:lnSpc>
+                <a:spcPct val="110000"/>
+              </a:lnSpc>
+            </a:pPr>
+            <a:r>
+              <a:rPr lang="en-US" sz="1400" dirty="0"/>
+              <a:t>Any process that gets m and b will work!</a:t>
+            </a:r>
+          </a:p>
+          <a:p>
             <a:pPr>
               <a:lnSpc>
                 <a:spcPct val="110000"/>
@@ -5685,7 +5960,7 @@
             </a:pPr>
             <a:r>
               <a:rPr lang="en-US" sz="1800" dirty="0"/>
-              <a:t>The model (best fit line) is defined by the slope and intercept. </a:t>
+              <a:t>Model (best fit line) is defined by the slope and intercept. </a:t>
             </a:r>
           </a:p>
           <a:p>
@@ -5755,7 +6030,7 @@
 </p:sld>
 </file>
 
-<file path=ppt/slides/slide13.xml><?xml version="1.0" encoding="utf-8"?>
+<file path=ppt/slides/slide14.xml><?xml version="1.0" encoding="utf-8"?>
 <p:sld xmlns:a="http://schemas.openxmlformats.org/drawingml/2006/main" xmlns:r="http://schemas.openxmlformats.org/officeDocument/2006/relationships" xmlns:p="http://schemas.openxmlformats.org/presentationml/2006/main">
   <p:cSld>
     <p:spTree>
@@ -5788,7 +6063,12 @@
             <p:ph type="title"/>
           </p:nvPr>
         </p:nvSpPr>
-        <p:spPr/>
+        <p:spPr>
+          <a:xfrm>
+            <a:off x="411983" y="804889"/>
+            <a:ext cx="4431322" cy="1059305"/>
+          </a:xfrm>
+        </p:spPr>
         <p:txBody>
           <a:bodyPr/>
           <a:lstStyle/>
@@ -5813,18 +6093,18 @@
             <a:spLocks noGrp="1"/>
           </p:cNvSpPr>
           <p:nvPr>
-            <p:ph idx="1"/>
-          </p:nvPr>
-        </p:nvSpPr>
-        <p:spPr>
-          <a:xfrm>
-            <a:off x="1451579" y="1853754"/>
-            <a:ext cx="9603275" cy="4199727"/>
+            <p:ph sz="half" idx="1"/>
+          </p:nvPr>
+        </p:nvSpPr>
+        <p:spPr>
+          <a:xfrm>
+            <a:off x="0" y="1891963"/>
+            <a:ext cx="4645152" cy="4161148"/>
           </a:xfrm>
         </p:spPr>
         <p:txBody>
           <a:bodyPr>
-            <a:normAutofit lnSpcReduction="10000"/>
+            <a:normAutofit fontScale="92500" lnSpcReduction="20000"/>
           </a:bodyPr>
           <a:lstStyle/>
           <a:p>
@@ -5842,6 +6122,83 @@
           <a:p>
             <a:r>
               <a:rPr lang="en-US" dirty="0"/>
+              <a:t>Linear regression is the only model* we see where we can calculate an answer. </a:t>
+            </a:r>
+          </a:p>
+          <a:p>
+            <a:pPr lvl="1"/>
+            <a:r>
+              <a:rPr lang="en-US" dirty="0"/>
+              <a:t>All others we need to estimate the best answer, and that takes time. </a:t>
+            </a:r>
+          </a:p>
+          <a:p>
+            <a:r>
+              <a:rPr lang="en-US" dirty="0"/>
+              <a:t>KEY – the m and b ‘are’ the parameters. </a:t>
+            </a:r>
+          </a:p>
+          <a:p>
+            <a:pPr lvl="1"/>
+            <a:r>
+              <a:rPr lang="en-US" dirty="0"/>
+              <a:t>Model produces y from x(s). </a:t>
+            </a:r>
+          </a:p>
+          <a:p>
+            <a:pPr lvl="1"/>
+            <a:r>
+              <a:rPr lang="en-US" dirty="0"/>
+              <a:t>Y=</a:t>
+            </a:r>
+            <a:r>
+              <a:rPr lang="en-US" dirty="0" err="1"/>
+              <a:t>mx+b</a:t>
+            </a:r>
+            <a:r>
+              <a:rPr lang="en-US" dirty="0"/>
+              <a:t> does this with m and b. </a:t>
+            </a:r>
+          </a:p>
+          <a:p>
+            <a:pPr lvl="1"/>
+            <a:r>
+              <a:rPr lang="en-US" dirty="0"/>
+              <a:t>The values of m and b control prediction.</a:t>
+            </a:r>
+          </a:p>
+        </p:txBody>
+      </p:sp>
+      <p:sp>
+        <p:nvSpPr>
+          <p:cNvPr id="5" name="Content Placeholder 4">
+            <a:extLst>
+              <a:ext uri="{FF2B5EF4-FFF2-40B4-BE49-F238E27FC236}">
+                <a16:creationId xmlns:a16="http://schemas.microsoft.com/office/drawing/2014/main" id="{1A2A2CDE-134A-EDAD-4DF1-8C18BC70FCB1}"/>
+              </a:ext>
+            </a:extLst>
+          </p:cNvPr>
+          <p:cNvSpPr>
+            <a:spLocks noGrp="1"/>
+          </p:cNvSpPr>
+          <p:nvPr>
+            <p:ph sz="half" idx="2"/>
+          </p:nvPr>
+        </p:nvSpPr>
+        <p:spPr>
+          <a:xfrm>
+            <a:off x="4645152" y="3987801"/>
+            <a:ext cx="7546848" cy="2065310"/>
+          </a:xfrm>
+        </p:spPr>
+        <p:txBody>
+          <a:bodyPr>
+            <a:normAutofit fontScale="92500" lnSpcReduction="20000"/>
+          </a:bodyPr>
+          <a:lstStyle/>
+          <a:p>
+            <a:r>
+              <a:rPr lang="en-US" dirty="0"/>
               <a:t>In MOST models we care about, learning isn’t one step like this. </a:t>
             </a:r>
           </a:p>
@@ -5881,20 +6238,40 @@
             </a:r>
           </a:p>
           <a:p>
-            <a:r>
-              <a:rPr lang="en-US" dirty="0"/>
-              <a:t>Linear regression is the only model* we see where we can calculate an answer. </a:t>
-            </a:r>
-          </a:p>
-          <a:p>
-            <a:pPr lvl="1"/>
-            <a:r>
-              <a:rPr lang="en-US" dirty="0"/>
-              <a:t>All others we need to estimate the best answer, and that takes time. </a:t>
-            </a:r>
-          </a:p>
-        </p:txBody>
-      </p:sp>
+            <a:endParaRPr lang="en-US" dirty="0"/>
+          </a:p>
+        </p:txBody>
+      </p:sp>
+      <p:pic>
+        <p:nvPicPr>
+          <p:cNvPr id="4" name="Picture 3">
+            <a:extLst>
+              <a:ext uri="{FF2B5EF4-FFF2-40B4-BE49-F238E27FC236}">
+                <a16:creationId xmlns:a16="http://schemas.microsoft.com/office/drawing/2014/main" id="{FAE4125A-92C1-2E6C-1342-679EAE52D50A}"/>
+              </a:ext>
+            </a:extLst>
+          </p:cNvPr>
+          <p:cNvPicPr>
+            <a:picLocks noChangeAspect="1"/>
+          </p:cNvPicPr>
+          <p:nvPr/>
+        </p:nvPicPr>
+        <p:blipFill>
+          <a:blip r:embed="rId2"/>
+          <a:stretch>
+            <a:fillRect/>
+          </a:stretch>
+        </p:blipFill>
+        <p:spPr>
+          <a:xfrm>
+            <a:off x="4645152" y="309347"/>
+            <a:ext cx="7506920" cy="3165231"/>
+          </a:xfrm>
+          <a:prstGeom prst="rect">
+            <a:avLst/>
+          </a:prstGeom>
+        </p:spPr>
+      </p:pic>
     </p:spTree>
     <p:extLst>
       <p:ext uri="{BB962C8B-B14F-4D97-AF65-F5344CB8AC3E}">
@@ -5908,7 +6285,7 @@
 </p:sld>
 </file>
 
-<file path=ppt/slides/slide14.xml><?xml version="1.0" encoding="utf-8"?>
+<file path=ppt/slides/slide15.xml><?xml version="1.0" encoding="utf-8"?>
 <p:sld xmlns:a="http://schemas.openxmlformats.org/drawingml/2006/main" xmlns:r="http://schemas.openxmlformats.org/officeDocument/2006/relationships" xmlns:p="http://schemas.openxmlformats.org/presentationml/2006/main">
   <p:cSld>
     <p:spTree>
@@ -6223,7 +6600,7 @@
 </p:sld>
 </file>
 
-<file path=ppt/slides/slide15.xml><?xml version="1.0" encoding="utf-8"?>
+<file path=ppt/slides/slide16.xml><?xml version="1.0" encoding="utf-8"?>
 <p:sld xmlns:a="http://schemas.openxmlformats.org/drawingml/2006/main" xmlns:r="http://schemas.openxmlformats.org/officeDocument/2006/relationships" xmlns:p="http://schemas.openxmlformats.org/presentationml/2006/main">
   <p:cSld>
     <p:spTree>
@@ -6383,7 +6760,183 @@
 </p:sld>
 </file>
 
-<file path=ppt/slides/slide16.xml><?xml version="1.0" encoding="utf-8"?>
+<file path=ppt/slides/slide17.xml><?xml version="1.0" encoding="utf-8"?>
+<p:sld xmlns:a="http://schemas.openxmlformats.org/drawingml/2006/main" xmlns:r="http://schemas.openxmlformats.org/officeDocument/2006/relationships" xmlns:p="http://schemas.openxmlformats.org/presentationml/2006/main">
+  <p:cSld>
+    <p:spTree>
+      <p:nvGrpSpPr>
+        <p:cNvPr id="1" name=""/>
+        <p:cNvGrpSpPr/>
+        <p:nvPr/>
+      </p:nvGrpSpPr>
+      <p:grpSpPr>
+        <a:xfrm>
+          <a:off x="0" y="0"/>
+          <a:ext cx="0" cy="0"/>
+          <a:chOff x="0" y="0"/>
+          <a:chExt cx="0" cy="0"/>
+        </a:xfrm>
+      </p:grpSpPr>
+      <p:sp>
+        <p:nvSpPr>
+          <p:cNvPr id="2" name="Title 1">
+            <a:extLst>
+              <a:ext uri="{FF2B5EF4-FFF2-40B4-BE49-F238E27FC236}">
+                <a16:creationId xmlns:a16="http://schemas.microsoft.com/office/drawing/2014/main" id="{4B065CD6-EA65-AFE1-40E7-9BC5EAFAC6B9}"/>
+              </a:ext>
+            </a:extLst>
+          </p:cNvPr>
+          <p:cNvSpPr>
+            <a:spLocks noGrp="1"/>
+          </p:cNvSpPr>
+          <p:nvPr>
+            <p:ph type="title"/>
+          </p:nvPr>
+        </p:nvSpPr>
+        <p:spPr/>
+        <p:txBody>
+          <a:bodyPr/>
+          <a:lstStyle/>
+          <a:p>
+            <a:r>
+              <a:rPr lang="en-US" dirty="0"/>
+              <a:t>Remember the Residual…</a:t>
+            </a:r>
+          </a:p>
+        </p:txBody>
+      </p:sp>
+      <p:sp>
+        <p:nvSpPr>
+          <p:cNvPr id="3" name="Content Placeholder 2">
+            <a:extLst>
+              <a:ext uri="{FF2B5EF4-FFF2-40B4-BE49-F238E27FC236}">
+                <a16:creationId xmlns:a16="http://schemas.microsoft.com/office/drawing/2014/main" id="{3CBF3867-112C-EEF7-00C4-1A58A468CBD9}"/>
+              </a:ext>
+            </a:extLst>
+          </p:cNvPr>
+          <p:cNvSpPr>
+            <a:spLocks noGrp="1"/>
+          </p:cNvSpPr>
+          <p:nvPr>
+            <p:ph idx="1"/>
+          </p:nvPr>
+        </p:nvSpPr>
+        <p:spPr>
+          <a:xfrm>
+            <a:off x="7028450" y="1853753"/>
+            <a:ext cx="5163549" cy="4199727"/>
+          </a:xfrm>
+        </p:spPr>
+        <p:txBody>
+          <a:bodyPr/>
+          <a:lstStyle/>
+          <a:p>
+            <a:r>
+              <a:rPr lang="en-US" dirty="0"/>
+              <a:t>Residuals are difference between an empirical value and the model’s predicted value. </a:t>
+            </a:r>
+          </a:p>
+          <a:p>
+            <a:r>
+              <a:rPr lang="en-US" dirty="0"/>
+              <a:t>The size of residuals tells us the ‘fit’ of the model. </a:t>
+            </a:r>
+          </a:p>
+          <a:p>
+            <a:r>
+              <a:rPr lang="en-US" dirty="0"/>
+              <a:t>Model is good fit when residuals are small. </a:t>
+            </a:r>
+          </a:p>
+          <a:p>
+            <a:pPr lvl="1"/>
+            <a:r>
+              <a:rPr lang="en-US" dirty="0"/>
+              <a:t>I.E. the model follows the data patterns. </a:t>
+            </a:r>
+          </a:p>
+          <a:p>
+            <a:r>
+              <a:rPr lang="en-US" dirty="0"/>
+              <a:t>Model is bad fit if residuals are large. </a:t>
+            </a:r>
+          </a:p>
+          <a:p>
+            <a:pPr lvl="1"/>
+            <a:r>
+              <a:rPr lang="en-US" dirty="0"/>
+              <a:t>Model diverges from empirical patterns. </a:t>
+            </a:r>
+          </a:p>
+          <a:p>
+            <a:r>
+              <a:rPr lang="en-US" dirty="0"/>
+              <a:t>We normally use fit as a term to discuss. </a:t>
+            </a:r>
+          </a:p>
+        </p:txBody>
+      </p:sp>
+      <p:pic>
+        <p:nvPicPr>
+          <p:cNvPr id="2050" name="Picture 2" descr="Residuals - MathBitsNotebook(A1)">
+            <a:extLst>
+              <a:ext uri="{FF2B5EF4-FFF2-40B4-BE49-F238E27FC236}">
+                <a16:creationId xmlns:a16="http://schemas.microsoft.com/office/drawing/2014/main" id="{E122809C-C129-005F-0D80-F0BC123019D7}"/>
+              </a:ext>
+            </a:extLst>
+          </p:cNvPr>
+          <p:cNvPicPr>
+            <a:picLocks noChangeAspect="1" noChangeArrowheads="1"/>
+          </p:cNvPicPr>
+          <p:nvPr/>
+        </p:nvPicPr>
+        <p:blipFill>
+          <a:blip r:embed="rId2">
+            <a:extLst>
+              <a:ext uri="{28A0092B-C50C-407E-A947-70E740481C1C}">
+                <a14:useLocalDpi xmlns:a14="http://schemas.microsoft.com/office/drawing/2010/main" val="0"/>
+              </a:ext>
+            </a:extLst>
+          </a:blip>
+          <a:srcRect/>
+          <a:stretch>
+            <a:fillRect/>
+          </a:stretch>
+        </p:blipFill>
+        <p:spPr bwMode="auto">
+          <a:xfrm>
+            <a:off x="0" y="2015732"/>
+            <a:ext cx="7028451" cy="3674418"/>
+          </a:xfrm>
+          <a:prstGeom prst="rect">
+            <a:avLst/>
+          </a:prstGeom>
+          <a:noFill/>
+          <a:extLst>
+            <a:ext uri="{909E8E84-426E-40DD-AFC4-6F175D3DCCD1}">
+              <a14:hiddenFill xmlns:a14="http://schemas.microsoft.com/office/drawing/2010/main">
+                <a:solidFill>
+                  <a:srgbClr val="FFFFFF"/>
+                </a:solidFill>
+              </a14:hiddenFill>
+            </a:ext>
+          </a:extLst>
+        </p:spPr>
+      </p:pic>
+    </p:spTree>
+    <p:extLst>
+      <p:ext uri="{BB962C8B-B14F-4D97-AF65-F5344CB8AC3E}">
+        <p14:creationId xmlns:p14="http://schemas.microsoft.com/office/powerpoint/2010/main" val="1130640157"/>
+      </p:ext>
+    </p:extLst>
+  </p:cSld>
+  <p:clrMapOvr>
+    <a:masterClrMapping/>
+  </p:clrMapOvr>
+</p:sld>
+</file>
+
+<file path=ppt/slides/slide18.xml><?xml version="1.0" encoding="utf-8"?>
 <p:sld xmlns:a="http://schemas.openxmlformats.org/drawingml/2006/main" xmlns:r="http://schemas.openxmlformats.org/officeDocument/2006/relationships" xmlns:p="http://schemas.openxmlformats.org/presentationml/2006/main">
   <p:cSld>
     <p:bg>
@@ -6560,429 +7113,6 @@
     <p:extLst>
       <p:ext uri="{BB962C8B-B14F-4D97-AF65-F5344CB8AC3E}">
         <p14:creationId xmlns:p14="http://schemas.microsoft.com/office/powerpoint/2010/main" val="869783968"/>
-      </p:ext>
-    </p:extLst>
-  </p:cSld>
-  <p:clrMapOvr>
-    <a:masterClrMapping/>
-  </p:clrMapOvr>
-</p:sld>
-</file>
-
-<file path=ppt/slides/slide17.xml><?xml version="1.0" encoding="utf-8"?>
-<p:sld xmlns:a="http://schemas.openxmlformats.org/drawingml/2006/main" xmlns:r="http://schemas.openxmlformats.org/officeDocument/2006/relationships" xmlns:p="http://schemas.openxmlformats.org/presentationml/2006/main">
-  <p:cSld>
-    <p:bg>
-      <p:bgPr>
-        <a:gradFill rotWithShape="1">
-          <a:gsLst>
-            <a:gs pos="0">
-              <a:schemeClr val="bg2">
-                <a:tint val="94000"/>
-                <a:satMod val="80000"/>
-                <a:lumMod val="106000"/>
-              </a:schemeClr>
-            </a:gs>
-            <a:gs pos="100000">
-              <a:schemeClr val="bg2">
-                <a:shade val="80000"/>
-              </a:schemeClr>
-            </a:gs>
-          </a:gsLst>
-          <a:path path="circle">
-            <a:fillToRect l="43000" r="43000" b="100000"/>
-          </a:path>
-        </a:gradFill>
-        <a:effectLst/>
-      </p:bgPr>
-    </p:bg>
-    <p:spTree>
-      <p:nvGrpSpPr>
-        <p:cNvPr id="1" name=""/>
-        <p:cNvGrpSpPr/>
-        <p:nvPr/>
-      </p:nvGrpSpPr>
-      <p:grpSpPr>
-        <a:xfrm>
-          <a:off x="0" y="0"/>
-          <a:ext cx="0" cy="0"/>
-          <a:chOff x="0" y="0"/>
-          <a:chExt cx="0" cy="0"/>
-        </a:xfrm>
-      </p:grpSpPr>
-      <p:sp>
-        <p:nvSpPr>
-          <p:cNvPr id="2" name="Title 1">
-            <a:extLst>
-              <a:ext uri="{FF2B5EF4-FFF2-40B4-BE49-F238E27FC236}">
-                <a16:creationId xmlns:a16="http://schemas.microsoft.com/office/drawing/2014/main" id="{AFA51FD7-A9C7-CD4A-B394-4D9E37B6A26E}"/>
-              </a:ext>
-            </a:extLst>
-          </p:cNvPr>
-          <p:cNvSpPr>
-            <a:spLocks noGrp="1"/>
-          </p:cNvSpPr>
-          <p:nvPr>
-            <p:ph type="title"/>
-          </p:nvPr>
-        </p:nvSpPr>
-        <p:spPr>
-          <a:xfrm>
-            <a:off x="1451579" y="804519"/>
-            <a:ext cx="9603275" cy="1049235"/>
-          </a:xfrm>
-        </p:spPr>
-        <p:txBody>
-          <a:bodyPr>
-            <a:normAutofit/>
-          </a:bodyPr>
-          <a:lstStyle/>
-          <a:p>
-            <a:r>
-              <a:rPr lang="en-US" dirty="0"/>
-              <a:t>Why Random?</a:t>
-            </a:r>
-          </a:p>
-        </p:txBody>
-      </p:sp>
-      <p:sp>
-        <p:nvSpPr>
-          <p:cNvPr id="3" name="Content Placeholder 2">
-            <a:extLst>
-              <a:ext uri="{FF2B5EF4-FFF2-40B4-BE49-F238E27FC236}">
-                <a16:creationId xmlns:a16="http://schemas.microsoft.com/office/drawing/2014/main" id="{C2822CE1-EEC2-DA4E-ACFC-03662AAD5629}"/>
-              </a:ext>
-            </a:extLst>
-          </p:cNvPr>
-          <p:cNvSpPr>
-            <a:spLocks noGrp="1"/>
-          </p:cNvSpPr>
-          <p:nvPr>
-            <p:ph idx="1"/>
-          </p:nvPr>
-        </p:nvSpPr>
-        <p:spPr>
-          <a:xfrm>
-            <a:off x="635000" y="1853754"/>
-            <a:ext cx="5359399" cy="4295837"/>
-          </a:xfrm>
-        </p:spPr>
-        <p:txBody>
-          <a:bodyPr>
-            <a:normAutofit/>
-          </a:bodyPr>
-          <a:lstStyle/>
-          <a:p>
-            <a:r>
-              <a:rPr lang="en-US" dirty="0"/>
-              <a:t>If there’s a pattern in the residuals it tells us that there’s some relationship here that isn’t captured in our actual model.</a:t>
-            </a:r>
-          </a:p>
-          <a:p>
-            <a:pPr lvl="1"/>
-            <a:r>
-              <a:rPr lang="en-US" dirty="0"/>
-              <a:t>Middle predictions too high, ends are too low. </a:t>
-            </a:r>
-          </a:p>
-          <a:p>
-            <a:r>
-              <a:rPr lang="en-US" dirty="0"/>
-              <a:t>Residuals should be:</a:t>
-            </a:r>
-          </a:p>
-          <a:p>
-            <a:pPr lvl="1"/>
-            <a:r>
-              <a:rPr lang="en-US" dirty="0"/>
-              <a:t>Uncorrelated with a variable.</a:t>
-            </a:r>
-          </a:p>
-          <a:p>
-            <a:pPr lvl="1"/>
-            <a:r>
-              <a:rPr lang="en-US" dirty="0"/>
-              <a:t>Uncorrelated with each other. </a:t>
-            </a:r>
-          </a:p>
-          <a:p>
-            <a:r>
-              <a:rPr lang="en-US" dirty="0"/>
-              <a:t>We shouldn’t be able to predict residuals. </a:t>
-            </a:r>
-          </a:p>
-          <a:p>
-            <a:pPr lvl="1"/>
-            <a:r>
-              <a:rPr lang="en-US" dirty="0"/>
-              <a:t>That pattern belongs in the model!!!!!</a:t>
-            </a:r>
-          </a:p>
-          <a:p>
-            <a:r>
-              <a:rPr lang="en-US" dirty="0"/>
-              <a:t>Models can be limited in fit – e.g. linear here. </a:t>
-            </a:r>
-          </a:p>
-        </p:txBody>
-      </p:sp>
-      <p:pic>
-        <p:nvPicPr>
-          <p:cNvPr id="2050" name="Picture 2" descr="Minitab's residuals versus fit plot with bad residuals">
-            <a:extLst>
-              <a:ext uri="{FF2B5EF4-FFF2-40B4-BE49-F238E27FC236}">
-                <a16:creationId xmlns:a16="http://schemas.microsoft.com/office/drawing/2014/main" id="{62A0CAEA-4DD1-CA49-84C3-5091103E1D19}"/>
-              </a:ext>
-            </a:extLst>
-          </p:cNvPr>
-          <p:cNvPicPr>
-            <a:picLocks noChangeAspect="1" noChangeArrowheads="1"/>
-          </p:cNvPicPr>
-          <p:nvPr/>
-        </p:nvPicPr>
-        <p:blipFill>
-          <a:blip r:embed="rId2">
-            <a:extLst>
-              <a:ext uri="{28A0092B-C50C-407E-A947-70E740481C1C}">
-                <a14:useLocalDpi xmlns:a14="http://schemas.microsoft.com/office/drawing/2010/main" val="0"/>
-              </a:ext>
-            </a:extLst>
-          </a:blip>
-          <a:stretch>
-            <a:fillRect/>
-          </a:stretch>
-        </p:blipFill>
-        <p:spPr bwMode="auto">
-          <a:xfrm>
-            <a:off x="6094411" y="2087558"/>
-            <a:ext cx="5707862" cy="3805241"/>
-          </a:xfrm>
-          <a:prstGeom prst="rect">
-            <a:avLst/>
-          </a:prstGeom>
-          <a:noFill/>
-          <a:extLst>
-            <a:ext uri="{909E8E84-426E-40DD-AFC4-6F175D3DCCD1}">
-              <a14:hiddenFill xmlns:a14="http://schemas.microsoft.com/office/drawing/2010/main">
-                <a:solidFill>
-                  <a:srgbClr val="FFFFFF"/>
-                </a:solidFill>
-              </a14:hiddenFill>
-            </a:ext>
-          </a:extLst>
-        </p:spPr>
-      </p:pic>
-    </p:spTree>
-    <p:extLst>
-      <p:ext uri="{BB962C8B-B14F-4D97-AF65-F5344CB8AC3E}">
-        <p14:creationId xmlns:p14="http://schemas.microsoft.com/office/powerpoint/2010/main" val="1812565449"/>
-      </p:ext>
-    </p:extLst>
-  </p:cSld>
-  <p:clrMapOvr>
-    <a:masterClrMapping/>
-  </p:clrMapOvr>
-</p:sld>
-</file>
-
-<file path=ppt/slides/slide18.xml><?xml version="1.0" encoding="utf-8"?>
-<p:sld xmlns:a="http://schemas.openxmlformats.org/drawingml/2006/main" xmlns:r="http://schemas.openxmlformats.org/officeDocument/2006/relationships" xmlns:p="http://schemas.openxmlformats.org/presentationml/2006/main">
-  <p:cSld>
-    <p:spTree>
-      <p:nvGrpSpPr>
-        <p:cNvPr id="1" name=""/>
-        <p:cNvGrpSpPr/>
-        <p:nvPr/>
-      </p:nvGrpSpPr>
-      <p:grpSpPr>
-        <a:xfrm>
-          <a:off x="0" y="0"/>
-          <a:ext cx="0" cy="0"/>
-          <a:chOff x="0" y="0"/>
-          <a:chExt cx="0" cy="0"/>
-        </a:xfrm>
-      </p:grpSpPr>
-      <p:sp>
-        <p:nvSpPr>
-          <p:cNvPr id="2" name="Title 1">
-            <a:extLst>
-              <a:ext uri="{FF2B5EF4-FFF2-40B4-BE49-F238E27FC236}">
-                <a16:creationId xmlns:a16="http://schemas.microsoft.com/office/drawing/2014/main" id="{77C3FDD7-7164-3D44-B4AF-1B7CD86E680E}"/>
-              </a:ext>
-            </a:extLst>
-          </p:cNvPr>
-          <p:cNvSpPr>
-            <a:spLocks noGrp="1"/>
-          </p:cNvSpPr>
-          <p:nvPr>
-            <p:ph type="title"/>
-          </p:nvPr>
-        </p:nvSpPr>
-        <p:spPr/>
-        <p:txBody>
-          <a:bodyPr/>
-          <a:lstStyle/>
-          <a:p>
-            <a:r>
-              <a:rPr lang="en-US" dirty="0"/>
-              <a:t>Doing Regression - Other Packages</a:t>
-            </a:r>
-          </a:p>
-        </p:txBody>
-      </p:sp>
-      <p:sp>
-        <p:nvSpPr>
-          <p:cNvPr id="3" name="Content Placeholder 2">
-            <a:extLst>
-              <a:ext uri="{FF2B5EF4-FFF2-40B4-BE49-F238E27FC236}">
-                <a16:creationId xmlns:a16="http://schemas.microsoft.com/office/drawing/2014/main" id="{88F66A41-146A-E147-A72A-B35E0AEFB656}"/>
-              </a:ext>
-            </a:extLst>
-          </p:cNvPr>
-          <p:cNvSpPr>
-            <a:spLocks noGrp="1"/>
-          </p:cNvSpPr>
-          <p:nvPr>
-            <p:ph idx="1"/>
-          </p:nvPr>
-        </p:nvSpPr>
-        <p:spPr>
-          <a:xfrm>
-            <a:off x="1451579" y="1853754"/>
-            <a:ext cx="9603275" cy="4318446"/>
-          </a:xfrm>
-        </p:spPr>
-        <p:txBody>
-          <a:bodyPr>
-            <a:normAutofit/>
-          </a:bodyPr>
-          <a:lstStyle/>
-          <a:p>
-            <a:r>
-              <a:rPr lang="en-US" dirty="0"/>
-              <a:t>Using LLS calculations is ok for one x, but impractical in reality. </a:t>
-            </a:r>
-          </a:p>
-          <a:p>
-            <a:r>
-              <a:rPr lang="en-US" dirty="0"/>
-              <a:t>Regression is performed by existing packages, such as </a:t>
-            </a:r>
-            <a:r>
-              <a:rPr lang="en-US" dirty="0" err="1"/>
-              <a:t>StatsModels</a:t>
-            </a:r>
-            <a:r>
-              <a:rPr lang="en-US" dirty="0"/>
-              <a:t>, </a:t>
-            </a:r>
-            <a:r>
-              <a:rPr lang="en-US" dirty="0" err="1"/>
-              <a:t>Scipy</a:t>
-            </a:r>
-            <a:r>
-              <a:rPr lang="en-US" dirty="0"/>
-              <a:t>, and </a:t>
-            </a:r>
-            <a:r>
-              <a:rPr lang="en-US" dirty="0" err="1"/>
-              <a:t>Scikitlearn</a:t>
-            </a:r>
-            <a:r>
-              <a:rPr lang="en-US" dirty="0"/>
-              <a:t>. </a:t>
-            </a:r>
-          </a:p>
-          <a:p>
-            <a:pPr lvl="1"/>
-            <a:r>
-              <a:rPr lang="en-US" dirty="0"/>
-              <a:t>The book uses </a:t>
-            </a:r>
-            <a:r>
-              <a:rPr lang="en-US" dirty="0" err="1"/>
-              <a:t>StatsModels</a:t>
-            </a:r>
-            <a:r>
-              <a:rPr lang="en-US" dirty="0"/>
-              <a:t> when multiple regression starts. </a:t>
-            </a:r>
-          </a:p>
-          <a:p>
-            <a:pPr lvl="1"/>
-            <a:r>
-              <a:rPr lang="en-US" dirty="0"/>
-              <a:t>They all ultimately do the same thing. </a:t>
-            </a:r>
-          </a:p>
-          <a:p>
-            <a:r>
-              <a:rPr lang="en-US" dirty="0"/>
-              <a:t>We’ll use both </a:t>
-            </a:r>
-            <a:r>
-              <a:rPr lang="en-US" dirty="0" err="1"/>
-              <a:t>StatsModels</a:t>
-            </a:r>
-            <a:r>
-              <a:rPr lang="en-US" dirty="0"/>
-              <a:t> (only a little) and </a:t>
-            </a:r>
-            <a:r>
-              <a:rPr lang="en-US" dirty="0" err="1"/>
-              <a:t>Scikitlearn</a:t>
-            </a:r>
-            <a:r>
-              <a:rPr lang="en-US" dirty="0"/>
-              <a:t> (a lot):</a:t>
-            </a:r>
-          </a:p>
-          <a:p>
-            <a:pPr lvl="1"/>
-            <a:r>
-              <a:rPr lang="en-US" dirty="0" err="1"/>
-              <a:t>Statsmodels</a:t>
-            </a:r>
-            <a:r>
-              <a:rPr lang="en-US" dirty="0"/>
-              <a:t> provide more stats data in the output, so we will use that sometimes. </a:t>
-            </a:r>
-          </a:p>
-          <a:p>
-            <a:pPr lvl="1"/>
-            <a:r>
-              <a:rPr lang="en-US" dirty="0"/>
-              <a:t>The </a:t>
-            </a:r>
-            <a:r>
-              <a:rPr lang="en-US" dirty="0" err="1"/>
-              <a:t>scikitlearn</a:t>
-            </a:r>
-            <a:r>
-              <a:rPr lang="en-US" dirty="0"/>
-              <a:t> is much more relevant experience for ML stuff. </a:t>
-            </a:r>
-          </a:p>
-          <a:p>
-            <a:r>
-              <a:rPr lang="en-US" dirty="0"/>
-              <a:t>You need to be good with sklearn no matter what, if you’re going to not learn anything, the details of </a:t>
-            </a:r>
-            <a:r>
-              <a:rPr lang="en-US" dirty="0" err="1"/>
-              <a:t>statsmodels</a:t>
-            </a:r>
-            <a:r>
-              <a:rPr lang="en-US" dirty="0"/>
-              <a:t> is the choice to make. We just use it for some details. </a:t>
-            </a:r>
-          </a:p>
-        </p:txBody>
-      </p:sp>
-    </p:spTree>
-    <p:extLst>
-      <p:ext uri="{BB962C8B-B14F-4D97-AF65-F5344CB8AC3E}">
-        <p14:creationId xmlns:p14="http://schemas.microsoft.com/office/powerpoint/2010/main" val="2723228470"/>
       </p:ext>
     </p:extLst>
   </p:cSld>
@@ -7038,6 +7168,554 @@
           <p:cNvPr id="2" name="Title 1">
             <a:extLst>
               <a:ext uri="{FF2B5EF4-FFF2-40B4-BE49-F238E27FC236}">
+                <a16:creationId xmlns:a16="http://schemas.microsoft.com/office/drawing/2014/main" id="{AFA51FD7-A9C7-CD4A-B394-4D9E37B6A26E}"/>
+              </a:ext>
+            </a:extLst>
+          </p:cNvPr>
+          <p:cNvSpPr>
+            <a:spLocks noGrp="1"/>
+          </p:cNvSpPr>
+          <p:nvPr>
+            <p:ph type="title"/>
+          </p:nvPr>
+        </p:nvSpPr>
+        <p:spPr>
+          <a:xfrm>
+            <a:off x="1451579" y="804519"/>
+            <a:ext cx="9603275" cy="1049235"/>
+          </a:xfrm>
+        </p:spPr>
+        <p:txBody>
+          <a:bodyPr>
+            <a:normAutofit/>
+          </a:bodyPr>
+          <a:lstStyle/>
+          <a:p>
+            <a:r>
+              <a:rPr lang="en-US" dirty="0"/>
+              <a:t>Why Random?</a:t>
+            </a:r>
+          </a:p>
+        </p:txBody>
+      </p:sp>
+      <p:sp>
+        <p:nvSpPr>
+          <p:cNvPr id="3" name="Content Placeholder 2">
+            <a:extLst>
+              <a:ext uri="{FF2B5EF4-FFF2-40B4-BE49-F238E27FC236}">
+                <a16:creationId xmlns:a16="http://schemas.microsoft.com/office/drawing/2014/main" id="{C2822CE1-EEC2-DA4E-ACFC-03662AAD5629}"/>
+              </a:ext>
+            </a:extLst>
+          </p:cNvPr>
+          <p:cNvSpPr>
+            <a:spLocks noGrp="1"/>
+          </p:cNvSpPr>
+          <p:nvPr>
+            <p:ph idx="1"/>
+          </p:nvPr>
+        </p:nvSpPr>
+        <p:spPr>
+          <a:xfrm>
+            <a:off x="635000" y="1853754"/>
+            <a:ext cx="5359399" cy="4295837"/>
+          </a:xfrm>
+        </p:spPr>
+        <p:txBody>
+          <a:bodyPr>
+            <a:normAutofit/>
+          </a:bodyPr>
+          <a:lstStyle/>
+          <a:p>
+            <a:r>
+              <a:rPr lang="en-US" dirty="0"/>
+              <a:t>If there’s a pattern in the residuals it tells us that there’s some relationship here that isn’t captured in our actual model.</a:t>
+            </a:r>
+          </a:p>
+          <a:p>
+            <a:pPr lvl="1"/>
+            <a:r>
+              <a:rPr lang="en-US" dirty="0"/>
+              <a:t>Middle predictions too high, ends are too low. </a:t>
+            </a:r>
+          </a:p>
+          <a:p>
+            <a:r>
+              <a:rPr lang="en-US" dirty="0"/>
+              <a:t>Residuals should be:</a:t>
+            </a:r>
+          </a:p>
+          <a:p>
+            <a:pPr lvl="1"/>
+            <a:r>
+              <a:rPr lang="en-US" dirty="0"/>
+              <a:t>Uncorrelated with a variable.</a:t>
+            </a:r>
+          </a:p>
+          <a:p>
+            <a:pPr lvl="1"/>
+            <a:r>
+              <a:rPr lang="en-US" dirty="0"/>
+              <a:t>Uncorrelated with each other. </a:t>
+            </a:r>
+          </a:p>
+          <a:p>
+            <a:r>
+              <a:rPr lang="en-US" dirty="0"/>
+              <a:t>We shouldn’t be able to predict residuals. </a:t>
+            </a:r>
+          </a:p>
+          <a:p>
+            <a:pPr lvl="1"/>
+            <a:r>
+              <a:rPr lang="en-US" dirty="0"/>
+              <a:t>That pattern belongs in the model!!!!!</a:t>
+            </a:r>
+          </a:p>
+          <a:p>
+            <a:r>
+              <a:rPr lang="en-US" dirty="0"/>
+              <a:t>Models can be limited in fit – e.g. linear here. </a:t>
+            </a:r>
+          </a:p>
+        </p:txBody>
+      </p:sp>
+      <p:pic>
+        <p:nvPicPr>
+          <p:cNvPr id="2050" name="Picture 2" descr="Minitab's residuals versus fit plot with bad residuals">
+            <a:extLst>
+              <a:ext uri="{FF2B5EF4-FFF2-40B4-BE49-F238E27FC236}">
+                <a16:creationId xmlns:a16="http://schemas.microsoft.com/office/drawing/2014/main" id="{62A0CAEA-4DD1-CA49-84C3-5091103E1D19}"/>
+              </a:ext>
+            </a:extLst>
+          </p:cNvPr>
+          <p:cNvPicPr>
+            <a:picLocks noChangeAspect="1" noChangeArrowheads="1"/>
+          </p:cNvPicPr>
+          <p:nvPr/>
+        </p:nvPicPr>
+        <p:blipFill>
+          <a:blip r:embed="rId2">
+            <a:extLst>
+              <a:ext uri="{28A0092B-C50C-407E-A947-70E740481C1C}">
+                <a14:useLocalDpi xmlns:a14="http://schemas.microsoft.com/office/drawing/2010/main" val="0"/>
+              </a:ext>
+            </a:extLst>
+          </a:blip>
+          <a:stretch>
+            <a:fillRect/>
+          </a:stretch>
+        </p:blipFill>
+        <p:spPr bwMode="auto">
+          <a:xfrm>
+            <a:off x="6094411" y="2087558"/>
+            <a:ext cx="5707862" cy="3805241"/>
+          </a:xfrm>
+          <a:prstGeom prst="rect">
+            <a:avLst/>
+          </a:prstGeom>
+          <a:noFill/>
+          <a:extLst>
+            <a:ext uri="{909E8E84-426E-40DD-AFC4-6F175D3DCCD1}">
+              <a14:hiddenFill xmlns:a14="http://schemas.microsoft.com/office/drawing/2010/main">
+                <a:solidFill>
+                  <a:srgbClr val="FFFFFF"/>
+                </a:solidFill>
+              </a14:hiddenFill>
+            </a:ext>
+          </a:extLst>
+        </p:spPr>
+      </p:pic>
+    </p:spTree>
+    <p:extLst>
+      <p:ext uri="{BB962C8B-B14F-4D97-AF65-F5344CB8AC3E}">
+        <p14:creationId xmlns:p14="http://schemas.microsoft.com/office/powerpoint/2010/main" val="1812565449"/>
+      </p:ext>
+    </p:extLst>
+  </p:cSld>
+  <p:clrMapOvr>
+    <a:masterClrMapping/>
+  </p:clrMapOvr>
+</p:sld>
+</file>
+
+<file path=ppt/slides/slide2.xml><?xml version="1.0" encoding="utf-8"?>
+<p:sld xmlns:a="http://schemas.openxmlformats.org/drawingml/2006/main" xmlns:r="http://schemas.openxmlformats.org/officeDocument/2006/relationships" xmlns:p="http://schemas.openxmlformats.org/presentationml/2006/main">
+  <p:cSld>
+    <p:spTree>
+      <p:nvGrpSpPr>
+        <p:cNvPr id="1" name=""/>
+        <p:cNvGrpSpPr/>
+        <p:nvPr/>
+      </p:nvGrpSpPr>
+      <p:grpSpPr>
+        <a:xfrm>
+          <a:off x="0" y="0"/>
+          <a:ext cx="0" cy="0"/>
+          <a:chOff x="0" y="0"/>
+          <a:chExt cx="0" cy="0"/>
+        </a:xfrm>
+      </p:grpSpPr>
+      <p:sp>
+        <p:nvSpPr>
+          <p:cNvPr id="2" name="Title 1">
+            <a:extLst>
+              <a:ext uri="{FF2B5EF4-FFF2-40B4-BE49-F238E27FC236}">
+                <a16:creationId xmlns:a16="http://schemas.microsoft.com/office/drawing/2014/main" id="{EE0DD664-EE5C-B6D8-4EDE-D3B1ED4F073F}"/>
+              </a:ext>
+            </a:extLst>
+          </p:cNvPr>
+          <p:cNvSpPr>
+            <a:spLocks noGrp="1"/>
+          </p:cNvSpPr>
+          <p:nvPr>
+            <p:ph type="title"/>
+          </p:nvPr>
+        </p:nvSpPr>
+        <p:spPr/>
+        <p:txBody>
+          <a:bodyPr/>
+          <a:lstStyle/>
+          <a:p>
+            <a:r>
+              <a:rPr lang="en-US" dirty="0"/>
+              <a:t>Other Logistics…</a:t>
+            </a:r>
+          </a:p>
+        </p:txBody>
+      </p:sp>
+      <p:sp>
+        <p:nvSpPr>
+          <p:cNvPr id="3" name="Content Placeholder 2">
+            <a:extLst>
+              <a:ext uri="{FF2B5EF4-FFF2-40B4-BE49-F238E27FC236}">
+                <a16:creationId xmlns:a16="http://schemas.microsoft.com/office/drawing/2014/main" id="{0AA97EF6-6FEF-1047-02C9-5689FDDE77E1}"/>
+              </a:ext>
+            </a:extLst>
+          </p:cNvPr>
+          <p:cNvSpPr>
+            <a:spLocks noGrp="1"/>
+          </p:cNvSpPr>
+          <p:nvPr>
+            <p:ph idx="1"/>
+          </p:nvPr>
+        </p:nvSpPr>
+        <p:spPr>
+          <a:xfrm>
+            <a:off x="1451579" y="1929284"/>
+            <a:ext cx="9603275" cy="4124197"/>
+          </a:xfrm>
+        </p:spPr>
+        <p:txBody>
+          <a:bodyPr/>
+          <a:lstStyle/>
+          <a:p>
+            <a:r>
+              <a:rPr lang="en-US" dirty="0"/>
+              <a:t>I’ll get the other assignments marked this weekend. </a:t>
+            </a:r>
+          </a:p>
+          <a:p>
+            <a:r>
+              <a:rPr lang="en-US" dirty="0"/>
+              <a:t>The assignment that was just assigned has a half that is on regression. </a:t>
+            </a:r>
+          </a:p>
+          <a:p>
+            <a:pPr lvl="1"/>
+            <a:r>
+              <a:rPr lang="en-US" dirty="0"/>
+              <a:t>We’ll cover that part next week. </a:t>
+            </a:r>
+          </a:p>
+          <a:p>
+            <a:pPr lvl="1"/>
+            <a:r>
+              <a:rPr lang="en-US" dirty="0"/>
+              <a:t>The actual question is quite easy, once you’ve seen it, it isn’t hard and doesn’t take long. </a:t>
+            </a:r>
+          </a:p>
+          <a:p>
+            <a:pPr lvl="1"/>
+            <a:r>
+              <a:rPr lang="en-US" dirty="0"/>
+              <a:t>We can set a date for that exam +1 week from when we cover regression. </a:t>
+            </a:r>
+          </a:p>
+          <a:p>
+            <a:pPr lvl="2"/>
+            <a:r>
+              <a:rPr lang="en-US" dirty="0"/>
+              <a:t>Likely next Thursday + 1 week. </a:t>
+            </a:r>
+          </a:p>
+        </p:txBody>
+      </p:sp>
+    </p:spTree>
+    <p:extLst>
+      <p:ext uri="{BB962C8B-B14F-4D97-AF65-F5344CB8AC3E}">
+        <p14:creationId xmlns:p14="http://schemas.microsoft.com/office/powerpoint/2010/main" val="2839469939"/>
+      </p:ext>
+    </p:extLst>
+  </p:cSld>
+  <p:clrMapOvr>
+    <a:masterClrMapping/>
+  </p:clrMapOvr>
+</p:sld>
+</file>
+
+<file path=ppt/slides/slide20.xml><?xml version="1.0" encoding="utf-8"?>
+<p:sld xmlns:a="http://schemas.openxmlformats.org/drawingml/2006/main" xmlns:r="http://schemas.openxmlformats.org/officeDocument/2006/relationships" xmlns:p="http://schemas.openxmlformats.org/presentationml/2006/main">
+  <p:cSld>
+    <p:spTree>
+      <p:nvGrpSpPr>
+        <p:cNvPr id="1" name=""/>
+        <p:cNvGrpSpPr/>
+        <p:nvPr/>
+      </p:nvGrpSpPr>
+      <p:grpSpPr>
+        <a:xfrm>
+          <a:off x="0" y="0"/>
+          <a:ext cx="0" cy="0"/>
+          <a:chOff x="0" y="0"/>
+          <a:chExt cx="0" cy="0"/>
+        </a:xfrm>
+      </p:grpSpPr>
+      <p:sp>
+        <p:nvSpPr>
+          <p:cNvPr id="2" name="Title 1">
+            <a:extLst>
+              <a:ext uri="{FF2B5EF4-FFF2-40B4-BE49-F238E27FC236}">
+                <a16:creationId xmlns:a16="http://schemas.microsoft.com/office/drawing/2014/main" id="{77C3FDD7-7164-3D44-B4AF-1B7CD86E680E}"/>
+              </a:ext>
+            </a:extLst>
+          </p:cNvPr>
+          <p:cNvSpPr>
+            <a:spLocks noGrp="1"/>
+          </p:cNvSpPr>
+          <p:nvPr>
+            <p:ph type="title"/>
+          </p:nvPr>
+        </p:nvSpPr>
+        <p:spPr/>
+        <p:txBody>
+          <a:bodyPr/>
+          <a:lstStyle/>
+          <a:p>
+            <a:r>
+              <a:rPr lang="en-US" dirty="0"/>
+              <a:t>Doing Regression - Other Packages</a:t>
+            </a:r>
+          </a:p>
+        </p:txBody>
+      </p:sp>
+      <p:sp>
+        <p:nvSpPr>
+          <p:cNvPr id="3" name="Content Placeholder 2">
+            <a:extLst>
+              <a:ext uri="{FF2B5EF4-FFF2-40B4-BE49-F238E27FC236}">
+                <a16:creationId xmlns:a16="http://schemas.microsoft.com/office/drawing/2014/main" id="{88F66A41-146A-E147-A72A-B35E0AEFB656}"/>
+              </a:ext>
+            </a:extLst>
+          </p:cNvPr>
+          <p:cNvSpPr>
+            <a:spLocks noGrp="1"/>
+          </p:cNvSpPr>
+          <p:nvPr>
+            <p:ph idx="1"/>
+          </p:nvPr>
+        </p:nvSpPr>
+        <p:spPr>
+          <a:xfrm>
+            <a:off x="1451579" y="1853754"/>
+            <a:ext cx="9603275" cy="4318446"/>
+          </a:xfrm>
+        </p:spPr>
+        <p:txBody>
+          <a:bodyPr>
+            <a:normAutofit/>
+          </a:bodyPr>
+          <a:lstStyle/>
+          <a:p>
+            <a:r>
+              <a:rPr lang="en-US" dirty="0"/>
+              <a:t>Using LLS calculations is ok for one x, but impractical in reality. </a:t>
+            </a:r>
+          </a:p>
+          <a:p>
+            <a:r>
+              <a:rPr lang="en-US" dirty="0"/>
+              <a:t>Regression is performed by existing packages, such as </a:t>
+            </a:r>
+            <a:r>
+              <a:rPr lang="en-US" dirty="0" err="1"/>
+              <a:t>StatsModels</a:t>
+            </a:r>
+            <a:r>
+              <a:rPr lang="en-US" dirty="0"/>
+              <a:t>, </a:t>
+            </a:r>
+            <a:r>
+              <a:rPr lang="en-US" dirty="0" err="1"/>
+              <a:t>Scipy</a:t>
+            </a:r>
+            <a:r>
+              <a:rPr lang="en-US" dirty="0"/>
+              <a:t>, and </a:t>
+            </a:r>
+            <a:r>
+              <a:rPr lang="en-US" dirty="0" err="1"/>
+              <a:t>Scikitlearn</a:t>
+            </a:r>
+            <a:r>
+              <a:rPr lang="en-US" dirty="0"/>
+              <a:t>. </a:t>
+            </a:r>
+          </a:p>
+          <a:p>
+            <a:pPr lvl="1"/>
+            <a:r>
+              <a:rPr lang="en-US" dirty="0"/>
+              <a:t>The book uses </a:t>
+            </a:r>
+            <a:r>
+              <a:rPr lang="en-US" dirty="0" err="1"/>
+              <a:t>StatsModels</a:t>
+            </a:r>
+            <a:r>
+              <a:rPr lang="en-US" dirty="0"/>
+              <a:t> when multiple regression starts. </a:t>
+            </a:r>
+          </a:p>
+          <a:p>
+            <a:pPr lvl="1"/>
+            <a:r>
+              <a:rPr lang="en-US" dirty="0"/>
+              <a:t>They all ultimately do the same thing. </a:t>
+            </a:r>
+          </a:p>
+          <a:p>
+            <a:r>
+              <a:rPr lang="en-US" dirty="0"/>
+              <a:t>We’ll use both </a:t>
+            </a:r>
+            <a:r>
+              <a:rPr lang="en-US" dirty="0" err="1"/>
+              <a:t>StatsModels</a:t>
+            </a:r>
+            <a:r>
+              <a:rPr lang="en-US" dirty="0"/>
+              <a:t> (only a little) and </a:t>
+            </a:r>
+            <a:r>
+              <a:rPr lang="en-US" dirty="0" err="1"/>
+              <a:t>Scikitlearn</a:t>
+            </a:r>
+            <a:r>
+              <a:rPr lang="en-US" dirty="0"/>
+              <a:t> (a lot):</a:t>
+            </a:r>
+          </a:p>
+          <a:p>
+            <a:pPr lvl="1"/>
+            <a:r>
+              <a:rPr lang="en-US" dirty="0" err="1"/>
+              <a:t>Statsmodels</a:t>
+            </a:r>
+            <a:r>
+              <a:rPr lang="en-US" dirty="0"/>
+              <a:t> provide more stats data in the output, so we will use that sometimes. </a:t>
+            </a:r>
+          </a:p>
+          <a:p>
+            <a:pPr lvl="1"/>
+            <a:r>
+              <a:rPr lang="en-US" dirty="0"/>
+              <a:t>The </a:t>
+            </a:r>
+            <a:r>
+              <a:rPr lang="en-US" dirty="0" err="1"/>
+              <a:t>scikitlearn</a:t>
+            </a:r>
+            <a:r>
+              <a:rPr lang="en-US" dirty="0"/>
+              <a:t> is much more relevant experience for ML stuff. </a:t>
+            </a:r>
+          </a:p>
+          <a:p>
+            <a:r>
+              <a:rPr lang="en-US" dirty="0"/>
+              <a:t>You need to be good with sklearn no matter what, if you’re going to not learn anything, the details of </a:t>
+            </a:r>
+            <a:r>
+              <a:rPr lang="en-US" dirty="0" err="1"/>
+              <a:t>statsmodels</a:t>
+            </a:r>
+            <a:r>
+              <a:rPr lang="en-US" dirty="0"/>
+              <a:t> is the choice to make. We just use it for some details. </a:t>
+            </a:r>
+          </a:p>
+        </p:txBody>
+      </p:sp>
+    </p:spTree>
+    <p:extLst>
+      <p:ext uri="{BB962C8B-B14F-4D97-AF65-F5344CB8AC3E}">
+        <p14:creationId xmlns:p14="http://schemas.microsoft.com/office/powerpoint/2010/main" val="2723228470"/>
+      </p:ext>
+    </p:extLst>
+  </p:cSld>
+  <p:clrMapOvr>
+    <a:masterClrMapping/>
+  </p:clrMapOvr>
+</p:sld>
+</file>
+
+<file path=ppt/slides/slide21.xml><?xml version="1.0" encoding="utf-8"?>
+<p:sld xmlns:a="http://schemas.openxmlformats.org/drawingml/2006/main" xmlns:r="http://schemas.openxmlformats.org/officeDocument/2006/relationships" xmlns:p="http://schemas.openxmlformats.org/presentationml/2006/main">
+  <p:cSld>
+    <p:bg>
+      <p:bgPr>
+        <a:gradFill rotWithShape="1">
+          <a:gsLst>
+            <a:gs pos="0">
+              <a:schemeClr val="bg2">
+                <a:tint val="94000"/>
+                <a:satMod val="80000"/>
+                <a:lumMod val="106000"/>
+              </a:schemeClr>
+            </a:gs>
+            <a:gs pos="100000">
+              <a:schemeClr val="bg2">
+                <a:shade val="80000"/>
+              </a:schemeClr>
+            </a:gs>
+          </a:gsLst>
+          <a:path path="circle">
+            <a:fillToRect l="43000" r="43000" b="100000"/>
+          </a:path>
+        </a:gradFill>
+        <a:effectLst/>
+      </p:bgPr>
+    </p:bg>
+    <p:spTree>
+      <p:nvGrpSpPr>
+        <p:cNvPr id="1" name=""/>
+        <p:cNvGrpSpPr/>
+        <p:nvPr/>
+      </p:nvGrpSpPr>
+      <p:grpSpPr>
+        <a:xfrm>
+          <a:off x="0" y="0"/>
+          <a:ext cx="0" cy="0"/>
+          <a:chOff x="0" y="0"/>
+          <a:chExt cx="0" cy="0"/>
+        </a:xfrm>
+      </p:grpSpPr>
+      <p:sp>
+        <p:nvSpPr>
+          <p:cNvPr id="2" name="Title 1">
+            <a:extLst>
+              <a:ext uri="{FF2B5EF4-FFF2-40B4-BE49-F238E27FC236}">
                 <a16:creationId xmlns:a16="http://schemas.microsoft.com/office/drawing/2014/main" id="{AC005CA8-1CC9-B945-8B41-835F480E8FCE}"/>
               </a:ext>
             </a:extLst>
@@ -7288,7 +7966,7 @@
 </p:sld>
 </file>
 
-<file path=ppt/slides/slide2.xml><?xml version="1.0" encoding="utf-8"?>
+<file path=ppt/slides/slide22.xml><?xml version="1.0" encoding="utf-8"?>
 <p:sld xmlns:a="http://schemas.openxmlformats.org/drawingml/2006/main" xmlns:r="http://schemas.openxmlformats.org/officeDocument/2006/relationships" xmlns:p="http://schemas.openxmlformats.org/presentationml/2006/main">
   <p:cSld>
     <p:spTree>
@@ -7310,91 +7988,6 @@
           <p:cNvPr id="2" name="Title 1">
             <a:extLst>
               <a:ext uri="{FF2B5EF4-FFF2-40B4-BE49-F238E27FC236}">
-                <a16:creationId xmlns:a16="http://schemas.microsoft.com/office/drawing/2014/main" id="{786C86F8-E267-0D46-B219-0ADCF4337BA9}"/>
-              </a:ext>
-            </a:extLst>
-          </p:cNvPr>
-          <p:cNvSpPr>
-            <a:spLocks noGrp="1"/>
-          </p:cNvSpPr>
-          <p:nvPr>
-            <p:ph type="ctrTitle"/>
-          </p:nvPr>
-        </p:nvSpPr>
-        <p:spPr/>
-        <p:txBody>
-          <a:bodyPr>
-            <a:normAutofit fontScale="90000"/>
-          </a:bodyPr>
-          <a:lstStyle/>
-          <a:p>
-            <a:r>
-              <a:rPr lang="en-US" dirty="0"/>
-              <a:t>Linear Least Squares, Regression, and More Fun Stuff!!! Part 1. </a:t>
-            </a:r>
-          </a:p>
-        </p:txBody>
-      </p:sp>
-      <p:sp>
-        <p:nvSpPr>
-          <p:cNvPr id="3" name="Subtitle 2">
-            <a:extLst>
-              <a:ext uri="{FF2B5EF4-FFF2-40B4-BE49-F238E27FC236}">
-                <a16:creationId xmlns:a16="http://schemas.microsoft.com/office/drawing/2014/main" id="{5FBA7666-BF3D-1449-A59F-D3BBC097A719}"/>
-              </a:ext>
-            </a:extLst>
-          </p:cNvPr>
-          <p:cNvSpPr>
-            <a:spLocks noGrp="1"/>
-          </p:cNvSpPr>
-          <p:nvPr>
-            <p:ph type="subTitle" idx="1"/>
-          </p:nvPr>
-        </p:nvSpPr>
-        <p:spPr/>
-        <p:txBody>
-          <a:bodyPr/>
-          <a:lstStyle/>
-          <a:p>
-            <a:endParaRPr lang="en-US"/>
-          </a:p>
-        </p:txBody>
-      </p:sp>
-    </p:spTree>
-    <p:extLst>
-      <p:ext uri="{BB962C8B-B14F-4D97-AF65-F5344CB8AC3E}">
-        <p14:creationId xmlns:p14="http://schemas.microsoft.com/office/powerpoint/2010/main" val="3076179563"/>
-      </p:ext>
-    </p:extLst>
-  </p:cSld>
-  <p:clrMapOvr>
-    <a:masterClrMapping/>
-  </p:clrMapOvr>
-</p:sld>
-</file>
-
-<file path=ppt/slides/slide20.xml><?xml version="1.0" encoding="utf-8"?>
-<p:sld xmlns:a="http://schemas.openxmlformats.org/drawingml/2006/main" xmlns:r="http://schemas.openxmlformats.org/officeDocument/2006/relationships" xmlns:p="http://schemas.openxmlformats.org/presentationml/2006/main">
-  <p:cSld>
-    <p:spTree>
-      <p:nvGrpSpPr>
-        <p:cNvPr id="1" name=""/>
-        <p:cNvGrpSpPr/>
-        <p:nvPr/>
-      </p:nvGrpSpPr>
-      <p:grpSpPr>
-        <a:xfrm>
-          <a:off x="0" y="0"/>
-          <a:ext cx="0" cy="0"/>
-          <a:chOff x="0" y="0"/>
-          <a:chExt cx="0" cy="0"/>
-        </a:xfrm>
-      </p:grpSpPr>
-      <p:sp>
-        <p:nvSpPr>
-          <p:cNvPr id="2" name="Title 1">
-            <a:extLst>
-              <a:ext uri="{FF2B5EF4-FFF2-40B4-BE49-F238E27FC236}">
                 <a16:creationId xmlns:a16="http://schemas.microsoft.com/office/drawing/2014/main" id="{D488AB2B-8325-23DD-372E-361893A4DCC3}"/>
               </a:ext>
             </a:extLst>
@@ -7546,7 +8139,7 @@
 </p:sld>
 </file>
 
-<file path=ppt/slides/slide21.xml><?xml version="1.0" encoding="utf-8"?>
+<file path=ppt/slides/slide23.xml><?xml version="1.0" encoding="utf-8"?>
 <p:sld xmlns:a="http://schemas.openxmlformats.org/drawingml/2006/main" xmlns:r="http://schemas.openxmlformats.org/officeDocument/2006/relationships" xmlns:p="http://schemas.openxmlformats.org/presentationml/2006/main">
   <p:cSld>
     <p:spTree>
@@ -7734,7 +8327,7 @@
           <p:cNvPr id="2" name="Title 1">
             <a:extLst>
               <a:ext uri="{FF2B5EF4-FFF2-40B4-BE49-F238E27FC236}">
-                <a16:creationId xmlns:a16="http://schemas.microsoft.com/office/drawing/2014/main" id="{C7CA5A1A-326F-8D46-B459-7A1D8843F566}"/>
+                <a16:creationId xmlns:a16="http://schemas.microsoft.com/office/drawing/2014/main" id="{786C86F8-E267-0D46-B219-0ADCF4337BA9}"/>
               </a:ext>
             </a:extLst>
           </p:cNvPr>
@@ -7742,27 +8335,29 @@
             <a:spLocks noGrp="1"/>
           </p:cNvSpPr>
           <p:nvPr>
-            <p:ph type="title"/>
+            <p:ph type="ctrTitle"/>
           </p:nvPr>
         </p:nvSpPr>
         <p:spPr/>
         <p:txBody>
-          <a:bodyPr/>
-          <a:lstStyle/>
-          <a:p>
-            <a:r>
-              <a:rPr lang="en-US" dirty="0"/>
-              <a:t>Linear Regression and Predictive Models</a:t>
-            </a:r>
-          </a:p>
-        </p:txBody>
-      </p:sp>
-      <p:sp>
-        <p:nvSpPr>
-          <p:cNvPr id="3" name="Content Placeholder 2">
+          <a:bodyPr>
+            <a:normAutofit fontScale="90000"/>
+          </a:bodyPr>
+          <a:lstStyle/>
+          <a:p>
+            <a:r>
+              <a:rPr lang="en-US" dirty="0"/>
+              <a:t>Linear Least Squares, Regression, and More Fun Stuff!!! Part 1. </a:t>
+            </a:r>
+          </a:p>
+        </p:txBody>
+      </p:sp>
+      <p:sp>
+        <p:nvSpPr>
+          <p:cNvPr id="3" name="Subtitle 2">
             <a:extLst>
               <a:ext uri="{FF2B5EF4-FFF2-40B4-BE49-F238E27FC236}">
-                <a16:creationId xmlns:a16="http://schemas.microsoft.com/office/drawing/2014/main" id="{D30076FA-E2FC-E243-9C77-DEF990E546C9}"/>
+                <a16:creationId xmlns:a16="http://schemas.microsoft.com/office/drawing/2014/main" id="{5FBA7666-BF3D-1449-A59F-D3BBC097A719}"/>
               </a:ext>
             </a:extLst>
           </p:cNvPr>
@@ -7770,7 +8365,7 @@
             <a:spLocks noGrp="1"/>
           </p:cNvSpPr>
           <p:nvPr>
-            <p:ph idx="1"/>
+            <p:ph type="subTitle" idx="1"/>
           </p:nvPr>
         </p:nvSpPr>
         <p:spPr/>
@@ -7778,56 +8373,14 @@
           <a:bodyPr/>
           <a:lstStyle/>
           <a:p>
-            <a:r>
-              <a:rPr lang="en-US" dirty="0"/>
-              <a:t>Most people have done linear regression before – it is making a line of best fit. </a:t>
-            </a:r>
-          </a:p>
-          <a:p>
-            <a:pPr lvl="1"/>
-            <a:r>
-              <a:rPr lang="en-US" dirty="0"/>
-              <a:t>Result – y = m*x + b line. </a:t>
-            </a:r>
-          </a:p>
-          <a:p>
-            <a:pPr lvl="1"/>
-            <a:r>
-              <a:rPr lang="en-US" dirty="0"/>
-              <a:t>M = slope, b = y intercept. </a:t>
-            </a:r>
-          </a:p>
-          <a:p>
-            <a:r>
-              <a:rPr lang="en-US" b="1" dirty="0"/>
-              <a:t>This process is also a simple predictive model – we provide X and get a prediction for Y. </a:t>
-            </a:r>
-          </a:p>
-          <a:p>
-            <a:r>
-              <a:rPr lang="en-US" dirty="0"/>
-              <a:t>The “regression calculation” uses the training data to “learn” how to generate Y from X.</a:t>
-            </a:r>
-          </a:p>
-          <a:p>
-            <a:pPr lvl="1"/>
-            <a:r>
-              <a:rPr lang="en-US" dirty="0"/>
-              <a:t>That’s the machine learning bit. </a:t>
-            </a:r>
-          </a:p>
-          <a:p>
-            <a:r>
-              <a:rPr lang="en-US" dirty="0"/>
-              <a:t>The process of creating a regression is almost the same as other models, we’ll do later. </a:t>
-            </a:r>
+            <a:endParaRPr lang="en-US"/>
           </a:p>
         </p:txBody>
       </p:sp>
     </p:spTree>
     <p:extLst>
       <p:ext uri="{BB962C8B-B14F-4D97-AF65-F5344CB8AC3E}">
-        <p14:creationId xmlns:p14="http://schemas.microsoft.com/office/powerpoint/2010/main" val="3867077939"/>
+        <p14:creationId xmlns:p14="http://schemas.microsoft.com/office/powerpoint/2010/main" val="3076179563"/>
       </p:ext>
     </p:extLst>
   </p:cSld>
@@ -7859,6 +8412,160 @@
           <p:cNvPr id="2" name="Title 1">
             <a:extLst>
               <a:ext uri="{FF2B5EF4-FFF2-40B4-BE49-F238E27FC236}">
+                <a16:creationId xmlns:a16="http://schemas.microsoft.com/office/drawing/2014/main" id="{C7CA5A1A-326F-8D46-B459-7A1D8843F566}"/>
+              </a:ext>
+            </a:extLst>
+          </p:cNvPr>
+          <p:cNvSpPr>
+            <a:spLocks noGrp="1"/>
+          </p:cNvSpPr>
+          <p:nvPr>
+            <p:ph type="title"/>
+          </p:nvPr>
+        </p:nvSpPr>
+        <p:spPr/>
+        <p:txBody>
+          <a:bodyPr/>
+          <a:lstStyle/>
+          <a:p>
+            <a:r>
+              <a:rPr lang="en-US" dirty="0"/>
+              <a:t>Linear Regression and Predictive Models</a:t>
+            </a:r>
+          </a:p>
+        </p:txBody>
+      </p:sp>
+      <p:sp>
+        <p:nvSpPr>
+          <p:cNvPr id="3" name="Content Placeholder 2">
+            <a:extLst>
+              <a:ext uri="{FF2B5EF4-FFF2-40B4-BE49-F238E27FC236}">
+                <a16:creationId xmlns:a16="http://schemas.microsoft.com/office/drawing/2014/main" id="{D30076FA-E2FC-E243-9C77-DEF990E546C9}"/>
+              </a:ext>
+            </a:extLst>
+          </p:cNvPr>
+          <p:cNvSpPr>
+            <a:spLocks noGrp="1"/>
+          </p:cNvSpPr>
+          <p:nvPr>
+            <p:ph idx="1"/>
+          </p:nvPr>
+        </p:nvSpPr>
+        <p:spPr>
+          <a:xfrm>
+            <a:off x="1451579" y="1853754"/>
+            <a:ext cx="9603275" cy="4199727"/>
+          </a:xfrm>
+        </p:spPr>
+        <p:txBody>
+          <a:bodyPr>
+            <a:normAutofit lnSpcReduction="10000"/>
+          </a:bodyPr>
+          <a:lstStyle/>
+          <a:p>
+            <a:r>
+              <a:rPr lang="en-US" dirty="0"/>
+              <a:t>Most people have done linear regression before – it is making a line of best fit. </a:t>
+            </a:r>
+          </a:p>
+          <a:p>
+            <a:pPr lvl="1"/>
+            <a:r>
+              <a:rPr lang="en-US" dirty="0"/>
+              <a:t>Result – y = m*x + b line. </a:t>
+            </a:r>
+          </a:p>
+          <a:p>
+            <a:pPr lvl="1"/>
+            <a:r>
+              <a:rPr lang="en-US" dirty="0"/>
+              <a:t>M = slope, b = y intercept. </a:t>
+            </a:r>
+          </a:p>
+          <a:p>
+            <a:r>
+              <a:rPr lang="en-US" b="1" dirty="0"/>
+              <a:t>This process is also a simple predictive model – we provide X and get a prediction for Y. </a:t>
+            </a:r>
+          </a:p>
+          <a:p>
+            <a:pPr lvl="1"/>
+            <a:r>
+              <a:rPr lang="en-US" dirty="0"/>
+              <a:t>If we are in a situation where we know X, the model translates that to an expected Y. </a:t>
+            </a:r>
+          </a:p>
+          <a:p>
+            <a:pPr lvl="1"/>
+            <a:r>
+              <a:rPr lang="en-US" dirty="0"/>
+              <a:t>Get the thing we need from the thing we have. </a:t>
+            </a:r>
+          </a:p>
+          <a:p>
+            <a:r>
+              <a:rPr lang="en-US" dirty="0"/>
+              <a:t>The “regression calculation” uses the training data to “learn” how to generate Y from X.</a:t>
+            </a:r>
+          </a:p>
+          <a:p>
+            <a:pPr lvl="1"/>
+            <a:r>
+              <a:rPr lang="en-US" dirty="0"/>
+              <a:t>That’s the machine learning bit. </a:t>
+            </a:r>
+          </a:p>
+          <a:p>
+            <a:r>
+              <a:rPr lang="en-US" dirty="0"/>
+              <a:t>We can make many types of models that do this, the only difference is the internal </a:t>
+            </a:r>
+            <a:r>
+              <a:rPr lang="en-US" i="1" dirty="0"/>
+              <a:t>how</a:t>
+            </a:r>
+            <a:r>
+              <a:rPr lang="en-US" dirty="0"/>
+              <a:t>.  </a:t>
+            </a:r>
+          </a:p>
+        </p:txBody>
+      </p:sp>
+    </p:spTree>
+    <p:extLst>
+      <p:ext uri="{BB962C8B-B14F-4D97-AF65-F5344CB8AC3E}">
+        <p14:creationId xmlns:p14="http://schemas.microsoft.com/office/powerpoint/2010/main" val="3867077939"/>
+      </p:ext>
+    </p:extLst>
+  </p:cSld>
+  <p:clrMapOvr>
+    <a:masterClrMapping/>
+  </p:clrMapOvr>
+</p:sld>
+</file>
+
+<file path=ppt/slides/slide5.xml><?xml version="1.0" encoding="utf-8"?>
+<p:sld xmlns:a="http://schemas.openxmlformats.org/drawingml/2006/main" xmlns:r="http://schemas.openxmlformats.org/officeDocument/2006/relationships" xmlns:p="http://schemas.openxmlformats.org/presentationml/2006/main">
+  <p:cSld>
+    <p:spTree>
+      <p:nvGrpSpPr>
+        <p:cNvPr id="1" name=""/>
+        <p:cNvGrpSpPr/>
+        <p:nvPr/>
+      </p:nvGrpSpPr>
+      <p:grpSpPr>
+        <a:xfrm>
+          <a:off x="0" y="0"/>
+          <a:ext cx="0" cy="0"/>
+          <a:chOff x="0" y="0"/>
+          <a:chExt cx="0" cy="0"/>
+        </a:xfrm>
+      </p:grpSpPr>
+      <p:sp>
+        <p:nvSpPr>
+          <p:cNvPr id="2" name="Title 1">
+            <a:extLst>
+              <a:ext uri="{FF2B5EF4-FFF2-40B4-BE49-F238E27FC236}">
                 <a16:creationId xmlns:a16="http://schemas.microsoft.com/office/drawing/2014/main" id="{63C1714D-69CA-B253-DE74-A5CA82D4CD13}"/>
               </a:ext>
             </a:extLst>
@@ -7900,13 +8607,13 @@
         </p:nvSpPr>
         <p:spPr>
           <a:xfrm>
-            <a:off x="150726" y="1853754"/>
-            <a:ext cx="7799476" cy="4199727"/>
+            <a:off x="120580" y="1853754"/>
+            <a:ext cx="7829622" cy="4199727"/>
           </a:xfrm>
         </p:spPr>
         <p:txBody>
           <a:bodyPr>
-            <a:normAutofit lnSpcReduction="10000"/>
+            <a:normAutofit fontScale="92500" lnSpcReduction="10000"/>
           </a:bodyPr>
           <a:lstStyle/>
           <a:p>
@@ -7919,15 +8626,7 @@
             <a:pPr lvl="1"/>
             <a:r>
               <a:rPr lang="en-US" dirty="0"/>
-              <a:t>E.g. a </a:t>
-            </a:r>
-            <a:r>
-              <a:rPr lang="en-US" dirty="0" err="1"/>
-              <a:t>poisson</a:t>
-            </a:r>
-            <a:r>
-              <a:rPr lang="en-US" dirty="0"/>
-              <a:t> distribution is a model of goals in hockey games.  </a:t>
+              <a:t>E.g. a Poisson distribution is a model of goals in hockey games.  </a:t>
             </a:r>
           </a:p>
           <a:p>
@@ -7948,6 +8647,13 @@
             <a:r>
               <a:rPr lang="en-US" dirty="0"/>
               <a:t>This model is a simplification of reality, “will this person pay their loan”. </a:t>
+            </a:r>
+          </a:p>
+          <a:p>
+            <a:pPr lvl="1"/>
+            <a:r>
+              <a:rPr lang="en-US" dirty="0"/>
+              <a:t>ML models simplify a decision/estimate – will buy, temperature, stock levels…</a:t>
             </a:r>
           </a:p>
           <a:p>
@@ -8045,7 +8751,7 @@
 </p:sld>
 </file>
 
-<file path=ppt/slides/slide5.xml><?xml version="1.0" encoding="utf-8"?>
+<file path=ppt/slides/slide6.xml><?xml version="1.0" encoding="utf-8"?>
 <p:sld xmlns:a="http://schemas.openxmlformats.org/drawingml/2006/main" xmlns:r="http://schemas.openxmlformats.org/officeDocument/2006/relationships" xmlns:p="http://schemas.openxmlformats.org/presentationml/2006/main">
   <p:cSld>
     <p:spTree>
@@ -8111,8 +8817,8 @@
         </p:nvSpPr>
         <p:spPr>
           <a:xfrm>
-            <a:off x="1451579" y="2015732"/>
-            <a:ext cx="5289859" cy="3450613"/>
+            <a:off x="1451579" y="1853754"/>
+            <a:ext cx="5289859" cy="4199727"/>
           </a:xfrm>
           <a:prstGeom prst="rect">
             <a:avLst/>
@@ -8124,14 +8830,13 @@
           </a:bodyPr>
           <a:lstStyle/>
           <a:p>
-            <a:pPr marL="0" indent="0">
+            <a:pPr>
               <a:lnSpc>
                 <a:spcPct val="115000"/>
               </a:lnSpc>
               <a:spcBef>
                 <a:spcPts val="0"/>
               </a:spcBef>
-              <a:buNone/>
             </a:pPr>
             <a:r>
               <a:rPr lang="en" sz="2200" dirty="0"/>
@@ -8159,6 +8864,48 @@
             <a:r>
               <a:rPr lang="en" sz="2200" dirty="0"/>
               <a:t>(income below $23,050 for a family of 4 in 2012).</a:t>
+            </a:r>
+          </a:p>
+          <a:p>
+            <a:pPr>
+              <a:lnSpc>
+                <a:spcPct val="115000"/>
+              </a:lnSpc>
+              <a:spcBef>
+                <a:spcPts val="0"/>
+              </a:spcBef>
+            </a:pPr>
+            <a:r>
+              <a:rPr lang="en" sz="2200" dirty="0"/>
+              <a:t>We have 1 input (x) – HS grad. </a:t>
+            </a:r>
+          </a:p>
+          <a:p>
+            <a:pPr>
+              <a:lnSpc>
+                <a:spcPct val="115000"/>
+              </a:lnSpc>
+              <a:spcBef>
+                <a:spcPts val="0"/>
+              </a:spcBef>
+            </a:pPr>
+            <a:r>
+              <a:rPr lang="en" sz="2200" dirty="0"/>
+              <a:t>We have 1 output (y) - % in poverty. </a:t>
+            </a:r>
+          </a:p>
+          <a:p>
+            <a:pPr>
+              <a:lnSpc>
+                <a:spcPct val="115000"/>
+              </a:lnSpc>
+              <a:spcBef>
+                <a:spcPts val="0"/>
+              </a:spcBef>
+            </a:pPr>
+            <a:r>
+              <a:rPr lang="en" sz="2200" dirty="0"/>
+              <a:t>This real relationship is complex, this model is a simplified version. </a:t>
             </a:r>
             <a:endParaRPr sz="2200" dirty="0"/>
           </a:p>
@@ -8200,7 +8947,7 @@
 </p:sld>
 </file>
 
-<file path=ppt/slides/slide6.xml><?xml version="1.0" encoding="utf-8"?>
+<file path=ppt/slides/slide7.xml><?xml version="1.0" encoding="utf-8"?>
 <p:sld xmlns:a="http://schemas.openxmlformats.org/drawingml/2006/main" xmlns:r="http://schemas.openxmlformats.org/officeDocument/2006/relationships" xmlns:p="http://schemas.openxmlformats.org/presentationml/2006/main">
   <p:cSld>
     <p:spTree>
@@ -8471,7 +9218,7 @@
 </p:sld>
 </file>
 
-<file path=ppt/slides/slide7.xml><?xml version="1.0" encoding="utf-8"?>
+<file path=ppt/slides/slide8.xml><?xml version="1.0" encoding="utf-8"?>
 <p:sld xmlns:a="http://schemas.openxmlformats.org/drawingml/2006/main" xmlns:r="http://schemas.openxmlformats.org/officeDocument/2006/relationships" xmlns:p="http://schemas.openxmlformats.org/presentationml/2006/main">
   <p:cSld>
     <p:spTree>
@@ -8748,7 +9495,7 @@
 </p:sld>
 </file>
 
-<file path=ppt/slides/slide8.xml><?xml version="1.0" encoding="utf-8"?>
+<file path=ppt/slides/slide9.xml><?xml version="1.0" encoding="utf-8"?>
 <p:sld xmlns:a="http://schemas.openxmlformats.org/drawingml/2006/main" xmlns:r="http://schemas.openxmlformats.org/officeDocument/2006/relationships" xmlns:p="http://schemas.openxmlformats.org/presentationml/2006/main">
   <p:cSld>
     <p:spTree>
@@ -8996,268 +9743,6 @@
           </a:ln>
         </p:spPr>
       </p:pic>
-    </p:spTree>
-  </p:cSld>
-  <p:clrMapOvr>
-    <a:masterClrMapping/>
-  </p:clrMapOvr>
-</p:sld>
-</file>
-
-<file path=ppt/slides/slide9.xml><?xml version="1.0" encoding="utf-8"?>
-<p:sld xmlns:a="http://schemas.openxmlformats.org/drawingml/2006/main" xmlns:r="http://schemas.openxmlformats.org/officeDocument/2006/relationships" xmlns:p="http://schemas.openxmlformats.org/presentationml/2006/main">
-  <p:cSld>
-    <p:spTree>
-      <p:nvGrpSpPr>
-        <p:cNvPr id="1" name="Shape 162"/>
-        <p:cNvGrpSpPr/>
-        <p:nvPr/>
-      </p:nvGrpSpPr>
-      <p:grpSpPr>
-        <a:xfrm>
-          <a:off x="0" y="0"/>
-          <a:ext cx="0" cy="0"/>
-          <a:chOff x="0" y="0"/>
-          <a:chExt cx="0" cy="0"/>
-        </a:xfrm>
-      </p:grpSpPr>
-      <p:sp>
-        <p:nvSpPr>
-          <p:cNvPr id="163" name="Google Shape;163;p31"/>
-          <p:cNvSpPr txBox="1">
-            <a:spLocks noGrp="1"/>
-          </p:cNvSpPr>
-          <p:nvPr>
-            <p:ph type="title"/>
-          </p:nvPr>
-        </p:nvSpPr>
-        <p:spPr>
-          <a:xfrm>
-            <a:off x="1981200" y="-12"/>
-            <a:ext cx="8229600" cy="1143000"/>
-          </a:xfrm>
-          <a:prstGeom prst="rect">
-            <a:avLst/>
-          </a:prstGeom>
-        </p:spPr>
-        <p:txBody>
-          <a:bodyPr spcFirstLastPara="1" vert="horz" wrap="square" lIns="91425" tIns="91425" rIns="91425" bIns="91425" rtlCol="0" anchor="b" anchorCtr="0">
-            <a:noAutofit/>
-          </a:bodyPr>
-          <a:lstStyle/>
-          <a:p>
-            <a:r>
-              <a:rPr lang="en">
-                <a:solidFill>
-                  <a:schemeClr val="accent1"/>
-                </a:solidFill>
-              </a:rPr>
-              <a:t>Residuals (cont.)</a:t>
-            </a:r>
-            <a:endParaRPr baseline="30000">
-              <a:solidFill>
-                <a:schemeClr val="accent1"/>
-              </a:solidFill>
-            </a:endParaRPr>
-          </a:p>
-        </p:txBody>
-      </p:sp>
-      <p:sp>
-        <p:nvSpPr>
-          <p:cNvPr id="164" name="Google Shape;164;p31"/>
-          <p:cNvSpPr txBox="1">
-            <a:spLocks noGrp="1"/>
-          </p:cNvSpPr>
-          <p:nvPr>
-            <p:ph type="body" idx="1"/>
-          </p:nvPr>
-        </p:nvSpPr>
-        <p:spPr>
-          <a:xfrm flipH="1">
-            <a:off x="1981075" y="1305775"/>
-            <a:ext cx="7822200" cy="1058400"/>
-          </a:xfrm>
-          <a:prstGeom prst="rect">
-            <a:avLst/>
-          </a:prstGeom>
-        </p:spPr>
-        <p:txBody>
-          <a:bodyPr spcFirstLastPara="1" vert="horz" wrap="square" lIns="91425" tIns="91425" rIns="91425" bIns="91425" rtlCol="0" anchor="t" anchorCtr="0">
-            <a:noAutofit/>
-          </a:bodyPr>
-          <a:lstStyle/>
-          <a:p>
-            <a:pPr marL="0" indent="0">
-              <a:lnSpc>
-                <a:spcPct val="115000"/>
-              </a:lnSpc>
-              <a:spcBef>
-                <a:spcPts val="0"/>
-              </a:spcBef>
-              <a:buNone/>
-            </a:pPr>
-            <a:r>
-              <a:rPr lang="en" sz="2200"/>
-              <a:t>Residual is the difference between the observed (y</a:t>
-            </a:r>
-            <a:r>
-              <a:rPr lang="en" sz="2200" baseline="-25000"/>
-              <a:t>i</a:t>
-            </a:r>
-            <a:r>
-              <a:rPr lang="en" sz="2200"/>
-              <a:t>) and predicted ŷ</a:t>
-            </a:r>
-            <a:r>
-              <a:rPr lang="en" sz="2200" baseline="-25000"/>
-              <a:t>i</a:t>
-            </a:r>
-            <a:r>
-              <a:rPr lang="en" sz="2200"/>
-              <a:t>.</a:t>
-            </a:r>
-            <a:endParaRPr sz="2200"/>
-          </a:p>
-        </p:txBody>
-      </p:sp>
-      <p:pic>
-        <p:nvPicPr>
-          <p:cNvPr id="165" name="Google Shape;165;p31"/>
-          <p:cNvPicPr preferRelativeResize="0"/>
-          <p:nvPr/>
-        </p:nvPicPr>
-        <p:blipFill>
-          <a:blip r:embed="rId3">
-            <a:alphaModFix/>
-          </a:blip>
-          <a:stretch>
-            <a:fillRect/>
-          </a:stretch>
-        </p:blipFill>
-        <p:spPr>
-          <a:xfrm>
-            <a:off x="4249226" y="2081475"/>
-            <a:ext cx="1806199" cy="598500"/>
-          </a:xfrm>
-          <a:prstGeom prst="rect">
-            <a:avLst/>
-          </a:prstGeom>
-          <a:noFill/>
-          <a:ln>
-            <a:noFill/>
-          </a:ln>
-        </p:spPr>
-      </p:pic>
-      <p:pic>
-        <p:nvPicPr>
-          <p:cNvPr id="166" name="Google Shape;166;p31"/>
-          <p:cNvPicPr preferRelativeResize="0"/>
-          <p:nvPr/>
-        </p:nvPicPr>
-        <p:blipFill>
-          <a:blip r:embed="rId4">
-            <a:alphaModFix/>
-          </a:blip>
-          <a:stretch>
-            <a:fillRect/>
-          </a:stretch>
-        </p:blipFill>
-        <p:spPr>
-          <a:xfrm>
-            <a:off x="1981200" y="2624715"/>
-            <a:ext cx="4560998" cy="3549325"/>
-          </a:xfrm>
-          <a:prstGeom prst="rect">
-            <a:avLst/>
-          </a:prstGeom>
-          <a:noFill/>
-          <a:ln>
-            <a:noFill/>
-          </a:ln>
-        </p:spPr>
-      </p:pic>
-      <p:sp>
-        <p:nvSpPr>
-          <p:cNvPr id="167" name="Google Shape;167;p31"/>
-          <p:cNvSpPr txBox="1">
-            <a:spLocks noGrp="1"/>
-          </p:cNvSpPr>
-          <p:nvPr>
-            <p:ph type="body" idx="1"/>
-          </p:nvPr>
-        </p:nvSpPr>
-        <p:spPr>
-          <a:xfrm flipH="1">
-            <a:off x="7082050" y="2793025"/>
-            <a:ext cx="2774700" cy="3140700"/>
-          </a:xfrm>
-          <a:prstGeom prst="rect">
-            <a:avLst/>
-          </a:prstGeom>
-        </p:spPr>
-        <p:txBody>
-          <a:bodyPr spcFirstLastPara="1" vert="horz" wrap="square" lIns="91425" tIns="91425" rIns="91425" bIns="91425" rtlCol="0" anchor="t" anchorCtr="0">
-            <a:noAutofit/>
-          </a:bodyPr>
-          <a:lstStyle/>
-          <a:p>
-            <a:pPr marL="0" indent="0">
-              <a:lnSpc>
-                <a:spcPct val="115000"/>
-              </a:lnSpc>
-              <a:spcBef>
-                <a:spcPts val="0"/>
-              </a:spcBef>
-              <a:buNone/>
-            </a:pPr>
-            <a:r>
-              <a:rPr lang="en" sz="2200"/>
-              <a:t>% living in poverty in DC is 5.44% more than predicted.</a:t>
-            </a:r>
-            <a:endParaRPr sz="2200"/>
-          </a:p>
-          <a:p>
-            <a:pPr marL="0" indent="0">
-              <a:lnSpc>
-                <a:spcPct val="115000"/>
-              </a:lnSpc>
-              <a:spcBef>
-                <a:spcPts val="0"/>
-              </a:spcBef>
-              <a:buNone/>
-            </a:pPr>
-            <a:endParaRPr sz="2200"/>
-          </a:p>
-          <a:p>
-            <a:pPr marL="0" indent="0">
-              <a:lnSpc>
-                <a:spcPct val="115000"/>
-              </a:lnSpc>
-              <a:spcBef>
-                <a:spcPts val="0"/>
-              </a:spcBef>
-              <a:buNone/>
-            </a:pPr>
-            <a:r>
-              <a:rPr lang="en" sz="2200"/>
-              <a:t>% living in poverty in RI is 4.16% less than predicted.</a:t>
-            </a:r>
-            <a:endParaRPr sz="2200"/>
-          </a:p>
-          <a:p>
-            <a:pPr marL="0" indent="0">
-              <a:lnSpc>
-                <a:spcPct val="115000"/>
-              </a:lnSpc>
-              <a:spcBef>
-                <a:spcPts val="0"/>
-              </a:spcBef>
-              <a:buNone/>
-            </a:pPr>
-            <a:endParaRPr sz="2200"/>
-          </a:p>
-        </p:txBody>
-      </p:sp>
     </p:spTree>
   </p:cSld>
   <p:clrMapOvr>
